--- a/decks/observability-cost/observability-cost.pptx
+++ b/decks/observability-cost/observability-cost.pptx
@@ -1299,6 +1299,13 @@
 <file path=ppt/slides/slide1.xml><?xml version="1.0" encoding="utf-8"?>
 <p:sld xmlns:a="http://schemas.openxmlformats.org/drawingml/2006/main" xmlns:r="http://schemas.openxmlformats.org/officeDocument/2006/relationships" xmlns:p="http://schemas.openxmlformats.org/presentationml/2006/main">
   <p:cSld name="Slide 1">
+    <p:bg>
+      <p:bgPr>
+        <a:solidFill>
+          <a:srgbClr val="F7F4EE"/>
+        </a:solidFill>
+      </p:bgPr>
+    </p:bg>
     <p:spTree>
       <p:nvGrpSpPr>
         <p:cNvPr id="1" name=""/>
@@ -1313,30 +1320,390 @@
           <a:chExt cx="0" cy="0"/>
         </a:xfrm>
       </p:grpSpPr>
-      <p:pic>
-        <p:nvPicPr>
-          <p:cNvPr id="2" name="Image 0" descr="/tmp/slide-1787840555344-6r7zb0chav.png">    </p:cNvPr>
-          <p:cNvPicPr>
-            <a:picLocks noChangeAspect="1"/>
-          </p:cNvPicPr>
-          <p:nvPr/>
-        </p:nvPicPr>
-        <p:blipFill>
-          <a:blip r:embed="rId1"/>
-          <a:stretch>
-            <a:fillRect/>
-          </a:stretch>
-        </p:blipFill>
-        <p:spPr>
-          <a:xfrm>
-            <a:off x="0" y="0"/>
-            <a:ext cx="12188952" cy="6858000"/>
-          </a:xfrm>
-          <a:prstGeom prst="rect">
-            <a:avLst/>
-          </a:prstGeom>
-        </p:spPr>
-      </p:pic>
+      <p:sp>
+        <p:nvSpPr>
+          <p:cNvPr id="2" name="Text 0"/>
+          <p:cNvSpPr/>
+          <p:nvPr/>
+        </p:nvSpPr>
+        <p:spPr>
+          <a:xfrm>
+            <a:off x="677098" y="541734"/>
+            <a:ext cx="11051451" cy="260747"/>
+          </a:xfrm>
+          <a:prstGeom prst="rect">
+            <a:avLst/>
+          </a:prstGeom>
+          <a:noFill/>
+          <a:ln/>
+        </p:spPr>
+        <p:txBody>
+          <a:bodyPr wrap="square" lIns="0" tIns="0" rIns="0" bIns="0" rtlCol="0" anchor="t"/>
+          <a:lstStyle/>
+          <a:p>
+            <a:pPr algn="l" indent="0" marL="0">
+              <a:lnSpc>
+                <a:spcPts val="2053"/>
+              </a:lnSpc>
+              <a:buNone/>
+            </a:pPr>
+            <a:r>
+              <a:rPr lang="en-US" sz="1466" dirty="0">
+                <a:solidFill>
+                  <a:srgbClr val="7A7164"/>
+                </a:solidFill>
+                <a:latin typeface="Inter" pitchFamily="34" charset="0"/>
+                <a:ea typeface="Inter" pitchFamily="34" charset="-122"/>
+                <a:cs typeface="Inter" pitchFamily="34" charset="-120"/>
+              </a:rPr>
+              <a:t>PLATFORM ENGINEERING · OBSERVABILITY BUDGET</a:t>
+            </a:r>
+            <a:endParaRPr lang="en-US" sz="1466" dirty="0"/>
+          </a:p>
+        </p:txBody>
+      </p:sp>
+      <p:sp>
+        <p:nvSpPr>
+          <p:cNvPr id="3" name="Text 1"/>
+          <p:cNvSpPr/>
+          <p:nvPr/>
+        </p:nvSpPr>
+        <p:spPr>
+          <a:xfrm>
+            <a:off x="677098" y="937816"/>
+            <a:ext cx="10834756" cy="12700"/>
+          </a:xfrm>
+          <a:prstGeom prst="rect">
+            <a:avLst/>
+          </a:prstGeom>
+          <a:solidFill>
+            <a:srgbClr val="DAD3C4"/>
+          </a:solidFill>
+          <a:ln/>
+        </p:spPr>
+        <p:txBody>
+          <a:bodyPr wrap="square" rtlCol="0" anchor="ctr"/>
+          <a:lstStyle/>
+          <a:p>
+            <a:pPr indent="0" marL="0">
+              <a:buNone/>
+            </a:pPr>
+            <a:endParaRPr lang="en-US" dirty="0"/>
+          </a:p>
+        </p:txBody>
+      </p:sp>
+      <p:sp>
+        <p:nvSpPr>
+          <p:cNvPr id="4" name="Text 2"/>
+          <p:cNvSpPr/>
+          <p:nvPr/>
+        </p:nvSpPr>
+        <p:spPr>
+          <a:xfrm>
+            <a:off x="677098" y="1289050"/>
+            <a:ext cx="11051451" cy="2560241"/>
+          </a:xfrm>
+          <a:prstGeom prst="rect">
+            <a:avLst/>
+          </a:prstGeom>
+          <a:noFill/>
+          <a:ln/>
+        </p:spPr>
+        <p:txBody>
+          <a:bodyPr wrap="square" lIns="0" tIns="0" rIns="0" bIns="0" rtlCol="0" anchor="t"/>
+          <a:lstStyle/>
+          <a:p>
+            <a:pPr algn="l" indent="0" marL="0">
+              <a:lnSpc>
+                <a:spcPts val="10079"/>
+              </a:lnSpc>
+              <a:spcAft>
+                <a:spcPts val="2933"/>
+              </a:spcAft>
+              <a:buNone/>
+            </a:pPr>
+            <a:r>
+              <a:rPr lang="en-US" sz="7466" dirty="0">
+                <a:solidFill>
+                  <a:srgbClr val="1F1B16"/>
+                </a:solidFill>
+                <a:latin typeface="Source Serif 4" pitchFamily="34" charset="0"/>
+                <a:ea typeface="Source Serif 4" pitchFamily="34" charset="-122"/>
+                <a:cs typeface="Source Serif 4" pitchFamily="34" charset="-120"/>
+              </a:rPr>
+              <a:t>Logs cost the most</a:t>
+            </a:r>
+            <a:endParaRPr lang="en-US" sz="7466" dirty="0"/>
+          </a:p>
+          <a:p>
+            <a:pPr algn="l" indent="0" marL="0">
+              <a:lnSpc>
+                <a:spcPts val="10079"/>
+              </a:lnSpc>
+              <a:spcAft>
+                <a:spcPts val="2933"/>
+              </a:spcAft>
+              <a:buNone/>
+            </a:pPr>
+            <a:r>
+              <a:rPr lang="en-US" sz="7466" dirty="0">
+                <a:solidFill>
+                  <a:srgbClr val="1F1B16"/>
+                </a:solidFill>
+                <a:latin typeface="Source Serif 4" pitchFamily="34" charset="0"/>
+                <a:ea typeface="Source Serif 4" pitchFamily="34" charset="-122"/>
+                <a:cs typeface="Source Serif 4" pitchFamily="34" charset="-120"/>
+              </a:rPr>
+              <a:t>and get read the least</a:t>
+            </a:r>
+            <a:endParaRPr lang="en-US" sz="7466" dirty="0"/>
+          </a:p>
+        </p:txBody>
+      </p:sp>
+      <p:sp>
+        <p:nvSpPr>
+          <p:cNvPr id="5" name="Shape 3"/>
+          <p:cNvSpPr/>
+          <p:nvPr/>
+        </p:nvSpPr>
+        <p:spPr>
+          <a:xfrm>
+            <a:off x="727885" y="4221758"/>
+            <a:ext cx="0" cy="812403"/>
+          </a:xfrm>
+          <a:prstGeom prst="line">
+            <a:avLst/>
+          </a:prstGeom>
+          <a:noFill/>
+          <a:ln w="101587">
+            <a:solidFill>
+              <a:srgbClr val="B5503A"/>
+            </a:solidFill>
+            <a:prstDash val="solid"/>
+          </a:ln>
+        </p:spPr>
+      </p:sp>
+      <p:sp>
+        <p:nvSpPr>
+          <p:cNvPr id="6" name="Text 4"/>
+          <p:cNvSpPr/>
+          <p:nvPr/>
+        </p:nvSpPr>
+        <p:spPr>
+          <a:xfrm>
+            <a:off x="1049472" y="4221758"/>
+            <a:ext cx="10671630" cy="812403"/>
+          </a:xfrm>
+          <a:prstGeom prst="rect">
+            <a:avLst/>
+          </a:prstGeom>
+          <a:noFill/>
+          <a:ln/>
+        </p:spPr>
+        <p:txBody>
+          <a:bodyPr wrap="square" lIns="0" tIns="0" rIns="0" bIns="0" rtlCol="0" anchor="t"/>
+          <a:lstStyle/>
+          <a:p>
+            <a:pPr algn="l" indent="0" marL="0">
+              <a:lnSpc>
+                <a:spcPts val="3200"/>
+              </a:lnSpc>
+              <a:buNone/>
+            </a:pPr>
+            <a:r>
+              <a:rPr lang="en-US" sz="2133" dirty="0">
+                <a:solidFill>
+                  <a:srgbClr val="1F1B16"/>
+                </a:solidFill>
+                <a:latin typeface="Inter" pitchFamily="34" charset="0"/>
+                <a:ea typeface="Inter" pitchFamily="34" charset="-122"/>
+                <a:cs typeface="Inter" pitchFamily="34" charset="-120"/>
+              </a:rPr>
+              <a:t>Metrics, logs and traces answer different questions and have different cost</a:t>
+            </a:r>
+            <a:endParaRPr lang="en-US" sz="2133" dirty="0"/>
+          </a:p>
+          <a:p>
+            <a:pPr algn="l" indent="0" marL="0">
+              <a:lnSpc>
+                <a:spcPts val="3200"/>
+              </a:lnSpc>
+              <a:buNone/>
+            </a:pPr>
+            <a:r>
+              <a:rPr lang="en-US" sz="2133" dirty="0">
+                <a:solidFill>
+                  <a:srgbClr val="1F1B16"/>
+                </a:solidFill>
+                <a:latin typeface="Inter" pitchFamily="34" charset="0"/>
+                <a:ea typeface="Inter" pitchFamily="34" charset="-122"/>
+                <a:cs typeface="Inter" pitchFamily="34" charset="-120"/>
+              </a:rPr>
+              <a:t>    curves. One line item hides all three.</a:t>
+            </a:r>
+            <a:endParaRPr lang="en-US" sz="2133" dirty="0"/>
+          </a:p>
+        </p:txBody>
+      </p:sp>
+      <p:sp>
+        <p:nvSpPr>
+          <p:cNvPr id="7" name="Text 5"/>
+          <p:cNvSpPr/>
+          <p:nvPr/>
+        </p:nvSpPr>
+        <p:spPr>
+          <a:xfrm>
+            <a:off x="677098" y="5375870"/>
+            <a:ext cx="11051451" cy="260747"/>
+          </a:xfrm>
+          <a:prstGeom prst="rect">
+            <a:avLst/>
+          </a:prstGeom>
+          <a:noFill/>
+          <a:ln/>
+        </p:spPr>
+        <p:txBody>
+          <a:bodyPr wrap="square" lIns="0" tIns="0" rIns="0" bIns="0" rtlCol="0" anchor="t"/>
+          <a:lstStyle/>
+          <a:p>
+            <a:pPr algn="l" indent="0" marL="0">
+              <a:lnSpc>
+                <a:spcPts val="2053"/>
+              </a:lnSpc>
+              <a:spcBef>
+                <a:spcPts val="2690"/>
+              </a:spcBef>
+              <a:buNone/>
+            </a:pPr>
+            <a:r>
+              <a:rPr lang="en-US" sz="1466" dirty="0">
+                <a:solidFill>
+                  <a:srgbClr val="7A7164"/>
+                </a:solidFill>
+                <a:latin typeface="Inter" pitchFamily="34" charset="0"/>
+                <a:ea typeface="Inter" pitchFamily="34" charset="-122"/>
+                <a:cs typeface="Inter" pitchFamily="34" charset="-120"/>
+              </a:rPr>
+              <a:t>PRESENTER · TEAM</a:t>
+            </a:r>
+            <a:endParaRPr lang="en-US" sz="1466" dirty="0"/>
+          </a:p>
+        </p:txBody>
+      </p:sp>
+      <p:sp>
+        <p:nvSpPr>
+          <p:cNvPr id="8" name="Text 6"/>
+          <p:cNvSpPr/>
+          <p:nvPr/>
+        </p:nvSpPr>
+        <p:spPr>
+          <a:xfrm>
+            <a:off x="677098" y="5907484"/>
+            <a:ext cx="10834756" cy="12700"/>
+          </a:xfrm>
+          <a:prstGeom prst="rect">
+            <a:avLst/>
+          </a:prstGeom>
+          <a:solidFill>
+            <a:srgbClr val="DAD3C4"/>
+          </a:solidFill>
+          <a:ln/>
+        </p:spPr>
+        <p:txBody>
+          <a:bodyPr wrap="square" rtlCol="0" anchor="ctr"/>
+          <a:lstStyle/>
+          <a:p>
+            <a:pPr indent="0" marL="0">
+              <a:buNone/>
+            </a:pPr>
+            <a:endParaRPr lang="en-US" dirty="0"/>
+          </a:p>
+        </p:txBody>
+      </p:sp>
+      <p:sp>
+        <p:nvSpPr>
+          <p:cNvPr id="9" name="Text 7"/>
+          <p:cNvSpPr/>
+          <p:nvPr/>
+        </p:nvSpPr>
+        <p:spPr>
+          <a:xfrm>
+            <a:off x="677098" y="6055519"/>
+            <a:ext cx="728885" cy="260747"/>
+          </a:xfrm>
+          <a:prstGeom prst="rect">
+            <a:avLst/>
+          </a:prstGeom>
+          <a:noFill/>
+          <a:ln/>
+        </p:spPr>
+        <p:txBody>
+          <a:bodyPr wrap="square" lIns="0" tIns="0" rIns="0" bIns="0" rtlCol="0" anchor="t"/>
+          <a:lstStyle/>
+          <a:p>
+            <a:pPr algn="l" indent="0" marL="0">
+              <a:lnSpc>
+                <a:spcPts val="2053"/>
+              </a:lnSpc>
+              <a:buNone/>
+            </a:pPr>
+            <a:r>
+              <a:rPr lang="en-US" sz="1466" dirty="0">
+                <a:solidFill>
+                  <a:srgbClr val="7A7164"/>
+                </a:solidFill>
+                <a:latin typeface="Inter" pitchFamily="34" charset="0"/>
+                <a:ea typeface="Inter" pitchFamily="34" charset="-122"/>
+                <a:cs typeface="Inter" pitchFamily="34" charset="-120"/>
+              </a:rPr>
+              <a:t>01 / 06</a:t>
+            </a:r>
+            <a:endParaRPr lang="en-US" sz="1466" dirty="0"/>
+          </a:p>
+        </p:txBody>
+      </p:sp>
+      <p:sp>
+        <p:nvSpPr>
+          <p:cNvPr id="10" name="Text 8"/>
+          <p:cNvSpPr/>
+          <p:nvPr/>
+        </p:nvSpPr>
+        <p:spPr>
+          <a:xfrm>
+            <a:off x="4725655" y="6055519"/>
+            <a:ext cx="6786199" cy="260747"/>
+          </a:xfrm>
+          <a:prstGeom prst="rect">
+            <a:avLst/>
+          </a:prstGeom>
+          <a:noFill/>
+          <a:ln/>
+        </p:spPr>
+        <p:txBody>
+          <a:bodyPr wrap="square" lIns="0" tIns="0" rIns="0" bIns="0" rtlCol="0" anchor="t"/>
+          <a:lstStyle/>
+          <a:p>
+            <a:pPr algn="r" indent="0" marL="0">
+              <a:lnSpc>
+                <a:spcPts val="2053"/>
+              </a:lnSpc>
+              <a:buNone/>
+            </a:pPr>
+            <a:r>
+              <a:rPr lang="en-US" sz="1466" dirty="0">
+                <a:solidFill>
+                  <a:srgbClr val="7A7164"/>
+                </a:solidFill>
+                <a:latin typeface="Inter" pitchFamily="34" charset="0"/>
+                <a:ea typeface="Inter" pitchFamily="34" charset="-122"/>
+                <a:cs typeface="Inter" pitchFamily="34" charset="-120"/>
+              </a:rPr>
+              <a:t>Source: none — this deck cites no cost figures; the argument is structural.</a:t>
+            </a:r>
+            <a:endParaRPr lang="en-US" sz="1466" dirty="0"/>
+          </a:p>
+        </p:txBody>
+      </p:sp>
     </p:spTree>
   </p:cSld>
   <p:clrMapOvr>
@@ -1348,6 +1715,13 @@
 <file path=ppt/slides/slide2.xml><?xml version="1.0" encoding="utf-8"?>
 <p:sld xmlns:a="http://schemas.openxmlformats.org/drawingml/2006/main" xmlns:r="http://schemas.openxmlformats.org/officeDocument/2006/relationships" xmlns:p="http://schemas.openxmlformats.org/presentationml/2006/main">
   <p:cSld name="Slide 2">
+    <p:bg>
+      <p:bgPr>
+        <a:solidFill>
+          <a:srgbClr val="F7F4EE"/>
+        </a:solidFill>
+      </p:bgPr>
+    </p:bg>
     <p:spTree>
       <p:nvGrpSpPr>
         <p:cNvPr id="1" name=""/>
@@ -1362,30 +1736,1304 @@
           <a:chExt cx="0" cy="0"/>
         </a:xfrm>
       </p:grpSpPr>
-      <p:pic>
-        <p:nvPicPr>
-          <p:cNvPr id="2" name="Image 0" descr="/tmp/slide-1787840555624-ja1c83n9rkf.png">    </p:cNvPr>
-          <p:cNvPicPr>
-            <a:picLocks noChangeAspect="1"/>
-          </p:cNvPicPr>
-          <p:nvPr/>
-        </p:nvPicPr>
-        <p:blipFill>
-          <a:blip r:embed="rId1"/>
-          <a:stretch>
-            <a:fillRect/>
-          </a:stretch>
-        </p:blipFill>
-        <p:spPr>
-          <a:xfrm>
-            <a:off x="0" y="0"/>
-            <a:ext cx="12188952" cy="6858000"/>
-          </a:xfrm>
-          <a:prstGeom prst="rect">
-            <a:avLst/>
-          </a:prstGeom>
-        </p:spPr>
-      </p:pic>
+      <p:sp>
+        <p:nvSpPr>
+          <p:cNvPr id="2" name="Text 0"/>
+          <p:cNvSpPr/>
+          <p:nvPr/>
+        </p:nvSpPr>
+        <p:spPr>
+          <a:xfrm>
+            <a:off x="677098" y="541734"/>
+            <a:ext cx="11051451" cy="260747"/>
+          </a:xfrm>
+          <a:prstGeom prst="rect">
+            <a:avLst/>
+          </a:prstGeom>
+          <a:noFill/>
+          <a:ln/>
+        </p:spPr>
+        <p:txBody>
+          <a:bodyPr wrap="square" lIns="0" tIns="0" rIns="0" bIns="0" rtlCol="0" anchor="t"/>
+          <a:lstStyle/>
+          <a:p>
+            <a:pPr algn="l" indent="0" marL="0">
+              <a:lnSpc>
+                <a:spcPts val="2053"/>
+              </a:lnSpc>
+              <a:buNone/>
+            </a:pPr>
+            <a:r>
+              <a:rPr lang="en-US" sz="1466" dirty="0">
+                <a:solidFill>
+                  <a:srgbClr val="7A7164"/>
+                </a:solidFill>
+                <a:latin typeface="Inter" pitchFamily="34" charset="0"/>
+                <a:ea typeface="Inter" pitchFamily="34" charset="-122"/>
+                <a:cs typeface="Inter" pitchFamily="34" charset="-120"/>
+              </a:rPr>
+              <a:t>PLATFORM ENGINEERING · OBSERVABILITY BUDGET</a:t>
+            </a:r>
+            <a:endParaRPr lang="en-US" sz="1466" dirty="0"/>
+          </a:p>
+        </p:txBody>
+      </p:sp>
+      <p:sp>
+        <p:nvSpPr>
+          <p:cNvPr id="3" name="Text 1"/>
+          <p:cNvSpPr/>
+          <p:nvPr/>
+        </p:nvSpPr>
+        <p:spPr>
+          <a:xfrm>
+            <a:off x="677098" y="937816"/>
+            <a:ext cx="10834756" cy="12700"/>
+          </a:xfrm>
+          <a:prstGeom prst="rect">
+            <a:avLst/>
+          </a:prstGeom>
+          <a:solidFill>
+            <a:srgbClr val="DAD3C4"/>
+          </a:solidFill>
+          <a:ln/>
+        </p:spPr>
+        <p:txBody>
+          <a:bodyPr wrap="square" rtlCol="0" anchor="ctr"/>
+          <a:lstStyle/>
+          <a:p>
+            <a:pPr indent="0" marL="0">
+              <a:buNone/>
+            </a:pPr>
+            <a:endParaRPr lang="en-US" dirty="0"/>
+          </a:p>
+        </p:txBody>
+      </p:sp>
+      <p:sp>
+        <p:nvSpPr>
+          <p:cNvPr id="4" name="Text 2"/>
+          <p:cNvSpPr/>
+          <p:nvPr/>
+        </p:nvSpPr>
+        <p:spPr>
+          <a:xfrm>
+            <a:off x="677098" y="1289050"/>
+            <a:ext cx="11051451" cy="594320"/>
+          </a:xfrm>
+          <a:prstGeom prst="rect">
+            <a:avLst/>
+          </a:prstGeom>
+          <a:noFill/>
+          <a:ln/>
+        </p:spPr>
+        <p:txBody>
+          <a:bodyPr wrap="square" lIns="0" tIns="0" rIns="0" bIns="0" rtlCol="0" anchor="t"/>
+          <a:lstStyle/>
+          <a:p>
+            <a:pPr algn="l" indent="0" marL="0">
+              <a:lnSpc>
+                <a:spcPts val="4679"/>
+              </a:lnSpc>
+              <a:spcAft>
+                <a:spcPts val="1866"/>
+              </a:spcAft>
+              <a:buNone/>
+            </a:pPr>
+            <a:r>
+              <a:rPr lang="en-US" sz="3466" b="1" dirty="0">
+                <a:solidFill>
+                  <a:srgbClr val="1F1B16"/>
+                </a:solidFill>
+                <a:latin typeface="Source Serif 4" pitchFamily="34" charset="0"/>
+                <a:ea typeface="Source Serif 4" pitchFamily="34" charset="-122"/>
+                <a:cs typeface="Source Serif 4" pitchFamily="34" charset="-120"/>
+              </a:rPr>
+              <a:t>Three signals answer three different questions</a:t>
+            </a:r>
+            <a:endParaRPr lang="en-US" sz="3466" dirty="0"/>
+          </a:p>
+        </p:txBody>
+      </p:sp>
+      <p:sp>
+        <p:nvSpPr>
+          <p:cNvPr id="5" name="Shape 3"/>
+          <p:cNvSpPr/>
+          <p:nvPr/>
+        </p:nvSpPr>
+        <p:spPr>
+          <a:xfrm>
+            <a:off x="683446" y="2120305"/>
+            <a:ext cx="0" cy="744934"/>
+          </a:xfrm>
+          <a:prstGeom prst="line">
+            <a:avLst/>
+          </a:prstGeom>
+          <a:noFill/>
+          <a:ln w="12698">
+            <a:solidFill>
+              <a:srgbClr val="FFFFFF"/>
+            </a:solidFill>
+            <a:prstDash val="solid"/>
+          </a:ln>
+        </p:spPr>
+      </p:sp>
+      <p:sp>
+        <p:nvSpPr>
+          <p:cNvPr id="6" name="Shape 4"/>
+          <p:cNvSpPr/>
+          <p:nvPr/>
+        </p:nvSpPr>
+        <p:spPr>
+          <a:xfrm>
+            <a:off x="2573091" y="2145705"/>
+            <a:ext cx="2979588" cy="0"/>
+          </a:xfrm>
+          <a:prstGeom prst="line">
+            <a:avLst/>
+          </a:prstGeom>
+          <a:noFill/>
+          <a:ln w="50794">
+            <a:solidFill>
+              <a:srgbClr val="FFFFFF"/>
+            </a:solidFill>
+            <a:prstDash val="solid"/>
+          </a:ln>
+        </p:spPr>
+      </p:sp>
+      <p:sp>
+        <p:nvSpPr>
+          <p:cNvPr id="7" name="Shape 5"/>
+          <p:cNvSpPr/>
+          <p:nvPr/>
+        </p:nvSpPr>
+        <p:spPr>
+          <a:xfrm>
+            <a:off x="2579439" y="2120305"/>
+            <a:ext cx="0" cy="744934"/>
+          </a:xfrm>
+          <a:prstGeom prst="line">
+            <a:avLst/>
+          </a:prstGeom>
+          <a:noFill/>
+          <a:ln w="12698">
+            <a:solidFill>
+              <a:srgbClr val="DAD3C4"/>
+            </a:solidFill>
+            <a:prstDash val="solid"/>
+          </a:ln>
+        </p:spPr>
+      </p:sp>
+      <p:sp>
+        <p:nvSpPr>
+          <p:cNvPr id="8" name="Text 6"/>
+          <p:cNvSpPr/>
+          <p:nvPr/>
+        </p:nvSpPr>
+        <p:spPr>
+          <a:xfrm>
+            <a:off x="2856587" y="2238772"/>
+            <a:ext cx="2473798" cy="457200"/>
+          </a:xfrm>
+          <a:prstGeom prst="rect">
+            <a:avLst/>
+          </a:prstGeom>
+          <a:noFill/>
+          <a:ln/>
+        </p:spPr>
+        <p:txBody>
+          <a:bodyPr wrap="square" lIns="0" tIns="0" rIns="0" bIns="0" rtlCol="0" anchor="t"/>
+          <a:lstStyle/>
+          <a:p>
+            <a:pPr algn="l" indent="0" marL="0">
+              <a:lnSpc>
+                <a:spcPts val="3600"/>
+              </a:lnSpc>
+              <a:buNone/>
+            </a:pPr>
+            <a:r>
+              <a:rPr lang="en-US" sz="2666" b="1" dirty="0">
+                <a:solidFill>
+                  <a:srgbClr val="1F1B16"/>
+                </a:solidFill>
+                <a:latin typeface="Source Serif 4" pitchFamily="34" charset="0"/>
+                <a:ea typeface="Source Serif 4" pitchFamily="34" charset="-122"/>
+                <a:cs typeface="Source Serif 4" pitchFamily="34" charset="-120"/>
+              </a:rPr>
+              <a:t>Metrics</a:t>
+            </a:r>
+            <a:endParaRPr lang="en-US" sz="2666" dirty="0"/>
+          </a:p>
+        </p:txBody>
+      </p:sp>
+      <p:sp>
+        <p:nvSpPr>
+          <p:cNvPr id="9" name="Shape 7"/>
+          <p:cNvSpPr/>
+          <p:nvPr/>
+        </p:nvSpPr>
+        <p:spPr>
+          <a:xfrm>
+            <a:off x="5552679" y="2145705"/>
+            <a:ext cx="2979588" cy="0"/>
+          </a:xfrm>
+          <a:prstGeom prst="line">
+            <a:avLst/>
+          </a:prstGeom>
+          <a:noFill/>
+          <a:ln w="50794">
+            <a:solidFill>
+              <a:srgbClr val="B5503A"/>
+            </a:solidFill>
+            <a:prstDash val="solid"/>
+          </a:ln>
+        </p:spPr>
+      </p:sp>
+      <p:sp>
+        <p:nvSpPr>
+          <p:cNvPr id="10" name="Shape 8"/>
+          <p:cNvSpPr/>
+          <p:nvPr/>
+        </p:nvSpPr>
+        <p:spPr>
+          <a:xfrm>
+            <a:off x="5559027" y="2120305"/>
+            <a:ext cx="0" cy="744934"/>
+          </a:xfrm>
+          <a:prstGeom prst="line">
+            <a:avLst/>
+          </a:prstGeom>
+          <a:noFill/>
+          <a:ln w="12698">
+            <a:solidFill>
+              <a:srgbClr val="DAD3C4"/>
+            </a:solidFill>
+            <a:prstDash val="solid"/>
+          </a:ln>
+        </p:spPr>
+      </p:sp>
+      <p:sp>
+        <p:nvSpPr>
+          <p:cNvPr id="11" name="Text 9"/>
+          <p:cNvSpPr/>
+          <p:nvPr/>
+        </p:nvSpPr>
+        <p:spPr>
+          <a:xfrm>
+            <a:off x="5836175" y="2238772"/>
+            <a:ext cx="2473798" cy="457200"/>
+          </a:xfrm>
+          <a:prstGeom prst="rect">
+            <a:avLst/>
+          </a:prstGeom>
+          <a:noFill/>
+          <a:ln/>
+        </p:spPr>
+        <p:txBody>
+          <a:bodyPr wrap="square" lIns="0" tIns="0" rIns="0" bIns="0" rtlCol="0" anchor="t"/>
+          <a:lstStyle/>
+          <a:p>
+            <a:pPr algn="l" indent="0" marL="0">
+              <a:lnSpc>
+                <a:spcPts val="3600"/>
+              </a:lnSpc>
+              <a:buNone/>
+            </a:pPr>
+            <a:r>
+              <a:rPr lang="en-US" sz="2666" b="1" dirty="0">
+                <a:solidFill>
+                  <a:srgbClr val="B5503A"/>
+                </a:solidFill>
+                <a:latin typeface="Source Serif 4" pitchFamily="34" charset="0"/>
+                <a:ea typeface="Source Serif 4" pitchFamily="34" charset="-122"/>
+                <a:cs typeface="Source Serif 4" pitchFamily="34" charset="-120"/>
+              </a:rPr>
+              <a:t>Logs</a:t>
+            </a:r>
+            <a:endParaRPr lang="en-US" sz="2666" dirty="0"/>
+          </a:p>
+        </p:txBody>
+      </p:sp>
+      <p:sp>
+        <p:nvSpPr>
+          <p:cNvPr id="12" name="Shape 10"/>
+          <p:cNvSpPr/>
+          <p:nvPr/>
+        </p:nvSpPr>
+        <p:spPr>
+          <a:xfrm>
+            <a:off x="8532266" y="2145705"/>
+            <a:ext cx="2979588" cy="0"/>
+          </a:xfrm>
+          <a:prstGeom prst="line">
+            <a:avLst/>
+          </a:prstGeom>
+          <a:noFill/>
+          <a:ln w="50794">
+            <a:solidFill>
+              <a:srgbClr val="FFFFFF"/>
+            </a:solidFill>
+            <a:prstDash val="solid"/>
+          </a:ln>
+        </p:spPr>
+      </p:sp>
+      <p:sp>
+        <p:nvSpPr>
+          <p:cNvPr id="13" name="Shape 11"/>
+          <p:cNvSpPr/>
+          <p:nvPr/>
+        </p:nvSpPr>
+        <p:spPr>
+          <a:xfrm>
+            <a:off x="8538615" y="2120305"/>
+            <a:ext cx="0" cy="744934"/>
+          </a:xfrm>
+          <a:prstGeom prst="line">
+            <a:avLst/>
+          </a:prstGeom>
+          <a:noFill/>
+          <a:ln w="12698">
+            <a:solidFill>
+              <a:srgbClr val="DAD3C4"/>
+            </a:solidFill>
+            <a:prstDash val="solid"/>
+          </a:ln>
+        </p:spPr>
+      </p:sp>
+      <p:sp>
+        <p:nvSpPr>
+          <p:cNvPr id="14" name="Text 12"/>
+          <p:cNvSpPr/>
+          <p:nvPr/>
+        </p:nvSpPr>
+        <p:spPr>
+          <a:xfrm>
+            <a:off x="8815763" y="2238772"/>
+            <a:ext cx="2473798" cy="457200"/>
+          </a:xfrm>
+          <a:prstGeom prst="rect">
+            <a:avLst/>
+          </a:prstGeom>
+          <a:noFill/>
+          <a:ln/>
+        </p:spPr>
+        <p:txBody>
+          <a:bodyPr wrap="square" lIns="0" tIns="0" rIns="0" bIns="0" rtlCol="0" anchor="t"/>
+          <a:lstStyle/>
+          <a:p>
+            <a:pPr algn="l" indent="0" marL="0">
+              <a:lnSpc>
+                <a:spcPts val="3600"/>
+              </a:lnSpc>
+              <a:buNone/>
+            </a:pPr>
+            <a:r>
+              <a:rPr lang="en-US" sz="2666" b="1" dirty="0">
+                <a:solidFill>
+                  <a:srgbClr val="1F1B16"/>
+                </a:solidFill>
+                <a:latin typeface="Source Serif 4" pitchFamily="34" charset="0"/>
+                <a:ea typeface="Source Serif 4" pitchFamily="34" charset="-122"/>
+                <a:cs typeface="Source Serif 4" pitchFamily="34" charset="-120"/>
+              </a:rPr>
+              <a:t>Traces</a:t>
+            </a:r>
+            <a:endParaRPr lang="en-US" sz="2666" dirty="0"/>
+          </a:p>
+        </p:txBody>
+      </p:sp>
+      <p:sp>
+        <p:nvSpPr>
+          <p:cNvPr id="15" name="Shape 13"/>
+          <p:cNvSpPr/>
+          <p:nvPr/>
+        </p:nvSpPr>
+        <p:spPr>
+          <a:xfrm>
+            <a:off x="683446" y="2865239"/>
+            <a:ext cx="0" cy="923727"/>
+          </a:xfrm>
+          <a:prstGeom prst="line">
+            <a:avLst/>
+          </a:prstGeom>
+          <a:noFill/>
+          <a:ln w="12698">
+            <a:solidFill>
+              <a:srgbClr val="FFFFFF"/>
+            </a:solidFill>
+            <a:prstDash val="solid"/>
+          </a:ln>
+        </p:spPr>
+      </p:sp>
+      <p:sp>
+        <p:nvSpPr>
+          <p:cNvPr id="16" name="Text 14"/>
+          <p:cNvSpPr/>
+          <p:nvPr/>
+        </p:nvSpPr>
+        <p:spPr>
+          <a:xfrm>
+            <a:off x="689795" y="3068439"/>
+            <a:ext cx="1644747" cy="260747"/>
+          </a:xfrm>
+          <a:prstGeom prst="rect">
+            <a:avLst/>
+          </a:prstGeom>
+          <a:noFill/>
+          <a:ln/>
+        </p:spPr>
+        <p:txBody>
+          <a:bodyPr wrap="square" lIns="0" tIns="0" rIns="0" bIns="0" rtlCol="0" anchor="t"/>
+          <a:lstStyle/>
+          <a:p>
+            <a:pPr algn="l" indent="0" marL="0">
+              <a:lnSpc>
+                <a:spcPts val="2053"/>
+              </a:lnSpc>
+              <a:buNone/>
+            </a:pPr>
+            <a:r>
+              <a:rPr lang="en-US" sz="1466" dirty="0">
+                <a:solidFill>
+                  <a:srgbClr val="7A7164"/>
+                </a:solidFill>
+                <a:latin typeface="Inter" pitchFamily="34" charset="0"/>
+                <a:ea typeface="Inter" pitchFamily="34" charset="-122"/>
+                <a:cs typeface="Inter" pitchFamily="34" charset="-120"/>
+              </a:rPr>
+              <a:t>ANSWERS</a:t>
+            </a:r>
+            <a:endParaRPr lang="en-US" sz="1466" dirty="0"/>
+          </a:p>
+        </p:txBody>
+      </p:sp>
+      <p:sp>
+        <p:nvSpPr>
+          <p:cNvPr id="17" name="Shape 15"/>
+          <p:cNvSpPr/>
+          <p:nvPr/>
+        </p:nvSpPr>
+        <p:spPr>
+          <a:xfrm>
+            <a:off x="2579439" y="2865239"/>
+            <a:ext cx="0" cy="923727"/>
+          </a:xfrm>
+          <a:prstGeom prst="line">
+            <a:avLst/>
+          </a:prstGeom>
+          <a:noFill/>
+          <a:ln w="12698">
+            <a:solidFill>
+              <a:srgbClr val="DAD3C4"/>
+            </a:solidFill>
+            <a:prstDash val="solid"/>
+          </a:ln>
+        </p:spPr>
+      </p:sp>
+      <p:sp>
+        <p:nvSpPr>
+          <p:cNvPr id="18" name="Text 16"/>
+          <p:cNvSpPr/>
+          <p:nvPr/>
+        </p:nvSpPr>
+        <p:spPr>
+          <a:xfrm>
+            <a:off x="2856587" y="3051373"/>
+            <a:ext cx="2473798" cy="711200"/>
+          </a:xfrm>
+          <a:prstGeom prst="rect">
+            <a:avLst/>
+          </a:prstGeom>
+          <a:noFill/>
+          <a:ln/>
+        </p:spPr>
+        <p:txBody>
+          <a:bodyPr wrap="square" lIns="0" tIns="0" rIns="0" bIns="0" rtlCol="0" anchor="t"/>
+          <a:lstStyle/>
+          <a:p>
+            <a:pPr algn="l" indent="0" marL="0">
+              <a:lnSpc>
+                <a:spcPts val="2800"/>
+              </a:lnSpc>
+              <a:buNone/>
+            </a:pPr>
+            <a:r>
+              <a:rPr lang="en-US" sz="1866" dirty="0">
+                <a:solidFill>
+                  <a:srgbClr val="1F1B16"/>
+                </a:solidFill>
+                <a:latin typeface="Inter" pitchFamily="34" charset="0"/>
+                <a:ea typeface="Inter" pitchFamily="34" charset="-122"/>
+                <a:cs typeface="Inter" pitchFamily="34" charset="-120"/>
+              </a:rPr>
+              <a:t>Is it happening, and how much</a:t>
+            </a:r>
+            <a:endParaRPr lang="en-US" sz="1866" dirty="0"/>
+          </a:p>
+        </p:txBody>
+      </p:sp>
+      <p:sp>
+        <p:nvSpPr>
+          <p:cNvPr id="19" name="Shape 17"/>
+          <p:cNvSpPr/>
+          <p:nvPr/>
+        </p:nvSpPr>
+        <p:spPr>
+          <a:xfrm>
+            <a:off x="5559027" y="2865239"/>
+            <a:ext cx="0" cy="923727"/>
+          </a:xfrm>
+          <a:prstGeom prst="line">
+            <a:avLst/>
+          </a:prstGeom>
+          <a:noFill/>
+          <a:ln w="12698">
+            <a:solidFill>
+              <a:srgbClr val="DAD3C4"/>
+            </a:solidFill>
+            <a:prstDash val="solid"/>
+          </a:ln>
+        </p:spPr>
+      </p:sp>
+      <p:sp>
+        <p:nvSpPr>
+          <p:cNvPr id="20" name="Text 18"/>
+          <p:cNvSpPr/>
+          <p:nvPr/>
+        </p:nvSpPr>
+        <p:spPr>
+          <a:xfrm>
+            <a:off x="5836175" y="3051373"/>
+            <a:ext cx="2473798" cy="711200"/>
+          </a:xfrm>
+          <a:prstGeom prst="rect">
+            <a:avLst/>
+          </a:prstGeom>
+          <a:noFill/>
+          <a:ln/>
+        </p:spPr>
+        <p:txBody>
+          <a:bodyPr wrap="square" lIns="0" tIns="0" rIns="0" bIns="0" rtlCol="0" anchor="t"/>
+          <a:lstStyle/>
+          <a:p>
+            <a:pPr algn="l" indent="0" marL="0">
+              <a:lnSpc>
+                <a:spcPts val="2800"/>
+              </a:lnSpc>
+              <a:buNone/>
+            </a:pPr>
+            <a:r>
+              <a:rPr lang="en-US" sz="1866" dirty="0">
+                <a:solidFill>
+                  <a:srgbClr val="1F1B16"/>
+                </a:solidFill>
+                <a:latin typeface="Inter" pitchFamily="34" charset="0"/>
+                <a:ea typeface="Inter" pitchFamily="34" charset="-122"/>
+                <a:cs typeface="Inter" pitchFamily="34" charset="-120"/>
+              </a:rPr>
+              <a:t>What the code actually did</a:t>
+            </a:r>
+            <a:endParaRPr lang="en-US" sz="1866" dirty="0"/>
+          </a:p>
+        </p:txBody>
+      </p:sp>
+      <p:sp>
+        <p:nvSpPr>
+          <p:cNvPr id="21" name="Shape 19"/>
+          <p:cNvSpPr/>
+          <p:nvPr/>
+        </p:nvSpPr>
+        <p:spPr>
+          <a:xfrm>
+            <a:off x="8538615" y="2865239"/>
+            <a:ext cx="0" cy="923727"/>
+          </a:xfrm>
+          <a:prstGeom prst="line">
+            <a:avLst/>
+          </a:prstGeom>
+          <a:noFill/>
+          <a:ln w="12698">
+            <a:solidFill>
+              <a:srgbClr val="DAD3C4"/>
+            </a:solidFill>
+            <a:prstDash val="solid"/>
+          </a:ln>
+        </p:spPr>
+      </p:sp>
+      <p:sp>
+        <p:nvSpPr>
+          <p:cNvPr id="22" name="Text 20"/>
+          <p:cNvSpPr/>
+          <p:nvPr/>
+        </p:nvSpPr>
+        <p:spPr>
+          <a:xfrm>
+            <a:off x="8815763" y="3051373"/>
+            <a:ext cx="2473798" cy="711200"/>
+          </a:xfrm>
+          <a:prstGeom prst="rect">
+            <a:avLst/>
+          </a:prstGeom>
+          <a:noFill/>
+          <a:ln/>
+        </p:spPr>
+        <p:txBody>
+          <a:bodyPr wrap="square" lIns="0" tIns="0" rIns="0" bIns="0" rtlCol="0" anchor="t"/>
+          <a:lstStyle/>
+          <a:p>
+            <a:pPr algn="l" indent="0" marL="0">
+              <a:lnSpc>
+                <a:spcPts val="2800"/>
+              </a:lnSpc>
+              <a:buNone/>
+            </a:pPr>
+            <a:r>
+              <a:rPr lang="en-US" sz="1866" dirty="0">
+                <a:solidFill>
+                  <a:srgbClr val="1F1B16"/>
+                </a:solidFill>
+                <a:latin typeface="Inter" pitchFamily="34" charset="0"/>
+                <a:ea typeface="Inter" pitchFamily="34" charset="-122"/>
+                <a:cs typeface="Inter" pitchFamily="34" charset="-120"/>
+              </a:rPr>
+              <a:t>Where the time went, hop by hop</a:t>
+            </a:r>
+            <a:endParaRPr lang="en-US" sz="1866" dirty="0"/>
+          </a:p>
+        </p:txBody>
+      </p:sp>
+      <p:sp>
+        <p:nvSpPr>
+          <p:cNvPr id="23" name="Shape 21"/>
+          <p:cNvSpPr/>
+          <p:nvPr/>
+        </p:nvSpPr>
+        <p:spPr>
+          <a:xfrm>
+            <a:off x="683446" y="3788966"/>
+            <a:ext cx="0" cy="923727"/>
+          </a:xfrm>
+          <a:prstGeom prst="line">
+            <a:avLst/>
+          </a:prstGeom>
+          <a:noFill/>
+          <a:ln w="12698">
+            <a:solidFill>
+              <a:srgbClr val="FFFFFF"/>
+            </a:solidFill>
+            <a:prstDash val="solid"/>
+          </a:ln>
+        </p:spPr>
+      </p:sp>
+      <p:sp>
+        <p:nvSpPr>
+          <p:cNvPr id="24" name="Text 22"/>
+          <p:cNvSpPr/>
+          <p:nvPr/>
+        </p:nvSpPr>
+        <p:spPr>
+          <a:xfrm>
+            <a:off x="689795" y="3992166"/>
+            <a:ext cx="1644747" cy="260747"/>
+          </a:xfrm>
+          <a:prstGeom prst="rect">
+            <a:avLst/>
+          </a:prstGeom>
+          <a:noFill/>
+          <a:ln/>
+        </p:spPr>
+        <p:txBody>
+          <a:bodyPr wrap="square" lIns="0" tIns="0" rIns="0" bIns="0" rtlCol="0" anchor="t"/>
+          <a:lstStyle/>
+          <a:p>
+            <a:pPr algn="l" indent="0" marL="0">
+              <a:lnSpc>
+                <a:spcPts val="2053"/>
+              </a:lnSpc>
+              <a:buNone/>
+            </a:pPr>
+            <a:r>
+              <a:rPr lang="en-US" sz="1466" dirty="0">
+                <a:solidFill>
+                  <a:srgbClr val="7A7164"/>
+                </a:solidFill>
+                <a:latin typeface="Inter" pitchFamily="34" charset="0"/>
+                <a:ea typeface="Inter" pitchFamily="34" charset="-122"/>
+                <a:cs typeface="Inter" pitchFamily="34" charset="-120"/>
+              </a:rPr>
+              <a:t>BLIND TO</a:t>
+            </a:r>
+            <a:endParaRPr lang="en-US" sz="1466" dirty="0"/>
+          </a:p>
+        </p:txBody>
+      </p:sp>
+      <p:sp>
+        <p:nvSpPr>
+          <p:cNvPr id="25" name="Shape 23"/>
+          <p:cNvSpPr/>
+          <p:nvPr/>
+        </p:nvSpPr>
+        <p:spPr>
+          <a:xfrm>
+            <a:off x="2579439" y="3788966"/>
+            <a:ext cx="0" cy="923727"/>
+          </a:xfrm>
+          <a:prstGeom prst="line">
+            <a:avLst/>
+          </a:prstGeom>
+          <a:noFill/>
+          <a:ln w="12698">
+            <a:solidFill>
+              <a:srgbClr val="DAD3C4"/>
+            </a:solidFill>
+            <a:prstDash val="solid"/>
+          </a:ln>
+        </p:spPr>
+      </p:sp>
+      <p:sp>
+        <p:nvSpPr>
+          <p:cNvPr id="26" name="Text 24"/>
+          <p:cNvSpPr/>
+          <p:nvPr/>
+        </p:nvSpPr>
+        <p:spPr>
+          <a:xfrm>
+            <a:off x="2856587" y="3975100"/>
+            <a:ext cx="2473798" cy="711200"/>
+          </a:xfrm>
+          <a:prstGeom prst="rect">
+            <a:avLst/>
+          </a:prstGeom>
+          <a:noFill/>
+          <a:ln/>
+        </p:spPr>
+        <p:txBody>
+          <a:bodyPr wrap="square" lIns="0" tIns="0" rIns="0" bIns="0" rtlCol="0" anchor="t"/>
+          <a:lstStyle/>
+          <a:p>
+            <a:pPr algn="l" indent="0" marL="0">
+              <a:lnSpc>
+                <a:spcPts val="2800"/>
+              </a:lnSpc>
+              <a:buNone/>
+            </a:pPr>
+            <a:r>
+              <a:rPr lang="en-US" sz="1866" dirty="0">
+                <a:solidFill>
+                  <a:srgbClr val="1F1B16"/>
+                </a:solidFill>
+                <a:latin typeface="Inter" pitchFamily="34" charset="0"/>
+                <a:ea typeface="Inter" pitchFamily="34" charset="-122"/>
+                <a:cs typeface="Inter" pitchFamily="34" charset="-120"/>
+              </a:rPr>
+              <a:t>Which request. Which user.</a:t>
+            </a:r>
+            <a:endParaRPr lang="en-US" sz="1866" dirty="0"/>
+          </a:p>
+        </p:txBody>
+      </p:sp>
+      <p:sp>
+        <p:nvSpPr>
+          <p:cNvPr id="27" name="Shape 25"/>
+          <p:cNvSpPr/>
+          <p:nvPr/>
+        </p:nvSpPr>
+        <p:spPr>
+          <a:xfrm>
+            <a:off x="5559027" y="3788966"/>
+            <a:ext cx="0" cy="923727"/>
+          </a:xfrm>
+          <a:prstGeom prst="line">
+            <a:avLst/>
+          </a:prstGeom>
+          <a:noFill/>
+          <a:ln w="12698">
+            <a:solidFill>
+              <a:srgbClr val="DAD3C4"/>
+            </a:solidFill>
+            <a:prstDash val="solid"/>
+          </a:ln>
+        </p:spPr>
+      </p:sp>
+      <p:sp>
+        <p:nvSpPr>
+          <p:cNvPr id="28" name="Text 26"/>
+          <p:cNvSpPr/>
+          <p:nvPr/>
+        </p:nvSpPr>
+        <p:spPr>
+          <a:xfrm>
+            <a:off x="5836175" y="3975100"/>
+            <a:ext cx="2473798" cy="355600"/>
+          </a:xfrm>
+          <a:prstGeom prst="rect">
+            <a:avLst/>
+          </a:prstGeom>
+          <a:noFill/>
+          <a:ln/>
+        </p:spPr>
+        <p:txBody>
+          <a:bodyPr wrap="square" lIns="0" tIns="0" rIns="0" bIns="0" rtlCol="0" anchor="t"/>
+          <a:lstStyle/>
+          <a:p>
+            <a:pPr algn="l" indent="0" marL="0">
+              <a:lnSpc>
+                <a:spcPts val="2800"/>
+              </a:lnSpc>
+              <a:buNone/>
+            </a:pPr>
+            <a:r>
+              <a:rPr lang="en-US" sz="1866" dirty="0">
+                <a:solidFill>
+                  <a:srgbClr val="1F1B16"/>
+                </a:solidFill>
+                <a:latin typeface="Inter" pitchFamily="34" charset="0"/>
+                <a:ea typeface="Inter" pitchFamily="34" charset="-122"/>
+                <a:cs typeface="Inter" pitchFamily="34" charset="-120"/>
+              </a:rPr>
+              <a:t>Where the time went</a:t>
+            </a:r>
+            <a:endParaRPr lang="en-US" sz="1866" dirty="0"/>
+          </a:p>
+        </p:txBody>
+      </p:sp>
+      <p:sp>
+        <p:nvSpPr>
+          <p:cNvPr id="29" name="Shape 27"/>
+          <p:cNvSpPr/>
+          <p:nvPr/>
+        </p:nvSpPr>
+        <p:spPr>
+          <a:xfrm>
+            <a:off x="8538615" y="3788966"/>
+            <a:ext cx="0" cy="923727"/>
+          </a:xfrm>
+          <a:prstGeom prst="line">
+            <a:avLst/>
+          </a:prstGeom>
+          <a:noFill/>
+          <a:ln w="12698">
+            <a:solidFill>
+              <a:srgbClr val="DAD3C4"/>
+            </a:solidFill>
+            <a:prstDash val="solid"/>
+          </a:ln>
+        </p:spPr>
+      </p:sp>
+      <p:sp>
+        <p:nvSpPr>
+          <p:cNvPr id="30" name="Text 28"/>
+          <p:cNvSpPr/>
+          <p:nvPr/>
+        </p:nvSpPr>
+        <p:spPr>
+          <a:xfrm>
+            <a:off x="8815763" y="3975100"/>
+            <a:ext cx="2473798" cy="711200"/>
+          </a:xfrm>
+          <a:prstGeom prst="rect">
+            <a:avLst/>
+          </a:prstGeom>
+          <a:noFill/>
+          <a:ln/>
+        </p:spPr>
+        <p:txBody>
+          <a:bodyPr wrap="square" lIns="0" tIns="0" rIns="0" bIns="0" rtlCol="0" anchor="t"/>
+          <a:lstStyle/>
+          <a:p>
+            <a:pPr algn="l" indent="0" marL="0">
+              <a:lnSpc>
+                <a:spcPts val="2800"/>
+              </a:lnSpc>
+              <a:buNone/>
+            </a:pPr>
+            <a:r>
+              <a:rPr lang="en-US" sz="1866" dirty="0">
+                <a:solidFill>
+                  <a:srgbClr val="1F1B16"/>
+                </a:solidFill>
+                <a:latin typeface="Inter" pitchFamily="34" charset="0"/>
+                <a:ea typeface="Inter" pitchFamily="34" charset="-122"/>
+                <a:cs typeface="Inter" pitchFamily="34" charset="-120"/>
+              </a:rPr>
+              <a:t>What the code was thinking</a:t>
+            </a:r>
+            <a:endParaRPr lang="en-US" sz="1866" dirty="0"/>
+          </a:p>
+        </p:txBody>
+      </p:sp>
+      <p:sp>
+        <p:nvSpPr>
+          <p:cNvPr id="31" name="Shape 29"/>
+          <p:cNvSpPr/>
+          <p:nvPr/>
+        </p:nvSpPr>
+        <p:spPr>
+          <a:xfrm>
+            <a:off x="683446" y="4712692"/>
+            <a:ext cx="0" cy="923925"/>
+          </a:xfrm>
+          <a:prstGeom prst="line">
+            <a:avLst/>
+          </a:prstGeom>
+          <a:noFill/>
+          <a:ln w="12698">
+            <a:solidFill>
+              <a:srgbClr val="FFFFFF"/>
+            </a:solidFill>
+            <a:prstDash val="solid"/>
+          </a:ln>
+        </p:spPr>
+      </p:sp>
+      <p:sp>
+        <p:nvSpPr>
+          <p:cNvPr id="32" name="Text 30"/>
+          <p:cNvSpPr/>
+          <p:nvPr/>
+        </p:nvSpPr>
+        <p:spPr>
+          <a:xfrm>
+            <a:off x="689795" y="4915892"/>
+            <a:ext cx="1644747" cy="260747"/>
+          </a:xfrm>
+          <a:prstGeom prst="rect">
+            <a:avLst/>
+          </a:prstGeom>
+          <a:noFill/>
+          <a:ln/>
+        </p:spPr>
+        <p:txBody>
+          <a:bodyPr wrap="square" lIns="0" tIns="0" rIns="0" bIns="0" rtlCol="0" anchor="t"/>
+          <a:lstStyle/>
+          <a:p>
+            <a:pPr algn="l" indent="0" marL="0">
+              <a:lnSpc>
+                <a:spcPts val="2053"/>
+              </a:lnSpc>
+              <a:buNone/>
+            </a:pPr>
+            <a:r>
+              <a:rPr lang="en-US" sz="1466" dirty="0">
+                <a:solidFill>
+                  <a:srgbClr val="7A7164"/>
+                </a:solidFill>
+                <a:latin typeface="Inter" pitchFamily="34" charset="0"/>
+                <a:ea typeface="Inter" pitchFamily="34" charset="-122"/>
+                <a:cs typeface="Inter" pitchFamily="34" charset="-120"/>
+              </a:rPr>
+              <a:t>GROWS WITH</a:t>
+            </a:r>
+            <a:endParaRPr lang="en-US" sz="1466" dirty="0"/>
+          </a:p>
+        </p:txBody>
+      </p:sp>
+      <p:sp>
+        <p:nvSpPr>
+          <p:cNvPr id="33" name="Shape 31"/>
+          <p:cNvSpPr/>
+          <p:nvPr/>
+        </p:nvSpPr>
+        <p:spPr>
+          <a:xfrm>
+            <a:off x="2579439" y="4712692"/>
+            <a:ext cx="0" cy="923925"/>
+          </a:xfrm>
+          <a:prstGeom prst="line">
+            <a:avLst/>
+          </a:prstGeom>
+          <a:noFill/>
+          <a:ln w="12698">
+            <a:solidFill>
+              <a:srgbClr val="DAD3C4"/>
+            </a:solidFill>
+            <a:prstDash val="solid"/>
+          </a:ln>
+        </p:spPr>
+      </p:sp>
+      <p:sp>
+        <p:nvSpPr>
+          <p:cNvPr id="34" name="Text 32"/>
+          <p:cNvSpPr/>
+          <p:nvPr/>
+        </p:nvSpPr>
+        <p:spPr>
+          <a:xfrm>
+            <a:off x="2856587" y="4898827"/>
+            <a:ext cx="2473798" cy="711200"/>
+          </a:xfrm>
+          <a:prstGeom prst="rect">
+            <a:avLst/>
+          </a:prstGeom>
+          <a:noFill/>
+          <a:ln/>
+        </p:spPr>
+        <p:txBody>
+          <a:bodyPr wrap="square" lIns="0" tIns="0" rIns="0" bIns="0" rtlCol="0" anchor="t"/>
+          <a:lstStyle/>
+          <a:p>
+            <a:pPr algn="l" indent="0" marL="0">
+              <a:lnSpc>
+                <a:spcPts val="2800"/>
+              </a:lnSpc>
+              <a:buNone/>
+            </a:pPr>
+            <a:r>
+              <a:rPr lang="en-US" sz="1866" dirty="0">
+                <a:solidFill>
+                  <a:srgbClr val="1F1B16"/>
+                </a:solidFill>
+                <a:latin typeface="Inter" pitchFamily="34" charset="0"/>
+                <a:ea typeface="Inter" pitchFamily="34" charset="-122"/>
+                <a:cs typeface="Inter" pitchFamily="34" charset="-120"/>
+              </a:rPr>
+              <a:t>Label cardinality, not traffic</a:t>
+            </a:r>
+            <a:endParaRPr lang="en-US" sz="1866" dirty="0"/>
+          </a:p>
+        </p:txBody>
+      </p:sp>
+      <p:sp>
+        <p:nvSpPr>
+          <p:cNvPr id="35" name="Shape 33"/>
+          <p:cNvSpPr/>
+          <p:nvPr/>
+        </p:nvSpPr>
+        <p:spPr>
+          <a:xfrm>
+            <a:off x="5559027" y="4712692"/>
+            <a:ext cx="0" cy="923925"/>
+          </a:xfrm>
+          <a:prstGeom prst="line">
+            <a:avLst/>
+          </a:prstGeom>
+          <a:noFill/>
+          <a:ln w="12698">
+            <a:solidFill>
+              <a:srgbClr val="DAD3C4"/>
+            </a:solidFill>
+            <a:prstDash val="solid"/>
+          </a:ln>
+        </p:spPr>
+      </p:sp>
+      <p:sp>
+        <p:nvSpPr>
+          <p:cNvPr id="36" name="Text 34"/>
+          <p:cNvSpPr/>
+          <p:nvPr/>
+        </p:nvSpPr>
+        <p:spPr>
+          <a:xfrm>
+            <a:off x="5836175" y="4898827"/>
+            <a:ext cx="2473798" cy="711200"/>
+          </a:xfrm>
+          <a:prstGeom prst="rect">
+            <a:avLst/>
+          </a:prstGeom>
+          <a:noFill/>
+          <a:ln/>
+        </p:spPr>
+        <p:txBody>
+          <a:bodyPr wrap="square" lIns="0" tIns="0" rIns="0" bIns="0" rtlCol="0" anchor="t"/>
+          <a:lstStyle/>
+          <a:p>
+            <a:pPr algn="l" indent="0" marL="0">
+              <a:lnSpc>
+                <a:spcPts val="2800"/>
+              </a:lnSpc>
+              <a:buNone/>
+            </a:pPr>
+            <a:r>
+              <a:rPr lang="en-US" sz="1866" dirty="0">
+                <a:solidFill>
+                  <a:srgbClr val="1F1B16"/>
+                </a:solidFill>
+                <a:latin typeface="Inter" pitchFamily="34" charset="0"/>
+                <a:ea typeface="Inter" pitchFamily="34" charset="-122"/>
+                <a:cs typeface="Inter" pitchFamily="34" charset="-120"/>
+              </a:rPr>
+              <a:t>Traffic, replicas and days kept</a:t>
+            </a:r>
+            <a:endParaRPr lang="en-US" sz="1866" dirty="0"/>
+          </a:p>
+        </p:txBody>
+      </p:sp>
+      <p:sp>
+        <p:nvSpPr>
+          <p:cNvPr id="37" name="Shape 35"/>
+          <p:cNvSpPr/>
+          <p:nvPr/>
+        </p:nvSpPr>
+        <p:spPr>
+          <a:xfrm>
+            <a:off x="8538615" y="4712692"/>
+            <a:ext cx="0" cy="923925"/>
+          </a:xfrm>
+          <a:prstGeom prst="line">
+            <a:avLst/>
+          </a:prstGeom>
+          <a:noFill/>
+          <a:ln w="12698">
+            <a:solidFill>
+              <a:srgbClr val="DAD3C4"/>
+            </a:solidFill>
+            <a:prstDash val="solid"/>
+          </a:ln>
+        </p:spPr>
+      </p:sp>
+      <p:sp>
+        <p:nvSpPr>
+          <p:cNvPr id="38" name="Text 36"/>
+          <p:cNvSpPr/>
+          <p:nvPr/>
+        </p:nvSpPr>
+        <p:spPr>
+          <a:xfrm>
+            <a:off x="8815763" y="4898827"/>
+            <a:ext cx="2473798" cy="711200"/>
+          </a:xfrm>
+          <a:prstGeom prst="rect">
+            <a:avLst/>
+          </a:prstGeom>
+          <a:noFill/>
+          <a:ln/>
+        </p:spPr>
+        <p:txBody>
+          <a:bodyPr wrap="square" lIns="0" tIns="0" rIns="0" bIns="0" rtlCol="0" anchor="t"/>
+          <a:lstStyle/>
+          <a:p>
+            <a:pPr algn="l" indent="0" marL="0">
+              <a:lnSpc>
+                <a:spcPts val="2800"/>
+              </a:lnSpc>
+              <a:buNone/>
+            </a:pPr>
+            <a:r>
+              <a:rPr lang="en-US" sz="1866" dirty="0">
+                <a:solidFill>
+                  <a:srgbClr val="1F1B16"/>
+                </a:solidFill>
+                <a:latin typeface="Inter" pitchFamily="34" charset="0"/>
+                <a:ea typeface="Inter" pitchFamily="34" charset="-122"/>
+                <a:cs typeface="Inter" pitchFamily="34" charset="-120"/>
+              </a:rPr>
+              <a:t>Sampled share, span width</a:t>
+            </a:r>
+            <a:endParaRPr lang="en-US" sz="1866" dirty="0"/>
+          </a:p>
+        </p:txBody>
+      </p:sp>
+      <p:sp>
+        <p:nvSpPr>
+          <p:cNvPr id="39" name="Text 37"/>
+          <p:cNvSpPr/>
+          <p:nvPr/>
+        </p:nvSpPr>
+        <p:spPr>
+          <a:xfrm>
+            <a:off x="677098" y="5907484"/>
+            <a:ext cx="10834756" cy="12700"/>
+          </a:xfrm>
+          <a:prstGeom prst="rect">
+            <a:avLst/>
+          </a:prstGeom>
+          <a:solidFill>
+            <a:srgbClr val="DAD3C4"/>
+          </a:solidFill>
+          <a:ln/>
+        </p:spPr>
+        <p:txBody>
+          <a:bodyPr wrap="square" rtlCol="0" anchor="ctr"/>
+          <a:lstStyle/>
+          <a:p>
+            <a:pPr indent="0" marL="0">
+              <a:buNone/>
+            </a:pPr>
+            <a:endParaRPr lang="en-US" dirty="0"/>
+          </a:p>
+        </p:txBody>
+      </p:sp>
+      <p:sp>
+        <p:nvSpPr>
+          <p:cNvPr id="40" name="Text 38"/>
+          <p:cNvSpPr/>
+          <p:nvPr/>
+        </p:nvSpPr>
+        <p:spPr>
+          <a:xfrm>
+            <a:off x="677098" y="6055519"/>
+            <a:ext cx="767737" cy="260747"/>
+          </a:xfrm>
+          <a:prstGeom prst="rect">
+            <a:avLst/>
+          </a:prstGeom>
+          <a:noFill/>
+          <a:ln/>
+        </p:spPr>
+        <p:txBody>
+          <a:bodyPr wrap="square" lIns="0" tIns="0" rIns="0" bIns="0" rtlCol="0" anchor="t"/>
+          <a:lstStyle/>
+          <a:p>
+            <a:pPr algn="l" indent="0" marL="0">
+              <a:lnSpc>
+                <a:spcPts val="2053"/>
+              </a:lnSpc>
+              <a:buNone/>
+            </a:pPr>
+            <a:r>
+              <a:rPr lang="en-US" sz="1466" dirty="0">
+                <a:solidFill>
+                  <a:srgbClr val="7A7164"/>
+                </a:solidFill>
+                <a:latin typeface="Inter" pitchFamily="34" charset="0"/>
+                <a:ea typeface="Inter" pitchFamily="34" charset="-122"/>
+                <a:cs typeface="Inter" pitchFamily="34" charset="-120"/>
+              </a:rPr>
+              <a:t>02 / 06</a:t>
+            </a:r>
+            <a:endParaRPr lang="en-US" sz="1466" dirty="0"/>
+          </a:p>
+        </p:txBody>
+      </p:sp>
+      <p:sp>
+        <p:nvSpPr>
+          <p:cNvPr id="41" name="Text 39"/>
+          <p:cNvSpPr/>
+          <p:nvPr/>
+        </p:nvSpPr>
+        <p:spPr>
+          <a:xfrm>
+            <a:off x="4725655" y="6055519"/>
+            <a:ext cx="6786199" cy="260747"/>
+          </a:xfrm>
+          <a:prstGeom prst="rect">
+            <a:avLst/>
+          </a:prstGeom>
+          <a:noFill/>
+          <a:ln/>
+        </p:spPr>
+        <p:txBody>
+          <a:bodyPr wrap="square" lIns="0" tIns="0" rIns="0" bIns="0" rtlCol="0" anchor="t"/>
+          <a:lstStyle/>
+          <a:p>
+            <a:pPr algn="r" indent="0" marL="0">
+              <a:lnSpc>
+                <a:spcPts val="2053"/>
+              </a:lnSpc>
+              <a:buNone/>
+            </a:pPr>
+            <a:r>
+              <a:rPr lang="en-US" sz="1466" dirty="0">
+                <a:solidFill>
+                  <a:srgbClr val="7A7164"/>
+                </a:solidFill>
+                <a:latin typeface="Inter" pitchFamily="34" charset="0"/>
+                <a:ea typeface="Inter" pitchFamily="34" charset="-122"/>
+                <a:cs typeface="Inter" pitchFamily="34" charset="-120"/>
+              </a:rPr>
+              <a:t>Source: none — this deck cites no cost figures; the argument is structural.</a:t>
+            </a:r>
+            <a:endParaRPr lang="en-US" sz="1466" dirty="0"/>
+          </a:p>
+        </p:txBody>
+      </p:sp>
     </p:spTree>
   </p:cSld>
   <p:clrMapOvr>
@@ -1397,6 +3045,13 @@
 <file path=ppt/slides/slide3.xml><?xml version="1.0" encoding="utf-8"?>
 <p:sld xmlns:a="http://schemas.openxmlformats.org/drawingml/2006/main" xmlns:r="http://schemas.openxmlformats.org/officeDocument/2006/relationships" xmlns:p="http://schemas.openxmlformats.org/presentationml/2006/main">
   <p:cSld name="Slide 3">
+    <p:bg>
+      <p:bgPr>
+        <a:solidFill>
+          <a:srgbClr val="F7F4EE"/>
+        </a:solidFill>
+      </p:bgPr>
+    </p:bg>
     <p:spTree>
       <p:nvGrpSpPr>
         <p:cNvPr id="1" name=""/>
@@ -1411,30 +3066,694 @@
           <a:chExt cx="0" cy="0"/>
         </a:xfrm>
       </p:grpSpPr>
-      <p:pic>
-        <p:nvPicPr>
-          <p:cNvPr id="2" name="Image 0" descr="/tmp/slide-1787840555912-3sgxlzfmkz1.png">    </p:cNvPr>
-          <p:cNvPicPr>
-            <a:picLocks noChangeAspect="1"/>
-          </p:cNvPicPr>
-          <p:nvPr/>
-        </p:nvPicPr>
-        <p:blipFill>
-          <a:blip r:embed="rId1"/>
-          <a:stretch>
-            <a:fillRect/>
-          </a:stretch>
-        </p:blipFill>
-        <p:spPr>
-          <a:xfrm>
-            <a:off x="0" y="0"/>
-            <a:ext cx="12188952" cy="6858000"/>
-          </a:xfrm>
-          <a:prstGeom prst="rect">
-            <a:avLst/>
-          </a:prstGeom>
-        </p:spPr>
-      </p:pic>
+      <p:sp>
+        <p:nvSpPr>
+          <p:cNvPr id="2" name="Text 0"/>
+          <p:cNvSpPr/>
+          <p:nvPr/>
+        </p:nvSpPr>
+        <p:spPr>
+          <a:xfrm>
+            <a:off x="677098" y="541734"/>
+            <a:ext cx="11051451" cy="260747"/>
+          </a:xfrm>
+          <a:prstGeom prst="rect">
+            <a:avLst/>
+          </a:prstGeom>
+          <a:noFill/>
+          <a:ln/>
+        </p:spPr>
+        <p:txBody>
+          <a:bodyPr wrap="square" lIns="0" tIns="0" rIns="0" bIns="0" rtlCol="0" anchor="t"/>
+          <a:lstStyle/>
+          <a:p>
+            <a:pPr algn="l" indent="0" marL="0">
+              <a:lnSpc>
+                <a:spcPts val="2053"/>
+              </a:lnSpc>
+              <a:buNone/>
+            </a:pPr>
+            <a:r>
+              <a:rPr lang="en-US" sz="1466" dirty="0">
+                <a:solidFill>
+                  <a:srgbClr val="7A7164"/>
+                </a:solidFill>
+                <a:latin typeface="Inter" pitchFamily="34" charset="0"/>
+                <a:ea typeface="Inter" pitchFamily="34" charset="-122"/>
+                <a:cs typeface="Inter" pitchFamily="34" charset="-120"/>
+              </a:rPr>
+              <a:t>PLATFORM ENGINEERING · OBSERVABILITY BUDGET</a:t>
+            </a:r>
+            <a:endParaRPr lang="en-US" sz="1466" dirty="0"/>
+          </a:p>
+        </p:txBody>
+      </p:sp>
+      <p:sp>
+        <p:nvSpPr>
+          <p:cNvPr id="3" name="Text 1"/>
+          <p:cNvSpPr/>
+          <p:nvPr/>
+        </p:nvSpPr>
+        <p:spPr>
+          <a:xfrm>
+            <a:off x="677098" y="937816"/>
+            <a:ext cx="10834756" cy="12700"/>
+          </a:xfrm>
+          <a:prstGeom prst="rect">
+            <a:avLst/>
+          </a:prstGeom>
+          <a:solidFill>
+            <a:srgbClr val="DAD3C4"/>
+          </a:solidFill>
+          <a:ln/>
+        </p:spPr>
+        <p:txBody>
+          <a:bodyPr wrap="square" rtlCol="0" anchor="ctr"/>
+          <a:lstStyle/>
+          <a:p>
+            <a:pPr indent="0" marL="0">
+              <a:buNone/>
+            </a:pPr>
+            <a:endParaRPr lang="en-US" dirty="0"/>
+          </a:p>
+        </p:txBody>
+      </p:sp>
+      <p:sp>
+        <p:nvSpPr>
+          <p:cNvPr id="4" name="Text 2"/>
+          <p:cNvSpPr/>
+          <p:nvPr/>
+        </p:nvSpPr>
+        <p:spPr>
+          <a:xfrm>
+            <a:off x="677098" y="1289050"/>
+            <a:ext cx="11051451" cy="594320"/>
+          </a:xfrm>
+          <a:prstGeom prst="rect">
+            <a:avLst/>
+          </a:prstGeom>
+          <a:noFill/>
+          <a:ln/>
+        </p:spPr>
+        <p:txBody>
+          <a:bodyPr wrap="square" lIns="0" tIns="0" rIns="0" bIns="0" rtlCol="0" anchor="t"/>
+          <a:lstStyle/>
+          <a:p>
+            <a:pPr algn="l" indent="0" marL="0">
+              <a:lnSpc>
+                <a:spcPts val="4679"/>
+              </a:lnSpc>
+              <a:spcAft>
+                <a:spcPts val="1866"/>
+              </a:spcAft>
+              <a:buNone/>
+            </a:pPr>
+            <a:r>
+              <a:rPr lang="en-US" sz="3466" b="1" dirty="0">
+                <a:solidFill>
+                  <a:srgbClr val="1F1B16"/>
+                </a:solidFill>
+                <a:latin typeface="Source Serif 4" pitchFamily="34" charset="0"/>
+                <a:ea typeface="Source Serif 4" pitchFamily="34" charset="-122"/>
+                <a:cs typeface="Source Serif 4" pitchFamily="34" charset="-120"/>
+              </a:rPr>
+              <a:t>Volume grows with traffic. Readership does not.</a:t>
+            </a:r>
+            <a:endParaRPr lang="en-US" sz="3466" dirty="0"/>
+          </a:p>
+        </p:txBody>
+      </p:sp>
+      <p:sp>
+        <p:nvSpPr>
+          <p:cNvPr id="5" name="Text 3"/>
+          <p:cNvSpPr/>
+          <p:nvPr/>
+        </p:nvSpPr>
+        <p:spPr>
+          <a:xfrm>
+            <a:off x="926670" y="2369939"/>
+            <a:ext cx="4843990" cy="430014"/>
+          </a:xfrm>
+          <a:prstGeom prst="rect">
+            <a:avLst/>
+          </a:prstGeom>
+          <a:noFill/>
+          <a:ln/>
+        </p:spPr>
+        <p:txBody>
+          <a:bodyPr wrap="square" lIns="0" tIns="0" rIns="0" bIns="169312" rtlCol="0" anchor="t"/>
+          <a:lstStyle/>
+          <a:p>
+            <a:pPr algn="l" indent="0" marL="0">
+              <a:lnSpc>
+                <a:spcPts val="2053"/>
+              </a:lnSpc>
+              <a:buNone/>
+            </a:pPr>
+            <a:r>
+              <a:rPr lang="en-US" sz="1466" dirty="0">
+                <a:solidFill>
+                  <a:srgbClr val="7A7164"/>
+                </a:solidFill>
+                <a:latin typeface="Inter" pitchFamily="34" charset="0"/>
+                <a:ea typeface="Inter" pitchFamily="34" charset="-122"/>
+                <a:cs typeface="Inter" pitchFamily="34" charset="-120"/>
+              </a:rPr>
+              <a:t>WHAT MULTIPLIES</a:t>
+            </a:r>
+            <a:endParaRPr lang="en-US" sz="1466" dirty="0"/>
+          </a:p>
+        </p:txBody>
+      </p:sp>
+      <p:sp>
+        <p:nvSpPr>
+          <p:cNvPr id="6" name="Text 4"/>
+          <p:cNvSpPr/>
+          <p:nvPr/>
+        </p:nvSpPr>
+        <p:spPr>
+          <a:xfrm>
+            <a:off x="926670" y="2799953"/>
+            <a:ext cx="4749009" cy="1909961"/>
+          </a:xfrm>
+          <a:prstGeom prst="rect">
+            <a:avLst/>
+          </a:prstGeom>
+          <a:noFill/>
+          <a:ln/>
+        </p:spPr>
+        <p:txBody>
+          <a:bodyPr wrap="square" lIns="0" tIns="0" rIns="0" bIns="0" rtlCol="0" anchor="t"/>
+          <a:lstStyle/>
+          <a:p>
+            <a:pPr algn="l" marL="342900" indent="-342900">
+              <a:lnSpc>
+                <a:spcPts val="2800"/>
+              </a:lnSpc>
+              <a:buSzPct val="100000"/>
+              <a:buChar char="•"/>
+            </a:pPr>
+            <a:r>
+              <a:rPr lang="en-US" sz="1866" dirty="0">
+                <a:solidFill>
+                  <a:srgbClr val="1F1B16"/>
+                </a:solidFill>
+                <a:latin typeface="Inter" pitchFamily="34" charset="0"/>
+                <a:ea typeface="Inter" pitchFamily="34" charset="-122"/>
+                <a:cs typeface="Inter" pitchFamily="34" charset="-120"/>
+              </a:rPr>
+              <a:t>Requests per second</a:t>
+            </a:r>
+            <a:endParaRPr lang="en-US" sz="1866" dirty="0"/>
+          </a:p>
+          <a:p>
+            <a:pPr algn="l" marL="342900" indent="-342900">
+              <a:lnSpc>
+                <a:spcPts val="2800"/>
+              </a:lnSpc>
+              <a:buSzPct val="100000"/>
+              <a:buChar char="•"/>
+            </a:pPr>
+            <a:r>
+              <a:rPr lang="en-US" sz="1866" b="1" dirty="0">
+                <a:solidFill>
+                  <a:srgbClr val="B5503A"/>
+                </a:solidFill>
+                <a:latin typeface="Inter" pitchFamily="34" charset="0"/>
+                <a:ea typeface="Inter" pitchFamily="34" charset="-122"/>
+                <a:cs typeface="Inter" pitchFamily="34" charset="-120"/>
+              </a:rPr>
+              <a:t>×</a:t>
+            </a:r>
+            <a:pPr algn="l" indent="0" marL="0">
+              <a:lnSpc>
+                <a:spcPts val="2800"/>
+              </a:lnSpc>
+              <a:buNone/>
+            </a:pPr>
+            <a:r>
+              <a:rPr lang="en-US" sz="1866" dirty="0">
+                <a:solidFill>
+                  <a:srgbClr val="1F1B16"/>
+                </a:solidFill>
+                <a:latin typeface="Inter" pitchFamily="34" charset="0"/>
+                <a:ea typeface="Inter" pitchFamily="34" charset="-122"/>
+                <a:cs typeface="Inter" pitchFamily="34" charset="-120"/>
+              </a:rPr>
+              <a:t>Log lines emitted per request</a:t>
+            </a:r>
+            <a:endParaRPr lang="en-US" sz="1866" dirty="0"/>
+          </a:p>
+          <a:p>
+            <a:pPr algn="l" marL="342900" indent="-342900">
+              <a:lnSpc>
+                <a:spcPts val="2800"/>
+              </a:lnSpc>
+              <a:buSzPct val="100000"/>
+              <a:buChar char="•"/>
+            </a:pPr>
+            <a:r>
+              <a:rPr lang="en-US" sz="1866" b="1" dirty="0">
+                <a:solidFill>
+                  <a:srgbClr val="B5503A"/>
+                </a:solidFill>
+                <a:latin typeface="Inter" pitchFamily="34" charset="0"/>
+                <a:ea typeface="Inter" pitchFamily="34" charset="-122"/>
+                <a:cs typeface="Inter" pitchFamily="34" charset="-120"/>
+              </a:rPr>
+              <a:t>×</a:t>
+            </a:r>
+            <a:pPr algn="l" indent="0" marL="0">
+              <a:lnSpc>
+                <a:spcPts val="2800"/>
+              </a:lnSpc>
+              <a:buNone/>
+            </a:pPr>
+            <a:r>
+              <a:rPr lang="en-US" sz="1866" dirty="0">
+                <a:solidFill>
+                  <a:srgbClr val="1F1B16"/>
+                </a:solidFill>
+                <a:latin typeface="Inter" pitchFamily="34" charset="0"/>
+                <a:ea typeface="Inter" pitchFamily="34" charset="-122"/>
+                <a:cs typeface="Inter" pitchFamily="34" charset="-120"/>
+              </a:rPr>
+              <a:t>Replicas emitting the same line</a:t>
+            </a:r>
+            <a:endParaRPr lang="en-US" sz="1866" dirty="0"/>
+          </a:p>
+          <a:p>
+            <a:pPr algn="l" marL="342900" indent="-342900">
+              <a:lnSpc>
+                <a:spcPts val="2800"/>
+              </a:lnSpc>
+              <a:buSzPct val="100000"/>
+              <a:buChar char="•"/>
+            </a:pPr>
+            <a:r>
+              <a:rPr lang="en-US" sz="1866" b="1" dirty="0">
+                <a:solidFill>
+                  <a:srgbClr val="B5503A"/>
+                </a:solidFill>
+                <a:latin typeface="Inter" pitchFamily="34" charset="0"/>
+                <a:ea typeface="Inter" pitchFamily="34" charset="-122"/>
+                <a:cs typeface="Inter" pitchFamily="34" charset="-120"/>
+              </a:rPr>
+              <a:t>×</a:t>
+            </a:r>
+            <a:pPr algn="l" indent="0" marL="0">
+              <a:lnSpc>
+                <a:spcPts val="2800"/>
+              </a:lnSpc>
+              <a:buNone/>
+            </a:pPr>
+            <a:r>
+              <a:rPr lang="en-US" sz="1866" dirty="0">
+                <a:solidFill>
+                  <a:srgbClr val="1F1B16"/>
+                </a:solidFill>
+                <a:latin typeface="Inter" pitchFamily="34" charset="0"/>
+                <a:ea typeface="Inter" pitchFamily="34" charset="-122"/>
+                <a:cs typeface="Inter" pitchFamily="34" charset="-120"/>
+              </a:rPr>
+              <a:t>Days retained, indexed, replicated</a:t>
+            </a:r>
+            <a:endParaRPr lang="en-US" sz="1866" dirty="0"/>
+          </a:p>
+        </p:txBody>
+      </p:sp>
+      <p:sp>
+        <p:nvSpPr>
+          <p:cNvPr id="7" name="Text 5"/>
+          <p:cNvSpPr/>
+          <p:nvPr/>
+        </p:nvSpPr>
+        <p:spPr>
+          <a:xfrm>
+            <a:off x="6513273" y="2369939"/>
+            <a:ext cx="4843990" cy="430014"/>
+          </a:xfrm>
+          <a:prstGeom prst="rect">
+            <a:avLst/>
+          </a:prstGeom>
+          <a:noFill/>
+          <a:ln/>
+        </p:spPr>
+        <p:txBody>
+          <a:bodyPr wrap="square" lIns="0" tIns="0" rIns="0" bIns="169312" rtlCol="0" anchor="t"/>
+          <a:lstStyle/>
+          <a:p>
+            <a:pPr algn="l" indent="0" marL="0">
+              <a:lnSpc>
+                <a:spcPts val="2053"/>
+              </a:lnSpc>
+              <a:buNone/>
+            </a:pPr>
+            <a:r>
+              <a:rPr lang="en-US" sz="1466" dirty="0">
+                <a:solidFill>
+                  <a:srgbClr val="7A7164"/>
+                </a:solidFill>
+                <a:latin typeface="Inter" pitchFamily="34" charset="0"/>
+                <a:ea typeface="Inter" pitchFamily="34" charset="-122"/>
+                <a:cs typeface="Inter" pitchFamily="34" charset="-120"/>
+              </a:rPr>
+              <a:t>WHAT DOES NOT</a:t>
+            </a:r>
+            <a:endParaRPr lang="en-US" sz="1466" dirty="0"/>
+          </a:p>
+        </p:txBody>
+      </p:sp>
+      <p:sp>
+        <p:nvSpPr>
+          <p:cNvPr id="8" name="Text 6"/>
+          <p:cNvSpPr/>
+          <p:nvPr/>
+        </p:nvSpPr>
+        <p:spPr>
+          <a:xfrm>
+            <a:off x="6513273" y="2799953"/>
+            <a:ext cx="4749009" cy="1909961"/>
+          </a:xfrm>
+          <a:prstGeom prst="rect">
+            <a:avLst/>
+          </a:prstGeom>
+          <a:noFill/>
+          <a:ln/>
+        </p:spPr>
+        <p:txBody>
+          <a:bodyPr wrap="square" lIns="0" tIns="0" rIns="0" bIns="0" rtlCol="0" anchor="t"/>
+          <a:lstStyle/>
+          <a:p>
+            <a:pPr algn="l" marL="342900" indent="-342900">
+              <a:lnSpc>
+                <a:spcPts val="2800"/>
+              </a:lnSpc>
+              <a:buSzPct val="100000"/>
+              <a:buChar char="•"/>
+            </a:pPr>
+            <a:r>
+              <a:rPr lang="en-US" sz="1866" dirty="0">
+                <a:solidFill>
+                  <a:srgbClr val="1F1B16"/>
+                </a:solidFill>
+                <a:latin typeface="Inter" pitchFamily="34" charset="0"/>
+                <a:ea typeface="Inter" pitchFamily="34" charset="-122"/>
+                <a:cs typeface="Inter" pitchFamily="34" charset="-120"/>
+              </a:rPr>
+              <a:t>Incidents, one at a time</a:t>
+            </a:r>
+            <a:endParaRPr lang="en-US" sz="1866" dirty="0"/>
+          </a:p>
+          <a:p>
+            <a:pPr algn="l" marL="342900" indent="-342900">
+              <a:lnSpc>
+                <a:spcPts val="2800"/>
+              </a:lnSpc>
+              <a:buSzPct val="100000"/>
+              <a:buChar char="•"/>
+            </a:pPr>
+            <a:r>
+              <a:rPr lang="en-US" sz="1866" dirty="0">
+                <a:solidFill>
+                  <a:srgbClr val="1F1B16"/>
+                </a:solidFill>
+                <a:latin typeface="Inter" pitchFamily="34" charset="0"/>
+                <a:ea typeface="Inter" pitchFamily="34" charset="-122"/>
+                <a:cs typeface="Inter" pitchFamily="34" charset="-120"/>
+              </a:rPr>
+              <a:t>Engineers who open logs at all</a:t>
+            </a:r>
+            <a:endParaRPr lang="en-US" sz="1866" dirty="0"/>
+          </a:p>
+          <a:p>
+            <a:pPr algn="l" marL="342900" indent="-342900">
+              <a:lnSpc>
+                <a:spcPts val="2800"/>
+              </a:lnSpc>
+              <a:buSzPct val="100000"/>
+              <a:buChar char="•"/>
+            </a:pPr>
+            <a:r>
+              <a:rPr lang="en-US" sz="1866" dirty="0">
+                <a:solidFill>
+                  <a:srgbClr val="1F1B16"/>
+                </a:solidFill>
+                <a:latin typeface="Inter" pitchFamily="34" charset="0"/>
+                <a:ea typeface="Inter" pitchFamily="34" charset="-122"/>
+                <a:cs typeface="Inter" pitchFamily="34" charset="-120"/>
+              </a:rPr>
+              <a:t>The window they read: minutes</a:t>
+            </a:r>
+            <a:endParaRPr lang="en-US" sz="1866" dirty="0"/>
+          </a:p>
+          <a:p>
+            <a:pPr algn="l" marL="342900" indent="-342900">
+              <a:lnSpc>
+                <a:spcPts val="2800"/>
+              </a:lnSpc>
+              <a:buSzPct val="100000"/>
+              <a:buChar char="•"/>
+            </a:pPr>
+            <a:r>
+              <a:rPr lang="en-US" sz="1866" dirty="0">
+                <a:solidFill>
+                  <a:srgbClr val="1F1B16"/>
+                </a:solidFill>
+                <a:latin typeface="Inter" pitchFamily="34" charset="0"/>
+                <a:ea typeface="Inter" pitchFamily="34" charset="-122"/>
+                <a:cs typeface="Inter" pitchFamily="34" charset="-120"/>
+              </a:rPr>
+              <a:t>The three queries they know</a:t>
+            </a:r>
+            <a:endParaRPr lang="en-US" sz="1866" dirty="0"/>
+          </a:p>
+        </p:txBody>
+      </p:sp>
+      <p:sp>
+        <p:nvSpPr>
+          <p:cNvPr id="9" name="Text 7"/>
+          <p:cNvSpPr/>
+          <p:nvPr/>
+        </p:nvSpPr>
+        <p:spPr>
+          <a:xfrm>
+            <a:off x="677098" y="5230416"/>
+            <a:ext cx="11051451" cy="406202"/>
+          </a:xfrm>
+          <a:prstGeom prst="rect">
+            <a:avLst/>
+          </a:prstGeom>
+          <a:noFill/>
+          <a:ln/>
+        </p:spPr>
+        <p:txBody>
+          <a:bodyPr wrap="square" lIns="0" tIns="0" rIns="0" bIns="0" rtlCol="0" anchor="t"/>
+          <a:lstStyle/>
+          <a:p>
+            <a:pPr algn="l" indent="0" marL="0">
+              <a:lnSpc>
+                <a:spcPts val="3200"/>
+              </a:lnSpc>
+              <a:buNone/>
+            </a:pPr>
+            <a:r>
+              <a:rPr lang="en-US" sz="2133" dirty="0">
+                <a:solidFill>
+                  <a:srgbClr val="1F1B16"/>
+                </a:solidFill>
+                <a:latin typeface="Inter" pitchFamily="34" charset="0"/>
+                <a:ea typeface="Inter" pitchFamily="34" charset="-122"/>
+                <a:cs typeface="Inter" pitchFamily="34" charset="-120"/>
+              </a:rPr>
+              <a:t>Cost is a </a:t>
+            </a:r>
+            <a:pPr algn="l" indent="0" marL="0">
+              <a:lnSpc>
+                <a:spcPts val="3200"/>
+              </a:lnSpc>
+              <a:buNone/>
+            </a:pPr>
+            <a:r>
+              <a:rPr lang="en-US" sz="2133" b="1" dirty="0">
+                <a:solidFill>
+                  <a:srgbClr val="B5503A"/>
+                </a:solidFill>
+                <a:latin typeface="Inter" pitchFamily="34" charset="0"/>
+                <a:ea typeface="Inter" pitchFamily="34" charset="-122"/>
+                <a:cs typeface="Inter" pitchFamily="34" charset="-120"/>
+              </a:rPr>
+              <a:t>product</a:t>
+            </a:r>
+            <a:pPr algn="l" indent="0" marL="0">
+              <a:lnSpc>
+                <a:spcPts val="3200"/>
+              </a:lnSpc>
+              <a:buNone/>
+            </a:pPr>
+            <a:r>
+              <a:rPr lang="en-US" sz="2133" dirty="0">
+                <a:solidFill>
+                  <a:srgbClr val="1F1B16"/>
+                </a:solidFill>
+                <a:latin typeface="Inter" pitchFamily="34" charset="0"/>
+                <a:ea typeface="Inter" pitchFamily="34" charset="-122"/>
+                <a:cs typeface="Inter" pitchFamily="34" charset="-120"/>
+              </a:rPr>
+              <a:t>. Readership is a </a:t>
+            </a:r>
+            <a:pPr algn="l" indent="0" marL="0">
+              <a:lnSpc>
+                <a:spcPts val="3200"/>
+              </a:lnSpc>
+              <a:buNone/>
+            </a:pPr>
+            <a:r>
+              <a:rPr lang="en-US" sz="2133" b="1" dirty="0">
+                <a:solidFill>
+                  <a:srgbClr val="B5503A"/>
+                </a:solidFill>
+                <a:latin typeface="Inter" pitchFamily="34" charset="0"/>
+                <a:ea typeface="Inter" pitchFamily="34" charset="-122"/>
+                <a:cs typeface="Inter" pitchFamily="34" charset="-120"/>
+              </a:rPr>
+              <a:t>constant</a:t>
+            </a:r>
+            <a:pPr algn="l" indent="0" marL="0">
+              <a:lnSpc>
+                <a:spcPts val="3200"/>
+              </a:lnSpc>
+              <a:buNone/>
+            </a:pPr>
+            <a:r>
+              <a:rPr lang="en-US" sz="2133" dirty="0">
+                <a:solidFill>
+                  <a:srgbClr val="1F1B16"/>
+                </a:solidFill>
+                <a:latin typeface="Inter" pitchFamily="34" charset="0"/>
+                <a:ea typeface="Inter" pitchFamily="34" charset="-122"/>
+                <a:cs typeface="Inter" pitchFamily="34" charset="-120"/>
+              </a:rPr>
+              <a:t>. That gap is the whole argument.</a:t>
+            </a:r>
+            <a:endParaRPr lang="en-US" sz="2133" dirty="0"/>
+          </a:p>
+        </p:txBody>
+      </p:sp>
+      <p:sp>
+        <p:nvSpPr>
+          <p:cNvPr id="10" name="Text 8"/>
+          <p:cNvSpPr/>
+          <p:nvPr/>
+        </p:nvSpPr>
+        <p:spPr>
+          <a:xfrm>
+            <a:off x="677098" y="5907484"/>
+            <a:ext cx="10834756" cy="12700"/>
+          </a:xfrm>
+          <a:prstGeom prst="rect">
+            <a:avLst/>
+          </a:prstGeom>
+          <a:solidFill>
+            <a:srgbClr val="DAD3C4"/>
+          </a:solidFill>
+          <a:ln/>
+        </p:spPr>
+        <p:txBody>
+          <a:bodyPr wrap="square" rtlCol="0" anchor="ctr"/>
+          <a:lstStyle/>
+          <a:p>
+            <a:pPr indent="0" marL="0">
+              <a:buNone/>
+            </a:pPr>
+            <a:endParaRPr lang="en-US" dirty="0"/>
+          </a:p>
+        </p:txBody>
+      </p:sp>
+      <p:sp>
+        <p:nvSpPr>
+          <p:cNvPr id="11" name="Text 9"/>
+          <p:cNvSpPr/>
+          <p:nvPr/>
+        </p:nvSpPr>
+        <p:spPr>
+          <a:xfrm>
+            <a:off x="677098" y="6055519"/>
+            <a:ext cx="767737" cy="260747"/>
+          </a:xfrm>
+          <a:prstGeom prst="rect">
+            <a:avLst/>
+          </a:prstGeom>
+          <a:noFill/>
+          <a:ln/>
+        </p:spPr>
+        <p:txBody>
+          <a:bodyPr wrap="square" lIns="0" tIns="0" rIns="0" bIns="0" rtlCol="0" anchor="t"/>
+          <a:lstStyle/>
+          <a:p>
+            <a:pPr algn="l" indent="0" marL="0">
+              <a:lnSpc>
+                <a:spcPts val="2053"/>
+              </a:lnSpc>
+              <a:buNone/>
+            </a:pPr>
+            <a:r>
+              <a:rPr lang="en-US" sz="1466" dirty="0">
+                <a:solidFill>
+                  <a:srgbClr val="7A7164"/>
+                </a:solidFill>
+                <a:latin typeface="Inter" pitchFamily="34" charset="0"/>
+                <a:ea typeface="Inter" pitchFamily="34" charset="-122"/>
+                <a:cs typeface="Inter" pitchFamily="34" charset="-120"/>
+              </a:rPr>
+              <a:t>03 / 06</a:t>
+            </a:r>
+            <a:endParaRPr lang="en-US" sz="1466" dirty="0"/>
+          </a:p>
+        </p:txBody>
+      </p:sp>
+      <p:sp>
+        <p:nvSpPr>
+          <p:cNvPr id="12" name="Text 10"/>
+          <p:cNvSpPr/>
+          <p:nvPr/>
+        </p:nvSpPr>
+        <p:spPr>
+          <a:xfrm>
+            <a:off x="4725655" y="6055519"/>
+            <a:ext cx="6786199" cy="260747"/>
+          </a:xfrm>
+          <a:prstGeom prst="rect">
+            <a:avLst/>
+          </a:prstGeom>
+          <a:noFill/>
+          <a:ln/>
+        </p:spPr>
+        <p:txBody>
+          <a:bodyPr wrap="square" lIns="0" tIns="0" rIns="0" bIns="0" rtlCol="0" anchor="t"/>
+          <a:lstStyle/>
+          <a:p>
+            <a:pPr algn="r" indent="0" marL="0">
+              <a:lnSpc>
+                <a:spcPts val="2053"/>
+              </a:lnSpc>
+              <a:buNone/>
+            </a:pPr>
+            <a:r>
+              <a:rPr lang="en-US" sz="1466" dirty="0">
+                <a:solidFill>
+                  <a:srgbClr val="7A7164"/>
+                </a:solidFill>
+                <a:latin typeface="Inter" pitchFamily="34" charset="0"/>
+                <a:ea typeface="Inter" pitchFamily="34" charset="-122"/>
+                <a:cs typeface="Inter" pitchFamily="34" charset="-120"/>
+              </a:rPr>
+              <a:t>Source: none — this deck cites no cost figures; the argument is structural.</a:t>
+            </a:r>
+            <a:endParaRPr lang="en-US" sz="1466" dirty="0"/>
+          </a:p>
+        </p:txBody>
+      </p:sp>
     </p:spTree>
   </p:cSld>
   <p:clrMapOvr>
@@ -1446,6 +3765,13 @@
 <file path=ppt/slides/slide4.xml><?xml version="1.0" encoding="utf-8"?>
 <p:sld xmlns:a="http://schemas.openxmlformats.org/drawingml/2006/main" xmlns:r="http://schemas.openxmlformats.org/officeDocument/2006/relationships" xmlns:p="http://schemas.openxmlformats.org/presentationml/2006/main">
   <p:cSld name="Slide 4">
+    <p:bg>
+      <p:bgPr>
+        <a:solidFill>
+          <a:srgbClr val="F7F4EE"/>
+        </a:solidFill>
+      </p:bgPr>
+    </p:bg>
     <p:spTree>
       <p:nvGrpSpPr>
         <p:cNvPr id="1" name=""/>
@@ -1460,30 +3786,937 @@
           <a:chExt cx="0" cy="0"/>
         </a:xfrm>
       </p:grpSpPr>
-      <p:pic>
-        <p:nvPicPr>
-          <p:cNvPr id="2" name="Image 0" descr="/tmp/slide-1787840556166-acgxf5mrky5.png">    </p:cNvPr>
-          <p:cNvPicPr>
-            <a:picLocks noChangeAspect="1"/>
-          </p:cNvPicPr>
-          <p:nvPr/>
-        </p:nvPicPr>
-        <p:blipFill>
-          <a:blip r:embed="rId1"/>
-          <a:stretch>
-            <a:fillRect/>
-          </a:stretch>
-        </p:blipFill>
-        <p:spPr>
-          <a:xfrm>
-            <a:off x="0" y="0"/>
-            <a:ext cx="12188952" cy="6858000"/>
-          </a:xfrm>
-          <a:prstGeom prst="rect">
-            <a:avLst/>
-          </a:prstGeom>
-        </p:spPr>
-      </p:pic>
+      <p:sp>
+        <p:nvSpPr>
+          <p:cNvPr id="2" name="Text 0"/>
+          <p:cNvSpPr/>
+          <p:nvPr/>
+        </p:nvSpPr>
+        <p:spPr>
+          <a:xfrm>
+            <a:off x="677098" y="541734"/>
+            <a:ext cx="11051451" cy="260747"/>
+          </a:xfrm>
+          <a:prstGeom prst="rect">
+            <a:avLst/>
+          </a:prstGeom>
+          <a:noFill/>
+          <a:ln/>
+        </p:spPr>
+        <p:txBody>
+          <a:bodyPr wrap="square" lIns="0" tIns="0" rIns="0" bIns="0" rtlCol="0" anchor="t"/>
+          <a:lstStyle/>
+          <a:p>
+            <a:pPr algn="l" indent="0" marL="0">
+              <a:lnSpc>
+                <a:spcPts val="2053"/>
+              </a:lnSpc>
+              <a:buNone/>
+            </a:pPr>
+            <a:r>
+              <a:rPr lang="en-US" sz="1466" dirty="0">
+                <a:solidFill>
+                  <a:srgbClr val="7A7164"/>
+                </a:solidFill>
+                <a:latin typeface="Inter" pitchFamily="34" charset="0"/>
+                <a:ea typeface="Inter" pitchFamily="34" charset="-122"/>
+                <a:cs typeface="Inter" pitchFamily="34" charset="-120"/>
+              </a:rPr>
+              <a:t>PLATFORM ENGINEERING · OBSERVABILITY BUDGET</a:t>
+            </a:r>
+            <a:endParaRPr lang="en-US" sz="1466" dirty="0"/>
+          </a:p>
+        </p:txBody>
+      </p:sp>
+      <p:sp>
+        <p:nvSpPr>
+          <p:cNvPr id="3" name="Text 1"/>
+          <p:cNvSpPr/>
+          <p:nvPr/>
+        </p:nvSpPr>
+        <p:spPr>
+          <a:xfrm>
+            <a:off x="677098" y="937816"/>
+            <a:ext cx="10834756" cy="12700"/>
+          </a:xfrm>
+          <a:prstGeom prst="rect">
+            <a:avLst/>
+          </a:prstGeom>
+          <a:solidFill>
+            <a:srgbClr val="DAD3C4"/>
+          </a:solidFill>
+          <a:ln/>
+        </p:spPr>
+        <p:txBody>
+          <a:bodyPr wrap="square" rtlCol="0" anchor="ctr"/>
+          <a:lstStyle/>
+          <a:p>
+            <a:pPr indent="0" marL="0">
+              <a:buNone/>
+            </a:pPr>
+            <a:endParaRPr lang="en-US" dirty="0"/>
+          </a:p>
+        </p:txBody>
+      </p:sp>
+      <p:sp>
+        <p:nvSpPr>
+          <p:cNvPr id="4" name="Text 2"/>
+          <p:cNvSpPr/>
+          <p:nvPr/>
+        </p:nvSpPr>
+        <p:spPr>
+          <a:xfrm>
+            <a:off x="677098" y="1289050"/>
+            <a:ext cx="11051451" cy="594320"/>
+          </a:xfrm>
+          <a:prstGeom prst="rect">
+            <a:avLst/>
+          </a:prstGeom>
+          <a:noFill/>
+          <a:ln/>
+        </p:spPr>
+        <p:txBody>
+          <a:bodyPr wrap="square" lIns="0" tIns="0" rIns="0" bIns="0" rtlCol="0" anchor="t"/>
+          <a:lstStyle/>
+          <a:p>
+            <a:pPr algn="l" indent="0" marL="0">
+              <a:lnSpc>
+                <a:spcPts val="4679"/>
+              </a:lnSpc>
+              <a:spcAft>
+                <a:spcPts val="1866"/>
+              </a:spcAft>
+              <a:buNone/>
+            </a:pPr>
+            <a:r>
+              <a:rPr lang="en-US" sz="3466" b="1" dirty="0">
+                <a:solidFill>
+                  <a:srgbClr val="1F1B16"/>
+                </a:solidFill>
+                <a:latin typeface="Source Serif 4" pitchFamily="34" charset="0"/>
+                <a:ea typeface="Source Serif 4" pitchFamily="34" charset="-122"/>
+                <a:cs typeface="Source Serif 4" pitchFamily="34" charset="-120"/>
+              </a:rPr>
+              <a:t>Sampling and retention are bets, not savings</a:t>
+            </a:r>
+            <a:endParaRPr lang="en-US" sz="3466" dirty="0"/>
+          </a:p>
+        </p:txBody>
+      </p:sp>
+      <p:sp>
+        <p:nvSpPr>
+          <p:cNvPr id="5" name="Shape 3"/>
+          <p:cNvSpPr/>
+          <p:nvPr/>
+        </p:nvSpPr>
+        <p:spPr>
+          <a:xfrm>
+            <a:off x="683446" y="2120305"/>
+            <a:ext cx="0" cy="430014"/>
+          </a:xfrm>
+          <a:prstGeom prst="line">
+            <a:avLst/>
+          </a:prstGeom>
+          <a:noFill/>
+          <a:ln w="12698">
+            <a:solidFill>
+              <a:srgbClr val="FFFFFF"/>
+            </a:solidFill>
+            <a:prstDash val="solid"/>
+          </a:ln>
+        </p:spPr>
+      </p:sp>
+      <p:sp>
+        <p:nvSpPr>
+          <p:cNvPr id="6" name="Text 4"/>
+          <p:cNvSpPr/>
+          <p:nvPr/>
+        </p:nvSpPr>
+        <p:spPr>
+          <a:xfrm>
+            <a:off x="689795" y="2120305"/>
+            <a:ext cx="2266383" cy="260747"/>
+          </a:xfrm>
+          <a:prstGeom prst="rect">
+            <a:avLst/>
+          </a:prstGeom>
+          <a:noFill/>
+          <a:ln/>
+        </p:spPr>
+        <p:txBody>
+          <a:bodyPr wrap="square" lIns="0" tIns="0" rIns="0" bIns="0" rtlCol="0" anchor="t"/>
+          <a:lstStyle/>
+          <a:p>
+            <a:pPr algn="l" indent="0" marL="0">
+              <a:lnSpc>
+                <a:spcPts val="2053"/>
+              </a:lnSpc>
+              <a:buNone/>
+            </a:pPr>
+            <a:r>
+              <a:rPr lang="en-US" sz="1466" dirty="0">
+                <a:solidFill>
+                  <a:srgbClr val="7A7164"/>
+                </a:solidFill>
+                <a:latin typeface="Inter" pitchFamily="34" charset="0"/>
+                <a:ea typeface="Inter" pitchFamily="34" charset="-122"/>
+                <a:cs typeface="Inter" pitchFamily="34" charset="-120"/>
+              </a:rPr>
+              <a:t>THE TRADE</a:t>
+            </a:r>
+            <a:endParaRPr lang="en-US" sz="1466" dirty="0"/>
+          </a:p>
+        </p:txBody>
+      </p:sp>
+      <p:sp>
+        <p:nvSpPr>
+          <p:cNvPr id="7" name="Shape 5"/>
+          <p:cNvSpPr/>
+          <p:nvPr/>
+        </p:nvSpPr>
+        <p:spPr>
+          <a:xfrm>
+            <a:off x="3222811" y="2120305"/>
+            <a:ext cx="0" cy="430014"/>
+          </a:xfrm>
+          <a:prstGeom prst="line">
+            <a:avLst/>
+          </a:prstGeom>
+          <a:noFill/>
+          <a:ln w="12698">
+            <a:solidFill>
+              <a:srgbClr val="DAD3C4"/>
+            </a:solidFill>
+            <a:prstDash val="solid"/>
+          </a:ln>
+        </p:spPr>
+      </p:sp>
+      <p:sp>
+        <p:nvSpPr>
+          <p:cNvPr id="8" name="Text 6"/>
+          <p:cNvSpPr/>
+          <p:nvPr/>
+        </p:nvSpPr>
+        <p:spPr>
+          <a:xfrm>
+            <a:off x="3533883" y="2120305"/>
+            <a:ext cx="3906881" cy="260747"/>
+          </a:xfrm>
+          <a:prstGeom prst="rect">
+            <a:avLst/>
+          </a:prstGeom>
+          <a:noFill/>
+          <a:ln/>
+        </p:spPr>
+        <p:txBody>
+          <a:bodyPr wrap="square" lIns="0" tIns="0" rIns="0" bIns="0" rtlCol="0" anchor="t"/>
+          <a:lstStyle/>
+          <a:p>
+            <a:pPr algn="l" indent="0" marL="0">
+              <a:lnSpc>
+                <a:spcPts val="2053"/>
+              </a:lnSpc>
+              <a:buNone/>
+            </a:pPr>
+            <a:r>
+              <a:rPr lang="en-US" sz="1466" dirty="0">
+                <a:solidFill>
+                  <a:srgbClr val="7A7164"/>
+                </a:solidFill>
+                <a:latin typeface="Inter" pitchFamily="34" charset="0"/>
+                <a:ea typeface="Inter" pitchFamily="34" charset="-122"/>
+                <a:cs typeface="Inter" pitchFamily="34" charset="-120"/>
+              </a:rPr>
+              <a:t>WHAT IT KEEPS</a:t>
+            </a:r>
+            <a:endParaRPr lang="en-US" sz="1466" dirty="0"/>
+          </a:p>
+        </p:txBody>
+      </p:sp>
+      <p:sp>
+        <p:nvSpPr>
+          <p:cNvPr id="9" name="Shape 7"/>
+          <p:cNvSpPr/>
+          <p:nvPr/>
+        </p:nvSpPr>
+        <p:spPr>
+          <a:xfrm>
+            <a:off x="7370507" y="2120305"/>
+            <a:ext cx="0" cy="430014"/>
+          </a:xfrm>
+          <a:prstGeom prst="line">
+            <a:avLst/>
+          </a:prstGeom>
+          <a:noFill/>
+          <a:ln w="12698">
+            <a:solidFill>
+              <a:srgbClr val="DAD3C4"/>
+            </a:solidFill>
+            <a:prstDash val="solid"/>
+          </a:ln>
+        </p:spPr>
+      </p:sp>
+      <p:sp>
+        <p:nvSpPr>
+          <p:cNvPr id="10" name="Text 8"/>
+          <p:cNvSpPr/>
+          <p:nvPr/>
+        </p:nvSpPr>
+        <p:spPr>
+          <a:xfrm>
+            <a:off x="7681579" y="2120305"/>
+            <a:ext cx="3906881" cy="260747"/>
+          </a:xfrm>
+          <a:prstGeom prst="rect">
+            <a:avLst/>
+          </a:prstGeom>
+          <a:noFill/>
+          <a:ln/>
+        </p:spPr>
+        <p:txBody>
+          <a:bodyPr wrap="square" lIns="0" tIns="0" rIns="0" bIns="0" rtlCol="0" anchor="t"/>
+          <a:lstStyle/>
+          <a:p>
+            <a:pPr algn="l" indent="0" marL="0">
+              <a:lnSpc>
+                <a:spcPts val="2053"/>
+              </a:lnSpc>
+              <a:buNone/>
+            </a:pPr>
+            <a:r>
+              <a:rPr lang="en-US" sz="1466" dirty="0">
+                <a:solidFill>
+                  <a:srgbClr val="7A7164"/>
+                </a:solidFill>
+                <a:latin typeface="Inter" pitchFamily="34" charset="0"/>
+                <a:ea typeface="Inter" pitchFamily="34" charset="-122"/>
+                <a:cs typeface="Inter" pitchFamily="34" charset="-120"/>
+              </a:rPr>
+              <a:t>WHAT IT SPENDS</a:t>
+            </a:r>
+            <a:endParaRPr lang="en-US" sz="1466" dirty="0"/>
+          </a:p>
+        </p:txBody>
+      </p:sp>
+      <p:sp>
+        <p:nvSpPr>
+          <p:cNvPr id="11" name="Shape 9"/>
+          <p:cNvSpPr/>
+          <p:nvPr/>
+        </p:nvSpPr>
+        <p:spPr>
+          <a:xfrm>
+            <a:off x="683446" y="2550319"/>
+            <a:ext cx="0" cy="885230"/>
+          </a:xfrm>
+          <a:prstGeom prst="line">
+            <a:avLst/>
+          </a:prstGeom>
+          <a:noFill/>
+          <a:ln w="12698">
+            <a:solidFill>
+              <a:srgbClr val="FFFFFF"/>
+            </a:solidFill>
+            <a:prstDash val="solid"/>
+          </a:ln>
+        </p:spPr>
+      </p:sp>
+      <p:sp>
+        <p:nvSpPr>
+          <p:cNvPr id="12" name="Text 10"/>
+          <p:cNvSpPr/>
+          <p:nvPr/>
+        </p:nvSpPr>
+        <p:spPr>
+          <a:xfrm>
+            <a:off x="689795" y="2787253"/>
+            <a:ext cx="2577202" cy="411361"/>
+          </a:xfrm>
+          <a:prstGeom prst="rect">
+            <a:avLst/>
+          </a:prstGeom>
+          <a:noFill/>
+          <a:ln/>
+        </p:spPr>
+        <p:txBody>
+          <a:bodyPr wrap="square" lIns="0" tIns="0" rIns="0" bIns="0" rtlCol="0" anchor="t"/>
+          <a:lstStyle/>
+          <a:p>
+            <a:pPr algn="l" indent="0" marL="0">
+              <a:lnSpc>
+                <a:spcPts val="3240"/>
+              </a:lnSpc>
+              <a:buNone/>
+            </a:pPr>
+            <a:r>
+              <a:rPr lang="en-US" sz="2400" b="1" dirty="0">
+                <a:solidFill>
+                  <a:srgbClr val="1F1B16"/>
+                </a:solidFill>
+                <a:latin typeface="Source Serif 4" pitchFamily="34" charset="0"/>
+                <a:ea typeface="Source Serif 4" pitchFamily="34" charset="-122"/>
+                <a:cs typeface="Source Serif 4" pitchFamily="34" charset="-120"/>
+              </a:rPr>
+              <a:t>Sampling</a:t>
+            </a:r>
+            <a:endParaRPr lang="en-US" sz="2400" dirty="0"/>
+          </a:p>
+        </p:txBody>
+      </p:sp>
+      <p:sp>
+        <p:nvSpPr>
+          <p:cNvPr id="13" name="Shape 11"/>
+          <p:cNvSpPr/>
+          <p:nvPr/>
+        </p:nvSpPr>
+        <p:spPr>
+          <a:xfrm>
+            <a:off x="3222811" y="2550319"/>
+            <a:ext cx="0" cy="885230"/>
+          </a:xfrm>
+          <a:prstGeom prst="line">
+            <a:avLst/>
+          </a:prstGeom>
+          <a:noFill/>
+          <a:ln w="12698">
+            <a:solidFill>
+              <a:srgbClr val="DAD3C4"/>
+            </a:solidFill>
+            <a:prstDash val="solid"/>
+          </a:ln>
+        </p:spPr>
+      </p:sp>
+      <p:sp>
+        <p:nvSpPr>
+          <p:cNvPr id="14" name="Text 12"/>
+          <p:cNvSpPr/>
+          <p:nvPr/>
+        </p:nvSpPr>
+        <p:spPr>
+          <a:xfrm>
+            <a:off x="3533883" y="2787253"/>
+            <a:ext cx="3906881" cy="355600"/>
+          </a:xfrm>
+          <a:prstGeom prst="rect">
+            <a:avLst/>
+          </a:prstGeom>
+          <a:noFill/>
+          <a:ln/>
+        </p:spPr>
+        <p:txBody>
+          <a:bodyPr wrap="square" lIns="0" tIns="0" rIns="0" bIns="0" rtlCol="0" anchor="t"/>
+          <a:lstStyle/>
+          <a:p>
+            <a:pPr algn="l" indent="0" marL="0">
+              <a:lnSpc>
+                <a:spcPts val="2800"/>
+              </a:lnSpc>
+              <a:buNone/>
+            </a:pPr>
+            <a:r>
+              <a:rPr lang="en-US" sz="1866" dirty="0">
+                <a:solidFill>
+                  <a:srgbClr val="1F1B16"/>
+                </a:solidFill>
+                <a:latin typeface="Inter" pitchFamily="34" charset="0"/>
+                <a:ea typeface="Inter" pitchFamily="34" charset="-122"/>
+                <a:cs typeface="Inter" pitchFamily="34" charset="-120"/>
+              </a:rPr>
+              <a:t>The shape of normal traffic</a:t>
+            </a:r>
+            <a:endParaRPr lang="en-US" sz="1866" dirty="0"/>
+          </a:p>
+        </p:txBody>
+      </p:sp>
+      <p:sp>
+        <p:nvSpPr>
+          <p:cNvPr id="15" name="Shape 13"/>
+          <p:cNvSpPr/>
+          <p:nvPr/>
+        </p:nvSpPr>
+        <p:spPr>
+          <a:xfrm>
+            <a:off x="7370507" y="2550319"/>
+            <a:ext cx="0" cy="885230"/>
+          </a:xfrm>
+          <a:prstGeom prst="line">
+            <a:avLst/>
+          </a:prstGeom>
+          <a:noFill/>
+          <a:ln w="12698">
+            <a:solidFill>
+              <a:srgbClr val="DAD3C4"/>
+            </a:solidFill>
+            <a:prstDash val="solid"/>
+          </a:ln>
+        </p:spPr>
+      </p:sp>
+      <p:sp>
+        <p:nvSpPr>
+          <p:cNvPr id="16" name="Text 14"/>
+          <p:cNvSpPr/>
+          <p:nvPr/>
+        </p:nvSpPr>
+        <p:spPr>
+          <a:xfrm>
+            <a:off x="7681579" y="2787253"/>
+            <a:ext cx="3906881" cy="355600"/>
+          </a:xfrm>
+          <a:prstGeom prst="rect">
+            <a:avLst/>
+          </a:prstGeom>
+          <a:noFill/>
+          <a:ln/>
+        </p:spPr>
+        <p:txBody>
+          <a:bodyPr wrap="square" lIns="0" tIns="0" rIns="0" bIns="0" rtlCol="0" anchor="t"/>
+          <a:lstStyle/>
+          <a:p>
+            <a:pPr algn="l" indent="0" marL="0">
+              <a:lnSpc>
+                <a:spcPts val="2800"/>
+              </a:lnSpc>
+              <a:buNone/>
+            </a:pPr>
+            <a:r>
+              <a:rPr lang="en-US" sz="1866" dirty="0">
+                <a:solidFill>
+                  <a:srgbClr val="1F1B16"/>
+                </a:solidFill>
+                <a:latin typeface="Inter" pitchFamily="34" charset="0"/>
+                <a:ea typeface="Inter" pitchFamily="34" charset="-122"/>
+                <a:cs typeface="Inter" pitchFamily="34" charset="-120"/>
+              </a:rPr>
+              <a:t>The one request that mattered</a:t>
+            </a:r>
+            <a:endParaRPr lang="en-US" sz="1866" dirty="0"/>
+          </a:p>
+        </p:txBody>
+      </p:sp>
+      <p:sp>
+        <p:nvSpPr>
+          <p:cNvPr id="17" name="Text 15"/>
+          <p:cNvSpPr/>
+          <p:nvPr/>
+        </p:nvSpPr>
+        <p:spPr>
+          <a:xfrm>
+            <a:off x="677098" y="3435548"/>
+            <a:ext cx="10834756" cy="12700"/>
+          </a:xfrm>
+          <a:prstGeom prst="rect">
+            <a:avLst/>
+          </a:prstGeom>
+          <a:solidFill>
+            <a:srgbClr val="DAD3C4"/>
+          </a:solidFill>
+          <a:ln/>
+        </p:spPr>
+        <p:txBody>
+          <a:bodyPr wrap="square" rtlCol="0" anchor="ctr"/>
+          <a:lstStyle/>
+          <a:p>
+            <a:pPr indent="0" marL="0">
+              <a:buNone/>
+            </a:pPr>
+            <a:endParaRPr lang="en-US" dirty="0"/>
+          </a:p>
+        </p:txBody>
+      </p:sp>
+      <p:sp>
+        <p:nvSpPr>
+          <p:cNvPr id="18" name="Shape 16"/>
+          <p:cNvSpPr/>
+          <p:nvPr/>
+        </p:nvSpPr>
+        <p:spPr>
+          <a:xfrm>
+            <a:off x="683446" y="3448248"/>
+            <a:ext cx="0" cy="885230"/>
+          </a:xfrm>
+          <a:prstGeom prst="line">
+            <a:avLst/>
+          </a:prstGeom>
+          <a:noFill/>
+          <a:ln w="12698">
+            <a:solidFill>
+              <a:srgbClr val="FFFFFF"/>
+            </a:solidFill>
+            <a:prstDash val="solid"/>
+          </a:ln>
+        </p:spPr>
+      </p:sp>
+      <p:sp>
+        <p:nvSpPr>
+          <p:cNvPr id="19" name="Text 17"/>
+          <p:cNvSpPr/>
+          <p:nvPr/>
+        </p:nvSpPr>
+        <p:spPr>
+          <a:xfrm>
+            <a:off x="689795" y="3685183"/>
+            <a:ext cx="2577202" cy="411361"/>
+          </a:xfrm>
+          <a:prstGeom prst="rect">
+            <a:avLst/>
+          </a:prstGeom>
+          <a:noFill/>
+          <a:ln/>
+        </p:spPr>
+        <p:txBody>
+          <a:bodyPr wrap="square" lIns="0" tIns="0" rIns="0" bIns="0" rtlCol="0" anchor="t"/>
+          <a:lstStyle/>
+          <a:p>
+            <a:pPr algn="l" indent="0" marL="0">
+              <a:lnSpc>
+                <a:spcPts val="3240"/>
+              </a:lnSpc>
+              <a:buNone/>
+            </a:pPr>
+            <a:r>
+              <a:rPr lang="en-US" sz="2400" b="1" dirty="0">
+                <a:solidFill>
+                  <a:srgbClr val="1F1B16"/>
+                </a:solidFill>
+                <a:latin typeface="Source Serif 4" pitchFamily="34" charset="0"/>
+                <a:ea typeface="Source Serif 4" pitchFamily="34" charset="-122"/>
+                <a:cs typeface="Source Serif 4" pitchFamily="34" charset="-120"/>
+              </a:rPr>
+              <a:t>Retention</a:t>
+            </a:r>
+            <a:endParaRPr lang="en-US" sz="2400" dirty="0"/>
+          </a:p>
+        </p:txBody>
+      </p:sp>
+      <p:sp>
+        <p:nvSpPr>
+          <p:cNvPr id="20" name="Shape 18"/>
+          <p:cNvSpPr/>
+          <p:nvPr/>
+        </p:nvSpPr>
+        <p:spPr>
+          <a:xfrm>
+            <a:off x="3222811" y="3448248"/>
+            <a:ext cx="0" cy="885230"/>
+          </a:xfrm>
+          <a:prstGeom prst="line">
+            <a:avLst/>
+          </a:prstGeom>
+          <a:noFill/>
+          <a:ln w="12698">
+            <a:solidFill>
+              <a:srgbClr val="DAD3C4"/>
+            </a:solidFill>
+            <a:prstDash val="solid"/>
+          </a:ln>
+        </p:spPr>
+      </p:sp>
+      <p:sp>
+        <p:nvSpPr>
+          <p:cNvPr id="21" name="Text 19"/>
+          <p:cNvSpPr/>
+          <p:nvPr/>
+        </p:nvSpPr>
+        <p:spPr>
+          <a:xfrm>
+            <a:off x="3533883" y="3685183"/>
+            <a:ext cx="3906881" cy="355600"/>
+          </a:xfrm>
+          <a:prstGeom prst="rect">
+            <a:avLst/>
+          </a:prstGeom>
+          <a:noFill/>
+          <a:ln/>
+        </p:spPr>
+        <p:txBody>
+          <a:bodyPr wrap="square" lIns="0" tIns="0" rIns="0" bIns="0" rtlCol="0" anchor="t"/>
+          <a:lstStyle/>
+          <a:p>
+            <a:pPr algn="l" indent="0" marL="0">
+              <a:lnSpc>
+                <a:spcPts val="2800"/>
+              </a:lnSpc>
+              <a:buNone/>
+            </a:pPr>
+            <a:r>
+              <a:rPr lang="en-US" sz="1866" dirty="0">
+                <a:solidFill>
+                  <a:srgbClr val="1F1B16"/>
+                </a:solidFill>
+                <a:latin typeface="Inter" pitchFamily="34" charset="0"/>
+                <a:ea typeface="Inter" pitchFamily="34" charset="-122"/>
+                <a:cs typeface="Inter" pitchFamily="34" charset="-120"/>
+              </a:rPr>
+              <a:t>What is happening right now</a:t>
+            </a:r>
+            <a:endParaRPr lang="en-US" sz="1866" dirty="0"/>
+          </a:p>
+        </p:txBody>
+      </p:sp>
+      <p:sp>
+        <p:nvSpPr>
+          <p:cNvPr id="22" name="Shape 20"/>
+          <p:cNvSpPr/>
+          <p:nvPr/>
+        </p:nvSpPr>
+        <p:spPr>
+          <a:xfrm>
+            <a:off x="7370507" y="3448248"/>
+            <a:ext cx="0" cy="885230"/>
+          </a:xfrm>
+          <a:prstGeom prst="line">
+            <a:avLst/>
+          </a:prstGeom>
+          <a:noFill/>
+          <a:ln w="12698">
+            <a:solidFill>
+              <a:srgbClr val="DAD3C4"/>
+            </a:solidFill>
+            <a:prstDash val="solid"/>
+          </a:ln>
+        </p:spPr>
+      </p:sp>
+      <p:sp>
+        <p:nvSpPr>
+          <p:cNvPr id="23" name="Text 21"/>
+          <p:cNvSpPr/>
+          <p:nvPr/>
+        </p:nvSpPr>
+        <p:spPr>
+          <a:xfrm>
+            <a:off x="7681579" y="3685183"/>
+            <a:ext cx="3906881" cy="355600"/>
+          </a:xfrm>
+          <a:prstGeom prst="rect">
+            <a:avLst/>
+          </a:prstGeom>
+          <a:noFill/>
+          <a:ln/>
+        </p:spPr>
+        <p:txBody>
+          <a:bodyPr wrap="square" lIns="0" tIns="0" rIns="0" bIns="0" rtlCol="0" anchor="t"/>
+          <a:lstStyle/>
+          <a:p>
+            <a:pPr algn="l" indent="0" marL="0">
+              <a:lnSpc>
+                <a:spcPts val="2800"/>
+              </a:lnSpc>
+              <a:buNone/>
+            </a:pPr>
+            <a:r>
+              <a:rPr lang="en-US" sz="1866" dirty="0">
+                <a:solidFill>
+                  <a:srgbClr val="1F1B16"/>
+                </a:solidFill>
+                <a:latin typeface="Inter" pitchFamily="34" charset="0"/>
+                <a:ea typeface="Inter" pitchFamily="34" charset="-122"/>
+                <a:cs typeface="Inter" pitchFamily="34" charset="-120"/>
+              </a:rPr>
+              <a:t>Whether it happened before</a:t>
+            </a:r>
+            <a:endParaRPr lang="en-US" sz="1866" dirty="0"/>
+          </a:p>
+        </p:txBody>
+      </p:sp>
+      <p:sp>
+        <p:nvSpPr>
+          <p:cNvPr id="24" name="Shape 22"/>
+          <p:cNvSpPr/>
+          <p:nvPr/>
+        </p:nvSpPr>
+        <p:spPr>
+          <a:xfrm>
+            <a:off x="727885" y="4824214"/>
+            <a:ext cx="0" cy="812403"/>
+          </a:xfrm>
+          <a:prstGeom prst="line">
+            <a:avLst/>
+          </a:prstGeom>
+          <a:noFill/>
+          <a:ln w="101587">
+            <a:solidFill>
+              <a:srgbClr val="B5503A"/>
+            </a:solidFill>
+            <a:prstDash val="solid"/>
+          </a:ln>
+        </p:spPr>
+      </p:sp>
+      <p:sp>
+        <p:nvSpPr>
+          <p:cNvPr id="25" name="Text 23"/>
+          <p:cNvSpPr/>
+          <p:nvPr/>
+        </p:nvSpPr>
+        <p:spPr>
+          <a:xfrm>
+            <a:off x="1049472" y="4824214"/>
+            <a:ext cx="10671630" cy="812403"/>
+          </a:xfrm>
+          <a:prstGeom prst="rect">
+            <a:avLst/>
+          </a:prstGeom>
+          <a:noFill/>
+          <a:ln/>
+        </p:spPr>
+        <p:txBody>
+          <a:bodyPr wrap="square" lIns="0" tIns="0" rIns="0" bIns="0" rtlCol="0" anchor="t"/>
+          <a:lstStyle/>
+          <a:p>
+            <a:pPr algn="l" indent="0" marL="0">
+              <a:lnSpc>
+                <a:spcPts val="3200"/>
+              </a:lnSpc>
+              <a:buNone/>
+            </a:pPr>
+            <a:r>
+              <a:rPr lang="en-US" sz="2133" dirty="0">
+                <a:solidFill>
+                  <a:srgbClr val="1F1B16"/>
+                </a:solidFill>
+                <a:latin typeface="Inter" pitchFamily="34" charset="0"/>
+                <a:ea typeface="Inter" pitchFamily="34" charset="-122"/>
+                <a:cs typeface="Inter" pitchFamily="34" charset="-120"/>
+              </a:rPr>
+              <a:t>You find out which bet you took at 03:00, from a query that returns nothing.</a:t>
+            </a:r>
+            <a:endParaRPr lang="en-US" sz="2133" dirty="0"/>
+          </a:p>
+          <a:p>
+            <a:pPr algn="l" indent="0" marL="0">
+              <a:lnSpc>
+                <a:spcPts val="3200"/>
+              </a:lnSpc>
+              <a:buNone/>
+            </a:pPr>
+            <a:r>
+              <a:rPr lang="en-US" sz="2133" dirty="0">
+                <a:solidFill>
+                  <a:srgbClr val="1F1B16"/>
+                </a:solidFill>
+                <a:latin typeface="Inter" pitchFamily="34" charset="0"/>
+                <a:ea typeface="Inter" pitchFamily="34" charset="-122"/>
+                <a:cs typeface="Inter" pitchFamily="34" charset="-120"/>
+              </a:rPr>
+              <a:t>    Nobody called it a bet when it was placed.</a:t>
+            </a:r>
+            <a:endParaRPr lang="en-US" sz="2133" dirty="0"/>
+          </a:p>
+        </p:txBody>
+      </p:sp>
+      <p:sp>
+        <p:nvSpPr>
+          <p:cNvPr id="26" name="Text 24"/>
+          <p:cNvSpPr/>
+          <p:nvPr/>
+        </p:nvSpPr>
+        <p:spPr>
+          <a:xfrm>
+            <a:off x="677098" y="5907484"/>
+            <a:ext cx="10834756" cy="12700"/>
+          </a:xfrm>
+          <a:prstGeom prst="rect">
+            <a:avLst/>
+          </a:prstGeom>
+          <a:solidFill>
+            <a:srgbClr val="DAD3C4"/>
+          </a:solidFill>
+          <a:ln/>
+        </p:spPr>
+        <p:txBody>
+          <a:bodyPr wrap="square" rtlCol="0" anchor="ctr"/>
+          <a:lstStyle/>
+          <a:p>
+            <a:pPr indent="0" marL="0">
+              <a:buNone/>
+            </a:pPr>
+            <a:endParaRPr lang="en-US" dirty="0"/>
+          </a:p>
+        </p:txBody>
+      </p:sp>
+      <p:sp>
+        <p:nvSpPr>
+          <p:cNvPr id="27" name="Text 25"/>
+          <p:cNvSpPr/>
+          <p:nvPr/>
+        </p:nvSpPr>
+        <p:spPr>
+          <a:xfrm>
+            <a:off x="677098" y="6055519"/>
+            <a:ext cx="767737" cy="260747"/>
+          </a:xfrm>
+          <a:prstGeom prst="rect">
+            <a:avLst/>
+          </a:prstGeom>
+          <a:noFill/>
+          <a:ln/>
+        </p:spPr>
+        <p:txBody>
+          <a:bodyPr wrap="square" lIns="0" tIns="0" rIns="0" bIns="0" rtlCol="0" anchor="t"/>
+          <a:lstStyle/>
+          <a:p>
+            <a:pPr algn="l" indent="0" marL="0">
+              <a:lnSpc>
+                <a:spcPts val="2053"/>
+              </a:lnSpc>
+              <a:buNone/>
+            </a:pPr>
+            <a:r>
+              <a:rPr lang="en-US" sz="1466" dirty="0">
+                <a:solidFill>
+                  <a:srgbClr val="7A7164"/>
+                </a:solidFill>
+                <a:latin typeface="Inter" pitchFamily="34" charset="0"/>
+                <a:ea typeface="Inter" pitchFamily="34" charset="-122"/>
+                <a:cs typeface="Inter" pitchFamily="34" charset="-120"/>
+              </a:rPr>
+              <a:t>04 / 06</a:t>
+            </a:r>
+            <a:endParaRPr lang="en-US" sz="1466" dirty="0"/>
+          </a:p>
+        </p:txBody>
+      </p:sp>
+      <p:sp>
+        <p:nvSpPr>
+          <p:cNvPr id="28" name="Text 26"/>
+          <p:cNvSpPr/>
+          <p:nvPr/>
+        </p:nvSpPr>
+        <p:spPr>
+          <a:xfrm>
+            <a:off x="4725655" y="6055519"/>
+            <a:ext cx="6786199" cy="260747"/>
+          </a:xfrm>
+          <a:prstGeom prst="rect">
+            <a:avLst/>
+          </a:prstGeom>
+          <a:noFill/>
+          <a:ln/>
+        </p:spPr>
+        <p:txBody>
+          <a:bodyPr wrap="square" lIns="0" tIns="0" rIns="0" bIns="0" rtlCol="0" anchor="t"/>
+          <a:lstStyle/>
+          <a:p>
+            <a:pPr algn="r" indent="0" marL="0">
+              <a:lnSpc>
+                <a:spcPts val="2053"/>
+              </a:lnSpc>
+              <a:buNone/>
+            </a:pPr>
+            <a:r>
+              <a:rPr lang="en-US" sz="1466" dirty="0">
+                <a:solidFill>
+                  <a:srgbClr val="7A7164"/>
+                </a:solidFill>
+                <a:latin typeface="Inter" pitchFamily="34" charset="0"/>
+                <a:ea typeface="Inter" pitchFamily="34" charset="-122"/>
+                <a:cs typeface="Inter" pitchFamily="34" charset="-120"/>
+              </a:rPr>
+              <a:t>Source: none — this deck cites no cost figures; the argument is structural.</a:t>
+            </a:r>
+            <a:endParaRPr lang="en-US" sz="1466" dirty="0"/>
+          </a:p>
+        </p:txBody>
+      </p:sp>
     </p:spTree>
   </p:cSld>
   <p:clrMapOvr>
@@ -1495,6 +4728,13 @@
 <file path=ppt/slides/slide5.xml><?xml version="1.0" encoding="utf-8"?>
 <p:sld xmlns:a="http://schemas.openxmlformats.org/drawingml/2006/main" xmlns:r="http://schemas.openxmlformats.org/officeDocument/2006/relationships" xmlns:p="http://schemas.openxmlformats.org/presentationml/2006/main">
   <p:cSld name="Slide 5">
+    <p:bg>
+      <p:bgPr>
+        <a:solidFill>
+          <a:srgbClr val="F7F4EE"/>
+        </a:solidFill>
+      </p:bgPr>
+    </p:bg>
     <p:spTree>
       <p:nvGrpSpPr>
         <p:cNvPr id="1" name=""/>
@@ -1509,30 +4749,651 @@
           <a:chExt cx="0" cy="0"/>
         </a:xfrm>
       </p:grpSpPr>
-      <p:pic>
-        <p:nvPicPr>
-          <p:cNvPr id="2" name="Image 0" descr="/tmp/slide-1787840556455-pq1be5p5if.png">    </p:cNvPr>
-          <p:cNvPicPr>
-            <a:picLocks noChangeAspect="1"/>
-          </p:cNvPicPr>
-          <p:nvPr/>
-        </p:nvPicPr>
-        <p:blipFill>
-          <a:blip r:embed="rId1"/>
-          <a:stretch>
-            <a:fillRect/>
-          </a:stretch>
-        </p:blipFill>
-        <p:spPr>
-          <a:xfrm>
-            <a:off x="0" y="0"/>
-            <a:ext cx="12188952" cy="6858000"/>
-          </a:xfrm>
-          <a:prstGeom prst="rect">
-            <a:avLst/>
-          </a:prstGeom>
-        </p:spPr>
-      </p:pic>
+      <p:sp>
+        <p:nvSpPr>
+          <p:cNvPr id="2" name="Text 0"/>
+          <p:cNvSpPr/>
+          <p:nvPr/>
+        </p:nvSpPr>
+        <p:spPr>
+          <a:xfrm>
+            <a:off x="677098" y="541734"/>
+            <a:ext cx="11051451" cy="260747"/>
+          </a:xfrm>
+          <a:prstGeom prst="rect">
+            <a:avLst/>
+          </a:prstGeom>
+          <a:noFill/>
+          <a:ln/>
+        </p:spPr>
+        <p:txBody>
+          <a:bodyPr wrap="square" lIns="0" tIns="0" rIns="0" bIns="0" rtlCol="0" anchor="t"/>
+          <a:lstStyle/>
+          <a:p>
+            <a:pPr algn="l" indent="0" marL="0">
+              <a:lnSpc>
+                <a:spcPts val="2053"/>
+              </a:lnSpc>
+              <a:buNone/>
+            </a:pPr>
+            <a:r>
+              <a:rPr lang="en-US" sz="1466" dirty="0">
+                <a:solidFill>
+                  <a:srgbClr val="7A7164"/>
+                </a:solidFill>
+                <a:latin typeface="Inter" pitchFamily="34" charset="0"/>
+                <a:ea typeface="Inter" pitchFamily="34" charset="-122"/>
+                <a:cs typeface="Inter" pitchFamily="34" charset="-120"/>
+              </a:rPr>
+              <a:t>PLATFORM ENGINEERING · OBSERVABILITY BUDGET</a:t>
+            </a:r>
+            <a:endParaRPr lang="en-US" sz="1466" dirty="0"/>
+          </a:p>
+        </p:txBody>
+      </p:sp>
+      <p:sp>
+        <p:nvSpPr>
+          <p:cNvPr id="3" name="Text 1"/>
+          <p:cNvSpPr/>
+          <p:nvPr/>
+        </p:nvSpPr>
+        <p:spPr>
+          <a:xfrm>
+            <a:off x="677098" y="937816"/>
+            <a:ext cx="10834756" cy="12700"/>
+          </a:xfrm>
+          <a:prstGeom prst="rect">
+            <a:avLst/>
+          </a:prstGeom>
+          <a:solidFill>
+            <a:srgbClr val="DAD3C4"/>
+          </a:solidFill>
+          <a:ln/>
+        </p:spPr>
+        <p:txBody>
+          <a:bodyPr wrap="square" rtlCol="0" anchor="ctr"/>
+          <a:lstStyle/>
+          <a:p>
+            <a:pPr indent="0" marL="0">
+              <a:buNone/>
+            </a:pPr>
+            <a:endParaRPr lang="en-US" dirty="0"/>
+          </a:p>
+        </p:txBody>
+      </p:sp>
+      <p:sp>
+        <p:nvSpPr>
+          <p:cNvPr id="4" name="Text 2"/>
+          <p:cNvSpPr/>
+          <p:nvPr/>
+        </p:nvSpPr>
+        <p:spPr>
+          <a:xfrm>
+            <a:off x="677098" y="1289050"/>
+            <a:ext cx="11051451" cy="594320"/>
+          </a:xfrm>
+          <a:prstGeom prst="rect">
+            <a:avLst/>
+          </a:prstGeom>
+          <a:noFill/>
+          <a:ln/>
+        </p:spPr>
+        <p:txBody>
+          <a:bodyPr wrap="square" lIns="0" tIns="0" rIns="0" bIns="0" rtlCol="0" anchor="t"/>
+          <a:lstStyle/>
+          <a:p>
+            <a:pPr algn="l" indent="0" marL="0">
+              <a:lnSpc>
+                <a:spcPts val="4679"/>
+              </a:lnSpc>
+              <a:spcAft>
+                <a:spcPts val="1866"/>
+              </a:spcAft>
+              <a:buNone/>
+            </a:pPr>
+            <a:r>
+              <a:rPr lang="en-US" sz="3466" b="1" dirty="0">
+                <a:solidFill>
+                  <a:srgbClr val="1F1B16"/>
+                </a:solidFill>
+                <a:latin typeface="Source Serif 4" pitchFamily="34" charset="0"/>
+                <a:ea typeface="Source Serif 4" pitchFamily="34" charset="-122"/>
+                <a:cs typeface="Source Serif 4" pitchFamily="34" charset="-120"/>
+              </a:rPr>
+              <a:t>You cannot argue with one line item</a:t>
+            </a:r>
+            <a:endParaRPr lang="en-US" sz="3466" dirty="0"/>
+          </a:p>
+        </p:txBody>
+      </p:sp>
+      <p:sp>
+        <p:nvSpPr>
+          <p:cNvPr id="5" name="Text 3"/>
+          <p:cNvSpPr/>
+          <p:nvPr/>
+        </p:nvSpPr>
+        <p:spPr>
+          <a:xfrm>
+            <a:off x="677098" y="2120305"/>
+            <a:ext cx="10834756" cy="980281"/>
+          </a:xfrm>
+          <a:prstGeom prst="roundRect">
+            <a:avLst>
+              <a:gd name="adj" fmla="val 5182"/>
+            </a:avLst>
+          </a:prstGeom>
+          <a:solidFill>
+            <a:srgbClr val="FCFAF5"/>
+          </a:solidFill>
+          <a:ln w="12698">
+            <a:solidFill>
+              <a:srgbClr val="DAD3C4"/>
+            </a:solidFill>
+          </a:ln>
+        </p:spPr>
+        <p:txBody>
+          <a:bodyPr wrap="square" rtlCol="0" anchor="ctr"/>
+          <a:lstStyle/>
+          <a:p>
+            <a:pPr indent="0" marL="0">
+              <a:buNone/>
+            </a:pPr>
+            <a:endParaRPr lang="en-US" dirty="0"/>
+          </a:p>
+        </p:txBody>
+      </p:sp>
+      <p:sp>
+        <p:nvSpPr>
+          <p:cNvPr id="6" name="Text 4"/>
+          <p:cNvSpPr/>
+          <p:nvPr/>
+        </p:nvSpPr>
+        <p:spPr>
+          <a:xfrm>
+            <a:off x="960594" y="2336205"/>
+            <a:ext cx="2718648" cy="548481"/>
+          </a:xfrm>
+          <a:prstGeom prst="rect">
+            <a:avLst/>
+          </a:prstGeom>
+          <a:noFill/>
+          <a:ln/>
+        </p:spPr>
+        <p:txBody>
+          <a:bodyPr wrap="square" lIns="0" tIns="0" rIns="0" bIns="0" rtlCol="0" anchor="t"/>
+          <a:lstStyle/>
+          <a:p>
+            <a:pPr algn="l" indent="0" marL="0">
+              <a:lnSpc>
+                <a:spcPts val="4319"/>
+              </a:lnSpc>
+              <a:buNone/>
+            </a:pPr>
+            <a:r>
+              <a:rPr lang="en-US" sz="3200" b="1" dirty="0">
+                <a:solidFill>
+                  <a:srgbClr val="1F1B16"/>
+                </a:solidFill>
+                <a:latin typeface="Source Serif 4" pitchFamily="34" charset="0"/>
+                <a:ea typeface="Source Serif 4" pitchFamily="34" charset="-122"/>
+                <a:cs typeface="Source Serif 4" pitchFamily="34" charset="-120"/>
+              </a:rPr>
+              <a:t>Observability</a:t>
+            </a:r>
+            <a:endParaRPr lang="en-US" sz="3200" dirty="0"/>
+          </a:p>
+        </p:txBody>
+      </p:sp>
+      <p:sp>
+        <p:nvSpPr>
+          <p:cNvPr id="7" name="Text 5"/>
+          <p:cNvSpPr/>
+          <p:nvPr/>
+        </p:nvSpPr>
+        <p:spPr>
+          <a:xfrm>
+            <a:off x="4032234" y="2488605"/>
+            <a:ext cx="6902756" cy="355600"/>
+          </a:xfrm>
+          <a:prstGeom prst="rect">
+            <a:avLst/>
+          </a:prstGeom>
+          <a:noFill/>
+          <a:ln/>
+        </p:spPr>
+        <p:txBody>
+          <a:bodyPr wrap="square" lIns="0" tIns="0" rIns="0" bIns="0" rtlCol="0" anchor="t"/>
+          <a:lstStyle/>
+          <a:p>
+            <a:pPr algn="l" indent="0" marL="0">
+              <a:lnSpc>
+                <a:spcPts val="2800"/>
+              </a:lnSpc>
+              <a:buNone/>
+            </a:pPr>
+            <a:r>
+              <a:rPr lang="en-US" sz="1866" dirty="0">
+                <a:solidFill>
+                  <a:srgbClr val="7A7164"/>
+                </a:solidFill>
+                <a:latin typeface="Inter" pitchFamily="34" charset="0"/>
+                <a:ea typeface="Inter" pitchFamily="34" charset="-122"/>
+                <a:cs typeface="Inter" pitchFamily="34" charset="-120"/>
+              </a:rPr>
+              <a:t>One line. One owner. One available question: keep it or cut it.</a:t>
+            </a:r>
+            <a:endParaRPr lang="en-US" sz="1866" dirty="0"/>
+          </a:p>
+        </p:txBody>
+      </p:sp>
+      <p:sp>
+        <p:nvSpPr>
+          <p:cNvPr id="8" name="Text 6"/>
+          <p:cNvSpPr/>
+          <p:nvPr/>
+        </p:nvSpPr>
+        <p:spPr>
+          <a:xfrm>
+            <a:off x="689795" y="3405386"/>
+            <a:ext cx="3394516" cy="362347"/>
+          </a:xfrm>
+          <a:prstGeom prst="rect">
+            <a:avLst/>
+          </a:prstGeom>
+          <a:noFill/>
+          <a:ln/>
+        </p:spPr>
+        <p:txBody>
+          <a:bodyPr wrap="square" lIns="0" tIns="0" rIns="0" bIns="101587" rtlCol="0" anchor="t"/>
+          <a:lstStyle/>
+          <a:p>
+            <a:pPr algn="l" indent="0" marL="0">
+              <a:lnSpc>
+                <a:spcPts val="2053"/>
+              </a:lnSpc>
+              <a:buNone/>
+            </a:pPr>
+            <a:r>
+              <a:rPr lang="en-US" sz="1466" dirty="0">
+                <a:solidFill>
+                  <a:srgbClr val="7A7164"/>
+                </a:solidFill>
+                <a:latin typeface="Inter" pitchFamily="34" charset="0"/>
+                <a:ea typeface="Inter" pitchFamily="34" charset="-122"/>
+                <a:cs typeface="Inter" pitchFamily="34" charset="-120"/>
+              </a:rPr>
+              <a:t>BY SIGNAL</a:t>
+            </a:r>
+            <a:endParaRPr lang="en-US" sz="1466" dirty="0"/>
+          </a:p>
+        </p:txBody>
+      </p:sp>
+      <p:sp>
+        <p:nvSpPr>
+          <p:cNvPr id="9" name="Text 7"/>
+          <p:cNvSpPr/>
+          <p:nvPr/>
+        </p:nvSpPr>
+        <p:spPr>
+          <a:xfrm>
+            <a:off x="689795" y="3767733"/>
+            <a:ext cx="3394516" cy="1066800"/>
+          </a:xfrm>
+          <a:prstGeom prst="rect">
+            <a:avLst/>
+          </a:prstGeom>
+          <a:noFill/>
+          <a:ln/>
+        </p:spPr>
+        <p:txBody>
+          <a:bodyPr wrap="square" lIns="0" tIns="0" rIns="0" bIns="0" rtlCol="0" anchor="t"/>
+          <a:lstStyle/>
+          <a:p>
+            <a:pPr algn="l" indent="0" marL="0">
+              <a:lnSpc>
+                <a:spcPts val="2800"/>
+              </a:lnSpc>
+              <a:buNone/>
+            </a:pPr>
+            <a:r>
+              <a:rPr lang="en-US" sz="1866" dirty="0">
+                <a:solidFill>
+                  <a:srgbClr val="1F1B16"/>
+                </a:solidFill>
+                <a:latin typeface="Inter" pitchFamily="34" charset="0"/>
+                <a:ea typeface="Inter" pitchFamily="34" charset="-122"/>
+                <a:cs typeface="Inter" pitchFamily="34" charset="-120"/>
+              </a:rPr>
+              <a:t>Metrics, logs and traces have different curves. Price them apart.</a:t>
+            </a:r>
+            <a:endParaRPr lang="en-US" sz="1866" dirty="0"/>
+          </a:p>
+        </p:txBody>
+      </p:sp>
+      <p:sp>
+        <p:nvSpPr>
+          <p:cNvPr id="10" name="Text 8"/>
+          <p:cNvSpPr/>
+          <p:nvPr/>
+        </p:nvSpPr>
+        <p:spPr>
+          <a:xfrm>
+            <a:off x="4572047" y="3405386"/>
+            <a:ext cx="3118503" cy="362347"/>
+          </a:xfrm>
+          <a:prstGeom prst="rect">
+            <a:avLst/>
+          </a:prstGeom>
+          <a:noFill/>
+          <a:ln/>
+        </p:spPr>
+        <p:txBody>
+          <a:bodyPr wrap="square" lIns="0" tIns="0" rIns="0" bIns="101587" rtlCol="0" anchor="t"/>
+          <a:lstStyle/>
+          <a:p>
+            <a:pPr algn="l" indent="0" marL="0">
+              <a:lnSpc>
+                <a:spcPts val="2053"/>
+              </a:lnSpc>
+              <a:buNone/>
+            </a:pPr>
+            <a:r>
+              <a:rPr lang="en-US" sz="1466" dirty="0">
+                <a:solidFill>
+                  <a:srgbClr val="7A7164"/>
+                </a:solidFill>
+                <a:latin typeface="Inter" pitchFamily="34" charset="0"/>
+                <a:ea typeface="Inter" pitchFamily="34" charset="-122"/>
+                <a:cs typeface="Inter" pitchFamily="34" charset="-120"/>
+              </a:rPr>
+              <a:t>BY VERBOSITY</a:t>
+            </a:r>
+            <a:endParaRPr lang="en-US" sz="1466" dirty="0"/>
+          </a:p>
+        </p:txBody>
+      </p:sp>
+      <p:sp>
+        <p:nvSpPr>
+          <p:cNvPr id="11" name="Text 9"/>
+          <p:cNvSpPr/>
+          <p:nvPr/>
+        </p:nvSpPr>
+        <p:spPr>
+          <a:xfrm>
+            <a:off x="4572047" y="3767733"/>
+            <a:ext cx="3118503" cy="1066800"/>
+          </a:xfrm>
+          <a:prstGeom prst="rect">
+            <a:avLst/>
+          </a:prstGeom>
+          <a:noFill/>
+          <a:ln/>
+        </p:spPr>
+        <p:txBody>
+          <a:bodyPr wrap="square" lIns="0" tIns="0" rIns="0" bIns="0" rtlCol="0" anchor="t"/>
+          <a:lstStyle/>
+          <a:p>
+            <a:pPr algn="l" indent="0" marL="0">
+              <a:lnSpc>
+                <a:spcPts val="2800"/>
+              </a:lnSpc>
+              <a:buNone/>
+            </a:pPr>
+            <a:r>
+              <a:rPr lang="en-US" sz="1866" dirty="0">
+                <a:solidFill>
+                  <a:srgbClr val="1F1B16"/>
+                </a:solidFill>
+                <a:latin typeface="Inter" pitchFamily="34" charset="0"/>
+                <a:ea typeface="Inter" pitchFamily="34" charset="-122"/>
+                <a:cs typeface="Inter" pitchFamily="34" charset="-120"/>
+              </a:rPr>
+              <a:t>Debug level in production is a choice. Someone has to make it.</a:t>
+            </a:r>
+            <a:endParaRPr lang="en-US" sz="1866" dirty="0"/>
+          </a:p>
+        </p:txBody>
+      </p:sp>
+      <p:sp>
+        <p:nvSpPr>
+          <p:cNvPr id="12" name="Text 10"/>
+          <p:cNvSpPr/>
+          <p:nvPr/>
+        </p:nvSpPr>
+        <p:spPr>
+          <a:xfrm>
+            <a:off x="8183699" y="3405386"/>
+            <a:ext cx="3118301" cy="362347"/>
+          </a:xfrm>
+          <a:prstGeom prst="rect">
+            <a:avLst/>
+          </a:prstGeom>
+          <a:noFill/>
+          <a:ln/>
+        </p:spPr>
+        <p:txBody>
+          <a:bodyPr wrap="square" lIns="0" tIns="0" rIns="0" bIns="101587" rtlCol="0" anchor="t"/>
+          <a:lstStyle/>
+          <a:p>
+            <a:pPr algn="l" indent="0" marL="0">
+              <a:lnSpc>
+                <a:spcPts val="2053"/>
+              </a:lnSpc>
+              <a:buNone/>
+            </a:pPr>
+            <a:r>
+              <a:rPr lang="en-US" sz="1466" dirty="0">
+                <a:solidFill>
+                  <a:srgbClr val="7A7164"/>
+                </a:solidFill>
+                <a:latin typeface="Inter" pitchFamily="34" charset="0"/>
+                <a:ea typeface="Inter" pitchFamily="34" charset="-122"/>
+                <a:cs typeface="Inter" pitchFamily="34" charset="-120"/>
+              </a:rPr>
+              <a:t>BY WINDOW</a:t>
+            </a:r>
+            <a:endParaRPr lang="en-US" sz="1466" dirty="0"/>
+          </a:p>
+        </p:txBody>
+      </p:sp>
+      <p:sp>
+        <p:nvSpPr>
+          <p:cNvPr id="13" name="Text 11"/>
+          <p:cNvSpPr/>
+          <p:nvPr/>
+        </p:nvSpPr>
+        <p:spPr>
+          <a:xfrm>
+            <a:off x="8183699" y="3767733"/>
+            <a:ext cx="3118301" cy="1066800"/>
+          </a:xfrm>
+          <a:prstGeom prst="rect">
+            <a:avLst/>
+          </a:prstGeom>
+          <a:noFill/>
+          <a:ln/>
+        </p:spPr>
+        <p:txBody>
+          <a:bodyPr wrap="square" lIns="0" tIns="0" rIns="0" bIns="0" rtlCol="0" anchor="t"/>
+          <a:lstStyle/>
+          <a:p>
+            <a:pPr algn="l" indent="0" marL="0">
+              <a:lnSpc>
+                <a:spcPts val="2800"/>
+              </a:lnSpc>
+              <a:buNone/>
+            </a:pPr>
+            <a:r>
+              <a:rPr lang="en-US" sz="1866" dirty="0">
+                <a:solidFill>
+                  <a:srgbClr val="1F1B16"/>
+                </a:solidFill>
+                <a:latin typeface="Inter" pitchFamily="34" charset="0"/>
+                <a:ea typeface="Inter" pitchFamily="34" charset="-122"/>
+                <a:cs typeface="Inter" pitchFamily="34" charset="-120"/>
+              </a:rPr>
+              <a:t>Hot days, warm weeks, cold archive — three prices, not one.</a:t>
+            </a:r>
+            <a:endParaRPr lang="en-US" sz="1866" dirty="0"/>
+          </a:p>
+        </p:txBody>
+      </p:sp>
+      <p:sp>
+        <p:nvSpPr>
+          <p:cNvPr id="14" name="Text 12"/>
+          <p:cNvSpPr/>
+          <p:nvPr/>
+        </p:nvSpPr>
+        <p:spPr>
+          <a:xfrm>
+            <a:off x="677098" y="5230416"/>
+            <a:ext cx="11051451" cy="406202"/>
+          </a:xfrm>
+          <a:prstGeom prst="rect">
+            <a:avLst/>
+          </a:prstGeom>
+          <a:noFill/>
+          <a:ln/>
+        </p:spPr>
+        <p:txBody>
+          <a:bodyPr wrap="square" lIns="0" tIns="0" rIns="0" bIns="0" rtlCol="0" anchor="t"/>
+          <a:lstStyle/>
+          <a:p>
+            <a:pPr algn="l" indent="0" marL="0">
+              <a:lnSpc>
+                <a:spcPts val="3200"/>
+              </a:lnSpc>
+              <a:buNone/>
+            </a:pPr>
+            <a:r>
+              <a:rPr lang="en-US" sz="2133" dirty="0">
+                <a:solidFill>
+                  <a:srgbClr val="1F1B16"/>
+                </a:solidFill>
+                <a:latin typeface="Inter" pitchFamily="34" charset="0"/>
+                <a:ea typeface="Inter" pitchFamily="34" charset="-122"/>
+                <a:cs typeface="Inter" pitchFamily="34" charset="-120"/>
+              </a:rPr>
+              <a:t>One line item can only be approved or refused. Three can be negotiated.</a:t>
+            </a:r>
+            <a:endParaRPr lang="en-US" sz="2133" dirty="0"/>
+          </a:p>
+        </p:txBody>
+      </p:sp>
+      <p:sp>
+        <p:nvSpPr>
+          <p:cNvPr id="15" name="Text 13"/>
+          <p:cNvSpPr/>
+          <p:nvPr/>
+        </p:nvSpPr>
+        <p:spPr>
+          <a:xfrm>
+            <a:off x="677098" y="5907484"/>
+            <a:ext cx="10834756" cy="12700"/>
+          </a:xfrm>
+          <a:prstGeom prst="rect">
+            <a:avLst/>
+          </a:prstGeom>
+          <a:solidFill>
+            <a:srgbClr val="DAD3C4"/>
+          </a:solidFill>
+          <a:ln/>
+        </p:spPr>
+        <p:txBody>
+          <a:bodyPr wrap="square" rtlCol="0" anchor="ctr"/>
+          <a:lstStyle/>
+          <a:p>
+            <a:pPr indent="0" marL="0">
+              <a:buNone/>
+            </a:pPr>
+            <a:endParaRPr lang="en-US" dirty="0"/>
+          </a:p>
+        </p:txBody>
+      </p:sp>
+      <p:sp>
+        <p:nvSpPr>
+          <p:cNvPr id="16" name="Text 14"/>
+          <p:cNvSpPr/>
+          <p:nvPr/>
+        </p:nvSpPr>
+        <p:spPr>
+          <a:xfrm>
+            <a:off x="677098" y="6055519"/>
+            <a:ext cx="767737" cy="260747"/>
+          </a:xfrm>
+          <a:prstGeom prst="rect">
+            <a:avLst/>
+          </a:prstGeom>
+          <a:noFill/>
+          <a:ln/>
+        </p:spPr>
+        <p:txBody>
+          <a:bodyPr wrap="square" lIns="0" tIns="0" rIns="0" bIns="0" rtlCol="0" anchor="t"/>
+          <a:lstStyle/>
+          <a:p>
+            <a:pPr algn="l" indent="0" marL="0">
+              <a:lnSpc>
+                <a:spcPts val="2053"/>
+              </a:lnSpc>
+              <a:buNone/>
+            </a:pPr>
+            <a:r>
+              <a:rPr lang="en-US" sz="1466" dirty="0">
+                <a:solidFill>
+                  <a:srgbClr val="7A7164"/>
+                </a:solidFill>
+                <a:latin typeface="Inter" pitchFamily="34" charset="0"/>
+                <a:ea typeface="Inter" pitchFamily="34" charset="-122"/>
+                <a:cs typeface="Inter" pitchFamily="34" charset="-120"/>
+              </a:rPr>
+              <a:t>05 / 06</a:t>
+            </a:r>
+            <a:endParaRPr lang="en-US" sz="1466" dirty="0"/>
+          </a:p>
+        </p:txBody>
+      </p:sp>
+      <p:sp>
+        <p:nvSpPr>
+          <p:cNvPr id="17" name="Text 15"/>
+          <p:cNvSpPr/>
+          <p:nvPr/>
+        </p:nvSpPr>
+        <p:spPr>
+          <a:xfrm>
+            <a:off x="4725655" y="6055519"/>
+            <a:ext cx="6786199" cy="260747"/>
+          </a:xfrm>
+          <a:prstGeom prst="rect">
+            <a:avLst/>
+          </a:prstGeom>
+          <a:noFill/>
+          <a:ln/>
+        </p:spPr>
+        <p:txBody>
+          <a:bodyPr wrap="square" lIns="0" tIns="0" rIns="0" bIns="0" rtlCol="0" anchor="t"/>
+          <a:lstStyle/>
+          <a:p>
+            <a:pPr algn="r" indent="0" marL="0">
+              <a:lnSpc>
+                <a:spcPts val="2053"/>
+              </a:lnSpc>
+              <a:buNone/>
+            </a:pPr>
+            <a:r>
+              <a:rPr lang="en-US" sz="1466" dirty="0">
+                <a:solidFill>
+                  <a:srgbClr val="7A7164"/>
+                </a:solidFill>
+                <a:latin typeface="Inter" pitchFamily="34" charset="0"/>
+                <a:ea typeface="Inter" pitchFamily="34" charset="-122"/>
+                <a:cs typeface="Inter" pitchFamily="34" charset="-120"/>
+              </a:rPr>
+              <a:t>Source: none — this deck cites no cost figures; the argument is structural.</a:t>
+            </a:r>
+            <a:endParaRPr lang="en-US" sz="1466" dirty="0"/>
+          </a:p>
+        </p:txBody>
+      </p:sp>
     </p:spTree>
   </p:cSld>
   <p:clrMapOvr>
@@ -1544,6 +5405,13 @@
 <file path=ppt/slides/slide6.xml><?xml version="1.0" encoding="utf-8"?>
 <p:sld xmlns:a="http://schemas.openxmlformats.org/drawingml/2006/main" xmlns:r="http://schemas.openxmlformats.org/officeDocument/2006/relationships" xmlns:p="http://schemas.openxmlformats.org/presentationml/2006/main">
   <p:cSld name="Slide 6">
+    <p:bg>
+      <p:bgPr>
+        <a:solidFill>
+          <a:srgbClr val="F7F4EE"/>
+        </a:solidFill>
+      </p:bgPr>
+    </p:bg>
     <p:spTree>
       <p:nvGrpSpPr>
         <p:cNvPr id="1" name=""/>
@@ -1558,30 +5426,933 @@
           <a:chExt cx="0" cy="0"/>
         </a:xfrm>
       </p:grpSpPr>
-      <p:pic>
-        <p:nvPicPr>
-          <p:cNvPr id="2" name="Image 0" descr="/tmp/slide-1787840556736-82hk631a33b.png">    </p:cNvPr>
-          <p:cNvPicPr>
-            <a:picLocks noChangeAspect="1"/>
-          </p:cNvPicPr>
-          <p:nvPr/>
-        </p:nvPicPr>
-        <p:blipFill>
-          <a:blip r:embed="rId1"/>
-          <a:stretch>
-            <a:fillRect/>
-          </a:stretch>
-        </p:blipFill>
-        <p:spPr>
-          <a:xfrm>
-            <a:off x="0" y="0"/>
-            <a:ext cx="12188952" cy="6858000"/>
-          </a:xfrm>
-          <a:prstGeom prst="rect">
-            <a:avLst/>
-          </a:prstGeom>
-        </p:spPr>
-      </p:pic>
+      <p:sp>
+        <p:nvSpPr>
+          <p:cNvPr id="2" name="Text 0"/>
+          <p:cNvSpPr/>
+          <p:nvPr/>
+        </p:nvSpPr>
+        <p:spPr>
+          <a:xfrm>
+            <a:off x="677098" y="541734"/>
+            <a:ext cx="11051451" cy="260747"/>
+          </a:xfrm>
+          <a:prstGeom prst="rect">
+            <a:avLst/>
+          </a:prstGeom>
+          <a:noFill/>
+          <a:ln/>
+        </p:spPr>
+        <p:txBody>
+          <a:bodyPr wrap="square" lIns="0" tIns="0" rIns="0" bIns="0" rtlCol="0" anchor="t"/>
+          <a:lstStyle/>
+          <a:p>
+            <a:pPr algn="l" indent="0" marL="0">
+              <a:lnSpc>
+                <a:spcPts val="2053"/>
+              </a:lnSpc>
+              <a:buNone/>
+            </a:pPr>
+            <a:r>
+              <a:rPr lang="en-US" sz="1466" dirty="0">
+                <a:solidFill>
+                  <a:srgbClr val="7A7164"/>
+                </a:solidFill>
+                <a:latin typeface="Inter" pitchFamily="34" charset="0"/>
+                <a:ea typeface="Inter" pitchFamily="34" charset="-122"/>
+                <a:cs typeface="Inter" pitchFamily="34" charset="-120"/>
+              </a:rPr>
+              <a:t>PLATFORM ENGINEERING · OBSERVABILITY BUDGET</a:t>
+            </a:r>
+            <a:endParaRPr lang="en-US" sz="1466" dirty="0"/>
+          </a:p>
+        </p:txBody>
+      </p:sp>
+      <p:sp>
+        <p:nvSpPr>
+          <p:cNvPr id="3" name="Text 1"/>
+          <p:cNvSpPr/>
+          <p:nvPr/>
+        </p:nvSpPr>
+        <p:spPr>
+          <a:xfrm>
+            <a:off x="677098" y="937816"/>
+            <a:ext cx="10834756" cy="12700"/>
+          </a:xfrm>
+          <a:prstGeom prst="rect">
+            <a:avLst/>
+          </a:prstGeom>
+          <a:solidFill>
+            <a:srgbClr val="DAD3C4"/>
+          </a:solidFill>
+          <a:ln/>
+        </p:spPr>
+        <p:txBody>
+          <a:bodyPr wrap="square" rtlCol="0" anchor="ctr"/>
+          <a:lstStyle/>
+          <a:p>
+            <a:pPr indent="0" marL="0">
+              <a:buNone/>
+            </a:pPr>
+            <a:endParaRPr lang="en-US" dirty="0"/>
+          </a:p>
+        </p:txBody>
+      </p:sp>
+      <p:sp>
+        <p:nvSpPr>
+          <p:cNvPr id="4" name="Text 2"/>
+          <p:cNvSpPr/>
+          <p:nvPr/>
+        </p:nvSpPr>
+        <p:spPr>
+          <a:xfrm>
+            <a:off x="677098" y="1289050"/>
+            <a:ext cx="4489462" cy="3017639"/>
+          </a:xfrm>
+          <a:prstGeom prst="rect">
+            <a:avLst/>
+          </a:prstGeom>
+          <a:noFill/>
+          <a:ln/>
+        </p:spPr>
+        <p:txBody>
+          <a:bodyPr wrap="square" lIns="0" tIns="0" rIns="0" bIns="0" rtlCol="0" anchor="t"/>
+          <a:lstStyle/>
+          <a:p>
+            <a:pPr algn="l" indent="0" marL="0">
+              <a:lnSpc>
+                <a:spcPts val="7919"/>
+              </a:lnSpc>
+              <a:buNone/>
+            </a:pPr>
+            <a:r>
+              <a:rPr lang="en-US" sz="5866" dirty="0">
+                <a:solidFill>
+                  <a:srgbClr val="1F1B16"/>
+                </a:solidFill>
+                <a:latin typeface="Source Serif 4" pitchFamily="34" charset="0"/>
+                <a:ea typeface="Source Serif 4" pitchFamily="34" charset="-122"/>
+                <a:cs typeface="Source Serif 4" pitchFamily="34" charset="-120"/>
+              </a:rPr>
+              <a:t>What we</a:t>
+            </a:r>
+            <a:endParaRPr lang="en-US" sz="5866" dirty="0"/>
+          </a:p>
+          <a:p>
+            <a:pPr algn="l" indent="0" marL="0">
+              <a:lnSpc>
+                <a:spcPts val="7919"/>
+              </a:lnSpc>
+              <a:buNone/>
+            </a:pPr>
+            <a:r>
+              <a:rPr lang="en-US" sz="5866" dirty="0">
+                <a:solidFill>
+                  <a:srgbClr val="1F1B16"/>
+                </a:solidFill>
+                <a:latin typeface="Source Serif 4" pitchFamily="34" charset="0"/>
+                <a:ea typeface="Source Serif 4" pitchFamily="34" charset="-122"/>
+                <a:cs typeface="Source Serif 4" pitchFamily="34" charset="-120"/>
+              </a:rPr>
+              <a:t>need to</a:t>
+            </a:r>
+            <a:endParaRPr lang="en-US" sz="5866" dirty="0"/>
+          </a:p>
+          <a:p>
+            <a:pPr algn="l" indent="0" marL="0">
+              <a:lnSpc>
+                <a:spcPts val="7919"/>
+              </a:lnSpc>
+              <a:buNone/>
+            </a:pPr>
+            <a:r>
+              <a:rPr lang="en-US" sz="5866" dirty="0">
+                <a:solidFill>
+                  <a:srgbClr val="1F1B16"/>
+                </a:solidFill>
+                <a:latin typeface="Source Serif 4" pitchFamily="34" charset="0"/>
+                <a:ea typeface="Source Serif 4" pitchFamily="34" charset="-122"/>
+                <a:cs typeface="Source Serif 4" pitchFamily="34" charset="-120"/>
+              </a:rPr>
+              <a:t>decide</a:t>
+            </a:r>
+            <a:endParaRPr lang="en-US" sz="5866" dirty="0"/>
+          </a:p>
+        </p:txBody>
+      </p:sp>
+      <p:sp>
+        <p:nvSpPr>
+          <p:cNvPr id="5" name="Text 3"/>
+          <p:cNvSpPr/>
+          <p:nvPr/>
+        </p:nvSpPr>
+        <p:spPr>
+          <a:xfrm>
+            <a:off x="677098" y="4925417"/>
+            <a:ext cx="4489462" cy="711200"/>
+          </a:xfrm>
+          <a:prstGeom prst="rect">
+            <a:avLst/>
+          </a:prstGeom>
+          <a:noFill/>
+          <a:ln/>
+        </p:spPr>
+        <p:txBody>
+          <a:bodyPr wrap="square" lIns="0" tIns="0" rIns="0" bIns="0" rtlCol="0" anchor="t"/>
+          <a:lstStyle/>
+          <a:p>
+            <a:pPr algn="l" indent="0" marL="0">
+              <a:lnSpc>
+                <a:spcPts val="2800"/>
+              </a:lnSpc>
+              <a:spcBef>
+                <a:spcPts val="4871"/>
+              </a:spcBef>
+              <a:buNone/>
+            </a:pPr>
+            <a:r>
+              <a:rPr lang="en-US" sz="1866" dirty="0">
+                <a:solidFill>
+                  <a:srgbClr val="7A7164"/>
+                </a:solidFill>
+                <a:latin typeface="Inter" pitchFamily="34" charset="0"/>
+                <a:ea typeface="Inter" pitchFamily="34" charset="-122"/>
+                <a:cs typeface="Inter" pitchFamily="34" charset="-120"/>
+              </a:rPr>
+              <a:t>Three decisions. Each one makes part of the bill arguable.</a:t>
+            </a:r>
+            <a:endParaRPr lang="en-US" sz="1866" dirty="0"/>
+          </a:p>
+        </p:txBody>
+      </p:sp>
+      <p:sp>
+        <p:nvSpPr>
+          <p:cNvPr id="6" name="Text 4"/>
+          <p:cNvSpPr/>
+          <p:nvPr/>
+        </p:nvSpPr>
+        <p:spPr>
+          <a:xfrm>
+            <a:off x="5416981" y="1289050"/>
+            <a:ext cx="372374" cy="372467"/>
+          </a:xfrm>
+          <a:prstGeom prst="roundRect">
+            <a:avLst>
+              <a:gd name="adj" fmla="val 327372"/>
+            </a:avLst>
+          </a:prstGeom>
+          <a:noFill/>
+          <a:ln w="12698">
+            <a:solidFill>
+              <a:srgbClr val="DAD3C4"/>
+            </a:solidFill>
+          </a:ln>
+        </p:spPr>
+        <p:txBody>
+          <a:bodyPr wrap="square" rtlCol="0" anchor="ctr"/>
+          <a:lstStyle/>
+          <a:p>
+            <a:pPr indent="0" marL="0">
+              <a:buNone/>
+            </a:pPr>
+            <a:endParaRPr lang="en-US" dirty="0"/>
+          </a:p>
+        </p:txBody>
+      </p:sp>
+      <p:sp>
+        <p:nvSpPr>
+          <p:cNvPr id="7" name="Text 5"/>
+          <p:cNvSpPr/>
+          <p:nvPr/>
+        </p:nvSpPr>
+        <p:spPr>
+          <a:xfrm>
+            <a:off x="5545933" y="1333103"/>
+            <a:ext cx="116557" cy="284361"/>
+          </a:xfrm>
+          <a:prstGeom prst="rect">
+            <a:avLst/>
+          </a:prstGeom>
+          <a:noFill/>
+          <a:ln/>
+        </p:spPr>
+        <p:txBody>
+          <a:bodyPr wrap="square" lIns="0" tIns="0" rIns="0" bIns="0" rtlCol="0" anchor="t"/>
+          <a:lstStyle/>
+          <a:p>
+            <a:pPr algn="l" indent="0" marL="0">
+              <a:lnSpc>
+                <a:spcPts val="2240"/>
+              </a:lnSpc>
+              <a:buNone/>
+            </a:pPr>
+            <a:r>
+              <a:rPr lang="en-US" sz="1600" b="1" dirty="0">
+                <a:solidFill>
+                  <a:srgbClr val="1F1B16"/>
+                </a:solidFill>
+                <a:latin typeface="Source Serif 4" pitchFamily="34" charset="0"/>
+                <a:ea typeface="Source Serif 4" pitchFamily="34" charset="-122"/>
+                <a:cs typeface="Source Serif 4" pitchFamily="34" charset="-120"/>
+              </a:rPr>
+              <a:t>1</a:t>
+            </a:r>
+            <a:endParaRPr lang="en-US" sz="1600" dirty="0"/>
+          </a:p>
+        </p:txBody>
+      </p:sp>
+      <p:sp>
+        <p:nvSpPr>
+          <p:cNvPr id="8" name="Text 6"/>
+          <p:cNvSpPr/>
+          <p:nvPr/>
+        </p:nvSpPr>
+        <p:spPr>
+          <a:xfrm>
+            <a:off x="5924854" y="1289050"/>
+            <a:ext cx="5698740" cy="411361"/>
+          </a:xfrm>
+          <a:prstGeom prst="rect">
+            <a:avLst/>
+          </a:prstGeom>
+          <a:noFill/>
+          <a:ln/>
+        </p:spPr>
+        <p:txBody>
+          <a:bodyPr wrap="square" lIns="0" tIns="0" rIns="0" bIns="0" rtlCol="0" anchor="t"/>
+          <a:lstStyle/>
+          <a:p>
+            <a:pPr algn="l" indent="0" marL="0">
+              <a:lnSpc>
+                <a:spcPts val="3240"/>
+              </a:lnSpc>
+              <a:spcAft>
+                <a:spcPts val="533"/>
+              </a:spcAft>
+              <a:buNone/>
+            </a:pPr>
+            <a:r>
+              <a:rPr lang="en-US" sz="2400" b="1" dirty="0">
+                <a:solidFill>
+                  <a:srgbClr val="1F1B16"/>
+                </a:solidFill>
+                <a:latin typeface="Source Serif 4" pitchFamily="34" charset="0"/>
+                <a:ea typeface="Source Serif 4" pitchFamily="34" charset="-122"/>
+                <a:cs typeface="Source Serif 4" pitchFamily="34" charset="-120"/>
+              </a:rPr>
+              <a:t>What gets sampled</a:t>
+            </a:r>
+            <a:endParaRPr lang="en-US" sz="2400" dirty="0"/>
+          </a:p>
+        </p:txBody>
+      </p:sp>
+      <p:sp>
+        <p:nvSpPr>
+          <p:cNvPr id="9" name="Text 7"/>
+          <p:cNvSpPr/>
+          <p:nvPr/>
+        </p:nvSpPr>
+        <p:spPr>
+          <a:xfrm>
+            <a:off x="5924854" y="1768078"/>
+            <a:ext cx="5698740" cy="355600"/>
+          </a:xfrm>
+          <a:prstGeom prst="rect">
+            <a:avLst/>
+          </a:prstGeom>
+          <a:noFill/>
+          <a:ln/>
+        </p:spPr>
+        <p:txBody>
+          <a:bodyPr wrap="square" lIns="0" tIns="0" rIns="0" bIns="0" rtlCol="0" anchor="t"/>
+          <a:lstStyle/>
+          <a:p>
+            <a:pPr algn="l" indent="0" marL="0">
+              <a:lnSpc>
+                <a:spcPts val="2800"/>
+              </a:lnSpc>
+              <a:buNone/>
+            </a:pPr>
+            <a:r>
+              <a:rPr lang="en-US" sz="1866" dirty="0">
+                <a:solidFill>
+                  <a:srgbClr val="7A7164"/>
+                </a:solidFill>
+                <a:latin typeface="Inter" pitchFamily="34" charset="0"/>
+                <a:ea typeface="Inter" pitchFamily="34" charset="-122"/>
+                <a:cs typeface="Inter" pitchFamily="34" charset="-120"/>
+              </a:rPr>
+              <a:t>Which signals, at what share, changed by whom</a:t>
+            </a:r>
+            <a:endParaRPr lang="en-US" sz="1866" dirty="0"/>
+          </a:p>
+        </p:txBody>
+      </p:sp>
+      <p:sp>
+        <p:nvSpPr>
+          <p:cNvPr id="10" name="Text 8"/>
+          <p:cNvSpPr/>
+          <p:nvPr/>
+        </p:nvSpPr>
+        <p:spPr>
+          <a:xfrm>
+            <a:off x="5416981" y="2292945"/>
+            <a:ext cx="6094873" cy="12700"/>
+          </a:xfrm>
+          <a:prstGeom prst="rect">
+            <a:avLst/>
+          </a:prstGeom>
+          <a:solidFill>
+            <a:srgbClr val="DAD3C4"/>
+          </a:solidFill>
+          <a:ln/>
+        </p:spPr>
+        <p:txBody>
+          <a:bodyPr wrap="square" rtlCol="0" anchor="ctr"/>
+          <a:lstStyle/>
+          <a:p>
+            <a:pPr indent="0" marL="0">
+              <a:buNone/>
+            </a:pPr>
+            <a:endParaRPr lang="en-US" dirty="0"/>
+          </a:p>
+        </p:txBody>
+      </p:sp>
+      <p:sp>
+        <p:nvSpPr>
+          <p:cNvPr id="11" name="Text 9"/>
+          <p:cNvSpPr/>
+          <p:nvPr/>
+        </p:nvSpPr>
+        <p:spPr>
+          <a:xfrm>
+            <a:off x="5416981" y="2305645"/>
+            <a:ext cx="372374" cy="372467"/>
+          </a:xfrm>
+          <a:prstGeom prst="roundRect">
+            <a:avLst>
+              <a:gd name="adj" fmla="val 327372"/>
+            </a:avLst>
+          </a:prstGeom>
+          <a:noFill/>
+          <a:ln w="12698">
+            <a:solidFill>
+              <a:srgbClr val="DAD3C4"/>
+            </a:solidFill>
+          </a:ln>
+        </p:spPr>
+        <p:txBody>
+          <a:bodyPr wrap="square" rtlCol="0" anchor="ctr"/>
+          <a:lstStyle/>
+          <a:p>
+            <a:pPr indent="0" marL="0">
+              <a:buNone/>
+            </a:pPr>
+            <a:endParaRPr lang="en-US" dirty="0"/>
+          </a:p>
+        </p:txBody>
+      </p:sp>
+      <p:sp>
+        <p:nvSpPr>
+          <p:cNvPr id="12" name="Text 10"/>
+          <p:cNvSpPr/>
+          <p:nvPr/>
+        </p:nvSpPr>
+        <p:spPr>
+          <a:xfrm>
+            <a:off x="5545933" y="2349698"/>
+            <a:ext cx="116557" cy="284361"/>
+          </a:xfrm>
+          <a:prstGeom prst="rect">
+            <a:avLst/>
+          </a:prstGeom>
+          <a:noFill/>
+          <a:ln/>
+        </p:spPr>
+        <p:txBody>
+          <a:bodyPr wrap="square" lIns="0" tIns="0" rIns="0" bIns="0" rtlCol="0" anchor="t"/>
+          <a:lstStyle/>
+          <a:p>
+            <a:pPr algn="l" indent="0" marL="0">
+              <a:lnSpc>
+                <a:spcPts val="2240"/>
+              </a:lnSpc>
+              <a:buNone/>
+            </a:pPr>
+            <a:r>
+              <a:rPr lang="en-US" sz="1600" b="1" dirty="0">
+                <a:solidFill>
+                  <a:srgbClr val="1F1B16"/>
+                </a:solidFill>
+                <a:latin typeface="Source Serif 4" pitchFamily="34" charset="0"/>
+                <a:ea typeface="Source Serif 4" pitchFamily="34" charset="-122"/>
+                <a:cs typeface="Source Serif 4" pitchFamily="34" charset="-120"/>
+              </a:rPr>
+              <a:t>2</a:t>
+            </a:r>
+            <a:endParaRPr lang="en-US" sz="1600" dirty="0"/>
+          </a:p>
+        </p:txBody>
+      </p:sp>
+      <p:sp>
+        <p:nvSpPr>
+          <p:cNvPr id="13" name="Text 11"/>
+          <p:cNvSpPr/>
+          <p:nvPr/>
+        </p:nvSpPr>
+        <p:spPr>
+          <a:xfrm>
+            <a:off x="5924854" y="2305645"/>
+            <a:ext cx="5698740" cy="411361"/>
+          </a:xfrm>
+          <a:prstGeom prst="rect">
+            <a:avLst/>
+          </a:prstGeom>
+          <a:noFill/>
+          <a:ln/>
+        </p:spPr>
+        <p:txBody>
+          <a:bodyPr wrap="square" lIns="0" tIns="0" rIns="0" bIns="0" rtlCol="0" anchor="t"/>
+          <a:lstStyle/>
+          <a:p>
+            <a:pPr algn="l" indent="0" marL="0">
+              <a:lnSpc>
+                <a:spcPts val="3240"/>
+              </a:lnSpc>
+              <a:spcAft>
+                <a:spcPts val="533"/>
+              </a:spcAft>
+              <a:buNone/>
+            </a:pPr>
+            <a:r>
+              <a:rPr lang="en-US" sz="2400" b="1" dirty="0">
+                <a:solidFill>
+                  <a:srgbClr val="1F1B16"/>
+                </a:solidFill>
+                <a:latin typeface="Source Serif 4" pitchFamily="34" charset="0"/>
+                <a:ea typeface="Source Serif 4" pitchFamily="34" charset="-122"/>
+                <a:cs typeface="Source Serif 4" pitchFamily="34" charset="-120"/>
+              </a:rPr>
+              <a:t>What gets dropped</a:t>
+            </a:r>
+            <a:endParaRPr lang="en-US" sz="2400" dirty="0"/>
+          </a:p>
+        </p:txBody>
+      </p:sp>
+      <p:sp>
+        <p:nvSpPr>
+          <p:cNvPr id="14" name="Text 12"/>
+          <p:cNvSpPr/>
+          <p:nvPr/>
+        </p:nvSpPr>
+        <p:spPr>
+          <a:xfrm>
+            <a:off x="5924854" y="2784673"/>
+            <a:ext cx="5698740" cy="355600"/>
+          </a:xfrm>
+          <a:prstGeom prst="rect">
+            <a:avLst/>
+          </a:prstGeom>
+          <a:noFill/>
+          <a:ln/>
+        </p:spPr>
+        <p:txBody>
+          <a:bodyPr wrap="square" lIns="0" tIns="0" rIns="0" bIns="0" rtlCol="0" anchor="t"/>
+          <a:lstStyle/>
+          <a:p>
+            <a:pPr algn="l" indent="0" marL="0">
+              <a:lnSpc>
+                <a:spcPts val="2800"/>
+              </a:lnSpc>
+              <a:buNone/>
+            </a:pPr>
+            <a:r>
+              <a:rPr lang="en-US" sz="1866" dirty="0">
+                <a:solidFill>
+                  <a:srgbClr val="7A7164"/>
+                </a:solidFill>
+                <a:latin typeface="Inter" pitchFamily="34" charset="0"/>
+                <a:ea typeface="Inter" pitchFamily="34" charset="-122"/>
+                <a:cs typeface="Inter" pitchFamily="34" charset="-120"/>
+              </a:rPr>
+              <a:t>Which lines never leave the process at all</a:t>
+            </a:r>
+            <a:endParaRPr lang="en-US" sz="1866" dirty="0"/>
+          </a:p>
+        </p:txBody>
+      </p:sp>
+      <p:sp>
+        <p:nvSpPr>
+          <p:cNvPr id="15" name="Text 13"/>
+          <p:cNvSpPr/>
+          <p:nvPr/>
+        </p:nvSpPr>
+        <p:spPr>
+          <a:xfrm>
+            <a:off x="5416981" y="3309541"/>
+            <a:ext cx="6094873" cy="12700"/>
+          </a:xfrm>
+          <a:prstGeom prst="rect">
+            <a:avLst/>
+          </a:prstGeom>
+          <a:solidFill>
+            <a:srgbClr val="DAD3C4"/>
+          </a:solidFill>
+          <a:ln/>
+        </p:spPr>
+        <p:txBody>
+          <a:bodyPr wrap="square" rtlCol="0" anchor="ctr"/>
+          <a:lstStyle/>
+          <a:p>
+            <a:pPr indent="0" marL="0">
+              <a:buNone/>
+            </a:pPr>
+            <a:endParaRPr lang="en-US" dirty="0"/>
+          </a:p>
+        </p:txBody>
+      </p:sp>
+      <p:sp>
+        <p:nvSpPr>
+          <p:cNvPr id="16" name="Text 14"/>
+          <p:cNvSpPr/>
+          <p:nvPr/>
+        </p:nvSpPr>
+        <p:spPr>
+          <a:xfrm>
+            <a:off x="5416981" y="3322241"/>
+            <a:ext cx="372374" cy="372467"/>
+          </a:xfrm>
+          <a:prstGeom prst="roundRect">
+            <a:avLst>
+              <a:gd name="adj" fmla="val 327372"/>
+            </a:avLst>
+          </a:prstGeom>
+          <a:noFill/>
+          <a:ln w="12698">
+            <a:solidFill>
+              <a:srgbClr val="DAD3C4"/>
+            </a:solidFill>
+          </a:ln>
+        </p:spPr>
+        <p:txBody>
+          <a:bodyPr wrap="square" rtlCol="0" anchor="ctr"/>
+          <a:lstStyle/>
+          <a:p>
+            <a:pPr indent="0" marL="0">
+              <a:buNone/>
+            </a:pPr>
+            <a:endParaRPr lang="en-US" dirty="0"/>
+          </a:p>
+        </p:txBody>
+      </p:sp>
+      <p:sp>
+        <p:nvSpPr>
+          <p:cNvPr id="17" name="Text 15"/>
+          <p:cNvSpPr/>
+          <p:nvPr/>
+        </p:nvSpPr>
+        <p:spPr>
+          <a:xfrm>
+            <a:off x="5545933" y="3366294"/>
+            <a:ext cx="116557" cy="284361"/>
+          </a:xfrm>
+          <a:prstGeom prst="rect">
+            <a:avLst/>
+          </a:prstGeom>
+          <a:noFill/>
+          <a:ln/>
+        </p:spPr>
+        <p:txBody>
+          <a:bodyPr wrap="square" lIns="0" tIns="0" rIns="0" bIns="0" rtlCol="0" anchor="t"/>
+          <a:lstStyle/>
+          <a:p>
+            <a:pPr algn="l" indent="0" marL="0">
+              <a:lnSpc>
+                <a:spcPts val="2240"/>
+              </a:lnSpc>
+              <a:buNone/>
+            </a:pPr>
+            <a:r>
+              <a:rPr lang="en-US" sz="1600" b="1" dirty="0">
+                <a:solidFill>
+                  <a:srgbClr val="1F1B16"/>
+                </a:solidFill>
+                <a:latin typeface="Source Serif 4" pitchFamily="34" charset="0"/>
+                <a:ea typeface="Source Serif 4" pitchFamily="34" charset="-122"/>
+                <a:cs typeface="Source Serif 4" pitchFamily="34" charset="-120"/>
+              </a:rPr>
+              <a:t>3</a:t>
+            </a:r>
+            <a:endParaRPr lang="en-US" sz="1600" dirty="0"/>
+          </a:p>
+        </p:txBody>
+      </p:sp>
+      <p:sp>
+        <p:nvSpPr>
+          <p:cNvPr id="18" name="Text 16"/>
+          <p:cNvSpPr/>
+          <p:nvPr/>
+        </p:nvSpPr>
+        <p:spPr>
+          <a:xfrm>
+            <a:off x="5924854" y="3322241"/>
+            <a:ext cx="5698740" cy="411361"/>
+          </a:xfrm>
+          <a:prstGeom prst="rect">
+            <a:avLst/>
+          </a:prstGeom>
+          <a:noFill/>
+          <a:ln/>
+        </p:spPr>
+        <p:txBody>
+          <a:bodyPr wrap="square" lIns="0" tIns="0" rIns="0" bIns="0" rtlCol="0" anchor="t"/>
+          <a:lstStyle/>
+          <a:p>
+            <a:pPr algn="l" indent="0" marL="0">
+              <a:lnSpc>
+                <a:spcPts val="3240"/>
+              </a:lnSpc>
+              <a:spcAft>
+                <a:spcPts val="533"/>
+              </a:spcAft>
+              <a:buNone/>
+            </a:pPr>
+            <a:r>
+              <a:rPr lang="en-US" sz="2400" b="1" dirty="0">
+                <a:solidFill>
+                  <a:srgbClr val="1F1B16"/>
+                </a:solidFill>
+                <a:latin typeface="Source Serif 4" pitchFamily="34" charset="0"/>
+                <a:ea typeface="Source Serif 4" pitchFamily="34" charset="-122"/>
+                <a:cs typeface="Source Serif 4" pitchFamily="34" charset="-120"/>
+              </a:rPr>
+              <a:t>Who owns retention</a:t>
+            </a:r>
+            <a:endParaRPr lang="en-US" sz="2400" dirty="0"/>
+          </a:p>
+        </p:txBody>
+      </p:sp>
+      <p:sp>
+        <p:nvSpPr>
+          <p:cNvPr id="19" name="Text 17"/>
+          <p:cNvSpPr/>
+          <p:nvPr/>
+        </p:nvSpPr>
+        <p:spPr>
+          <a:xfrm>
+            <a:off x="5924854" y="3801269"/>
+            <a:ext cx="5698740" cy="355600"/>
+          </a:xfrm>
+          <a:prstGeom prst="rect">
+            <a:avLst/>
+          </a:prstGeom>
+          <a:noFill/>
+          <a:ln/>
+        </p:spPr>
+        <p:txBody>
+          <a:bodyPr wrap="square" lIns="0" tIns="0" rIns="0" bIns="0" rtlCol="0" anchor="t"/>
+          <a:lstStyle/>
+          <a:p>
+            <a:pPr algn="l" indent="0" marL="0">
+              <a:lnSpc>
+                <a:spcPts val="2800"/>
+              </a:lnSpc>
+              <a:buNone/>
+            </a:pPr>
+            <a:r>
+              <a:rPr lang="en-US" sz="1866" dirty="0">
+                <a:solidFill>
+                  <a:srgbClr val="7A7164"/>
+                </a:solidFill>
+                <a:latin typeface="Inter" pitchFamily="34" charset="0"/>
+                <a:ea typeface="Inter" pitchFamily="34" charset="-122"/>
+                <a:cs typeface="Inter" pitchFamily="34" charset="-120"/>
+              </a:rPr>
+              <a:t>One named owner for each window we pay for</a:t>
+            </a:r>
+            <a:endParaRPr lang="en-US" sz="1866" dirty="0"/>
+          </a:p>
+        </p:txBody>
+      </p:sp>
+      <p:sp>
+        <p:nvSpPr>
+          <p:cNvPr id="20" name="Shape 18"/>
+          <p:cNvSpPr/>
+          <p:nvPr/>
+        </p:nvSpPr>
+        <p:spPr>
+          <a:xfrm>
+            <a:off x="5467769" y="5281017"/>
+            <a:ext cx="0" cy="355600"/>
+          </a:xfrm>
+          <a:prstGeom prst="line">
+            <a:avLst/>
+          </a:prstGeom>
+          <a:noFill/>
+          <a:ln w="101587">
+            <a:solidFill>
+              <a:srgbClr val="B5503A"/>
+            </a:solidFill>
+            <a:prstDash val="solid"/>
+          </a:ln>
+        </p:spPr>
+      </p:sp>
+      <p:sp>
+        <p:nvSpPr>
+          <p:cNvPr id="21" name="Text 19"/>
+          <p:cNvSpPr/>
+          <p:nvPr/>
+        </p:nvSpPr>
+        <p:spPr>
+          <a:xfrm>
+            <a:off x="5789355" y="5281017"/>
+            <a:ext cx="5836949" cy="355600"/>
+          </a:xfrm>
+          <a:prstGeom prst="rect">
+            <a:avLst/>
+          </a:prstGeom>
+          <a:noFill/>
+          <a:ln/>
+        </p:spPr>
+        <p:txBody>
+          <a:bodyPr wrap="square" lIns="0" tIns="0" rIns="0" bIns="0" rtlCol="0" anchor="t"/>
+          <a:lstStyle/>
+          <a:p>
+            <a:pPr algn="l" indent="0" marL="0">
+              <a:lnSpc>
+                <a:spcPts val="2800"/>
+              </a:lnSpc>
+              <a:buNone/>
+            </a:pPr>
+            <a:r>
+              <a:rPr lang="en-US" sz="1866" dirty="0">
+                <a:solidFill>
+                  <a:srgbClr val="1F1B16"/>
+                </a:solidFill>
+                <a:latin typeface="Inter" pitchFamily="34" charset="0"/>
+                <a:ea typeface="Inter" pitchFamily="34" charset="-122"/>
+                <a:cs typeface="Inter" pitchFamily="34" charset="-120"/>
+              </a:rPr>
+              <a:t>None of the three is a tooling decision.</a:t>
+            </a:r>
+            <a:endParaRPr lang="en-US" sz="1866" dirty="0"/>
+          </a:p>
+        </p:txBody>
+      </p:sp>
+      <p:sp>
+        <p:nvSpPr>
+          <p:cNvPr id="22" name="Text 20"/>
+          <p:cNvSpPr/>
+          <p:nvPr/>
+        </p:nvSpPr>
+        <p:spPr>
+          <a:xfrm>
+            <a:off x="677098" y="5907484"/>
+            <a:ext cx="10834756" cy="12700"/>
+          </a:xfrm>
+          <a:prstGeom prst="rect">
+            <a:avLst/>
+          </a:prstGeom>
+          <a:solidFill>
+            <a:srgbClr val="DAD3C4"/>
+          </a:solidFill>
+          <a:ln/>
+        </p:spPr>
+        <p:txBody>
+          <a:bodyPr wrap="square" rtlCol="0" anchor="ctr"/>
+          <a:lstStyle/>
+          <a:p>
+            <a:pPr indent="0" marL="0">
+              <a:buNone/>
+            </a:pPr>
+            <a:endParaRPr lang="en-US" dirty="0"/>
+          </a:p>
+        </p:txBody>
+      </p:sp>
+      <p:sp>
+        <p:nvSpPr>
+          <p:cNvPr id="23" name="Text 21"/>
+          <p:cNvSpPr/>
+          <p:nvPr/>
+        </p:nvSpPr>
+        <p:spPr>
+          <a:xfrm>
+            <a:off x="677098" y="6055519"/>
+            <a:ext cx="767737" cy="260747"/>
+          </a:xfrm>
+          <a:prstGeom prst="rect">
+            <a:avLst/>
+          </a:prstGeom>
+          <a:noFill/>
+          <a:ln/>
+        </p:spPr>
+        <p:txBody>
+          <a:bodyPr wrap="square" lIns="0" tIns="0" rIns="0" bIns="0" rtlCol="0" anchor="t"/>
+          <a:lstStyle/>
+          <a:p>
+            <a:pPr algn="l" indent="0" marL="0">
+              <a:lnSpc>
+                <a:spcPts val="2053"/>
+              </a:lnSpc>
+              <a:buNone/>
+            </a:pPr>
+            <a:r>
+              <a:rPr lang="en-US" sz="1466" dirty="0">
+                <a:solidFill>
+                  <a:srgbClr val="7A7164"/>
+                </a:solidFill>
+                <a:latin typeface="Inter" pitchFamily="34" charset="0"/>
+                <a:ea typeface="Inter" pitchFamily="34" charset="-122"/>
+                <a:cs typeface="Inter" pitchFamily="34" charset="-120"/>
+              </a:rPr>
+              <a:t>06 / 06</a:t>
+            </a:r>
+            <a:endParaRPr lang="en-US" sz="1466" dirty="0"/>
+          </a:p>
+        </p:txBody>
+      </p:sp>
+      <p:sp>
+        <p:nvSpPr>
+          <p:cNvPr id="24" name="Text 22"/>
+          <p:cNvSpPr/>
+          <p:nvPr/>
+        </p:nvSpPr>
+        <p:spPr>
+          <a:xfrm>
+            <a:off x="4725655" y="6055519"/>
+            <a:ext cx="6786199" cy="260747"/>
+          </a:xfrm>
+          <a:prstGeom prst="rect">
+            <a:avLst/>
+          </a:prstGeom>
+          <a:noFill/>
+          <a:ln/>
+        </p:spPr>
+        <p:txBody>
+          <a:bodyPr wrap="square" lIns="0" tIns="0" rIns="0" bIns="0" rtlCol="0" anchor="t"/>
+          <a:lstStyle/>
+          <a:p>
+            <a:pPr algn="r" indent="0" marL="0">
+              <a:lnSpc>
+                <a:spcPts val="2053"/>
+              </a:lnSpc>
+              <a:buNone/>
+            </a:pPr>
+            <a:r>
+              <a:rPr lang="en-US" sz="1466" dirty="0">
+                <a:solidFill>
+                  <a:srgbClr val="7A7164"/>
+                </a:solidFill>
+                <a:latin typeface="Inter" pitchFamily="34" charset="0"/>
+                <a:ea typeface="Inter" pitchFamily="34" charset="-122"/>
+                <a:cs typeface="Inter" pitchFamily="34" charset="-120"/>
+              </a:rPr>
+              <a:t>Source: none — this deck cites no cost figures; the argument is structural.</a:t>
+            </a:r>
+            <a:endParaRPr lang="en-US" sz="1466" dirty="0"/>
+          </a:p>
+        </p:txBody>
+      </p:sp>
     </p:spTree>
   </p:cSld>
   <p:clrMapOvr>

--- a/decks/observability-cost/observability-cost.pptx
+++ b/decks/observability-cost/observability-cost.pptx
@@ -3275,7 +3275,7 @@
               <a:buChar char="•"/>
             </a:pPr>
             <a:r>
-              <a:rPr lang="en-US" sz="1866" b="1" dirty="0">
+              <a:rPr lang="en-US" sz="1866" dirty="0">
                 <a:solidFill>
                   <a:srgbClr val="B5503A"/>
                 </a:solidFill>
@@ -3313,7 +3313,7 @@
               <a:buChar char="•"/>
             </a:pPr>
             <a:r>
-              <a:rPr lang="en-US" sz="1866" b="1" dirty="0">
+              <a:rPr lang="en-US" sz="1866" dirty="0">
                 <a:solidFill>
                   <a:srgbClr val="B5503A"/>
                 </a:solidFill>
@@ -3351,6 +3351,107 @@
               <a:buChar char="•"/>
             </a:pPr>
             <a:r>
+              <a:rPr lang="en-US" sz="1866" dirty="0">
+                <a:solidFill>
+                  <a:srgbClr val="B5503A"/>
+                </a:solidFill>
+                <a:latin typeface="Inter" pitchFamily="34" charset="0"/>
+                <a:ea typeface="Inter" pitchFamily="34" charset="-122"/>
+                <a:cs typeface="Inter" pitchFamily="34" charset="-120"/>
+              </a:rPr>
+              <a:t>×</a:t>
+            </a:r>
+            <a:pPr algn="l" indent="0" marL="0">
+              <a:lnSpc>
+                <a:spcPts val="2800"/>
+              </a:lnSpc>
+              <a:buNone/>
+            </a:pPr>
+            <a:r>
+              <a:rPr lang="en-US" sz="1866" dirty="0">
+                <a:solidFill>
+                  <a:srgbClr val="1F1B16"/>
+                </a:solidFill>
+                <a:latin typeface="Inter" pitchFamily="34" charset="0"/>
+                <a:ea typeface="Inter" pitchFamily="34" charset="-122"/>
+                <a:cs typeface="Inter" pitchFamily="34" charset="-120"/>
+              </a:rPr>
+              <a:t>Days retained, indexed, replicated</a:t>
+            </a:r>
+            <a:endParaRPr lang="en-US" sz="1866" dirty="0"/>
+          </a:p>
+        </p:txBody>
+      </p:sp>
+      <p:sp>
+        <p:nvSpPr>
+          <p:cNvPr id="7" name="Text 5"/>
+          <p:cNvSpPr/>
+          <p:nvPr/>
+        </p:nvSpPr>
+        <p:spPr>
+          <a:xfrm>
+            <a:off x="1163545" y="2799953"/>
+            <a:ext cx="4602377" cy="355600"/>
+          </a:xfrm>
+          <a:prstGeom prst="rect">
+            <a:avLst/>
+          </a:prstGeom>
+          <a:noFill/>
+          <a:ln/>
+        </p:spPr>
+        <p:txBody>
+          <a:bodyPr wrap="square" lIns="0" tIns="0" rIns="0" bIns="0" rtlCol="0" anchor="t"/>
+          <a:lstStyle/>
+          <a:p>
+            <a:pPr algn="l" indent="0" marL="0">
+              <a:lnSpc>
+                <a:spcPts val="2800"/>
+              </a:lnSpc>
+              <a:buNone/>
+            </a:pPr>
+            <a:r>
+              <a:rPr lang="en-US" sz="1866" dirty="0">
+                <a:solidFill>
+                  <a:srgbClr val="1F1B16"/>
+                </a:solidFill>
+                <a:latin typeface="Inter" pitchFamily="34" charset="0"/>
+                <a:ea typeface="Inter" pitchFamily="34" charset="-122"/>
+                <a:cs typeface="Inter" pitchFamily="34" charset="-120"/>
+              </a:rPr>
+              <a:t>Requests per second</a:t>
+            </a:r>
+            <a:endParaRPr lang="en-US" sz="1866" dirty="0"/>
+          </a:p>
+        </p:txBody>
+      </p:sp>
+      <p:sp>
+        <p:nvSpPr>
+          <p:cNvPr id="8" name="Text 6"/>
+          <p:cNvSpPr/>
+          <p:nvPr/>
+        </p:nvSpPr>
+        <p:spPr>
+          <a:xfrm>
+            <a:off x="926670" y="3318073"/>
+            <a:ext cx="241613" cy="355600"/>
+          </a:xfrm>
+          <a:prstGeom prst="rect">
+            <a:avLst/>
+          </a:prstGeom>
+          <a:noFill/>
+          <a:ln/>
+        </p:spPr>
+        <p:txBody>
+          <a:bodyPr wrap="square" lIns="0" tIns="0" rIns="0" bIns="0" rtlCol="0" anchor="t"/>
+          <a:lstStyle/>
+          <a:p>
+            <a:pPr algn="l" indent="0" marL="0">
+              <a:lnSpc>
+                <a:spcPts val="2800"/>
+              </a:lnSpc>
+              <a:buNone/>
+            </a:pPr>
+            <a:r>
               <a:rPr lang="en-US" sz="1866" b="1" dirty="0">
                 <a:solidFill>
                   <a:srgbClr val="B5503A"/>
@@ -3361,6 +3462,31 @@
               </a:rPr>
               <a:t>×</a:t>
             </a:r>
+            <a:endParaRPr lang="en-US" sz="1866" dirty="0"/>
+          </a:p>
+        </p:txBody>
+      </p:sp>
+      <p:sp>
+        <p:nvSpPr>
+          <p:cNvPr id="9" name="Text 7"/>
+          <p:cNvSpPr/>
+          <p:nvPr/>
+        </p:nvSpPr>
+        <p:spPr>
+          <a:xfrm>
+            <a:off x="1163545" y="3318073"/>
+            <a:ext cx="4602377" cy="355600"/>
+          </a:xfrm>
+          <a:prstGeom prst="rect">
+            <a:avLst/>
+          </a:prstGeom>
+          <a:noFill/>
+          <a:ln/>
+        </p:spPr>
+        <p:txBody>
+          <a:bodyPr wrap="square" lIns="0" tIns="0" rIns="0" bIns="0" rtlCol="0" anchor="t"/>
+          <a:lstStyle/>
+          <a:p>
             <a:pPr algn="l" indent="0" marL="0">
               <a:lnSpc>
                 <a:spcPts val="2800"/>
@@ -3376,6 +3502,174 @@
                 <a:ea typeface="Inter" pitchFamily="34" charset="-122"/>
                 <a:cs typeface="Inter" pitchFamily="34" charset="-120"/>
               </a:rPr>
+              <a:t>Log lines emitted per request</a:t>
+            </a:r>
+            <a:endParaRPr lang="en-US" sz="1866" dirty="0"/>
+          </a:p>
+        </p:txBody>
+      </p:sp>
+      <p:sp>
+        <p:nvSpPr>
+          <p:cNvPr id="10" name="Text 8"/>
+          <p:cNvSpPr/>
+          <p:nvPr/>
+        </p:nvSpPr>
+        <p:spPr>
+          <a:xfrm>
+            <a:off x="926670" y="3836194"/>
+            <a:ext cx="241613" cy="355600"/>
+          </a:xfrm>
+          <a:prstGeom prst="rect">
+            <a:avLst/>
+          </a:prstGeom>
+          <a:noFill/>
+          <a:ln/>
+        </p:spPr>
+        <p:txBody>
+          <a:bodyPr wrap="square" lIns="0" tIns="0" rIns="0" bIns="0" rtlCol="0" anchor="t"/>
+          <a:lstStyle/>
+          <a:p>
+            <a:pPr algn="l" indent="0" marL="0">
+              <a:lnSpc>
+                <a:spcPts val="2800"/>
+              </a:lnSpc>
+              <a:buNone/>
+            </a:pPr>
+            <a:r>
+              <a:rPr lang="en-US" sz="1866" b="1" dirty="0">
+                <a:solidFill>
+                  <a:srgbClr val="B5503A"/>
+                </a:solidFill>
+                <a:latin typeface="Inter" pitchFamily="34" charset="0"/>
+                <a:ea typeface="Inter" pitchFamily="34" charset="-122"/>
+                <a:cs typeface="Inter" pitchFamily="34" charset="-120"/>
+              </a:rPr>
+              <a:t>×</a:t>
+            </a:r>
+            <a:endParaRPr lang="en-US" sz="1866" dirty="0"/>
+          </a:p>
+        </p:txBody>
+      </p:sp>
+      <p:sp>
+        <p:nvSpPr>
+          <p:cNvPr id="11" name="Text 9"/>
+          <p:cNvSpPr/>
+          <p:nvPr/>
+        </p:nvSpPr>
+        <p:spPr>
+          <a:xfrm>
+            <a:off x="1163545" y="3836194"/>
+            <a:ext cx="4602377" cy="355600"/>
+          </a:xfrm>
+          <a:prstGeom prst="rect">
+            <a:avLst/>
+          </a:prstGeom>
+          <a:noFill/>
+          <a:ln/>
+        </p:spPr>
+        <p:txBody>
+          <a:bodyPr wrap="square" lIns="0" tIns="0" rIns="0" bIns="0" rtlCol="0" anchor="t"/>
+          <a:lstStyle/>
+          <a:p>
+            <a:pPr algn="l" indent="0" marL="0">
+              <a:lnSpc>
+                <a:spcPts val="2800"/>
+              </a:lnSpc>
+              <a:buNone/>
+            </a:pPr>
+            <a:r>
+              <a:rPr lang="en-US" sz="1866" dirty="0">
+                <a:solidFill>
+                  <a:srgbClr val="1F1B16"/>
+                </a:solidFill>
+                <a:latin typeface="Inter" pitchFamily="34" charset="0"/>
+                <a:ea typeface="Inter" pitchFamily="34" charset="-122"/>
+                <a:cs typeface="Inter" pitchFamily="34" charset="-120"/>
+              </a:rPr>
+              <a:t>Replicas emitting the same line</a:t>
+            </a:r>
+            <a:endParaRPr lang="en-US" sz="1866" dirty="0"/>
+          </a:p>
+        </p:txBody>
+      </p:sp>
+      <p:sp>
+        <p:nvSpPr>
+          <p:cNvPr id="12" name="Text 10"/>
+          <p:cNvSpPr/>
+          <p:nvPr/>
+        </p:nvSpPr>
+        <p:spPr>
+          <a:xfrm>
+            <a:off x="926670" y="4354314"/>
+            <a:ext cx="241613" cy="355600"/>
+          </a:xfrm>
+          <a:prstGeom prst="rect">
+            <a:avLst/>
+          </a:prstGeom>
+          <a:noFill/>
+          <a:ln/>
+        </p:spPr>
+        <p:txBody>
+          <a:bodyPr wrap="square" lIns="0" tIns="0" rIns="0" bIns="0" rtlCol="0" anchor="t"/>
+          <a:lstStyle/>
+          <a:p>
+            <a:pPr algn="l" indent="0" marL="0">
+              <a:lnSpc>
+                <a:spcPts val="2800"/>
+              </a:lnSpc>
+              <a:buNone/>
+            </a:pPr>
+            <a:r>
+              <a:rPr lang="en-US" sz="1866" b="1" dirty="0">
+                <a:solidFill>
+                  <a:srgbClr val="B5503A"/>
+                </a:solidFill>
+                <a:latin typeface="Inter" pitchFamily="34" charset="0"/>
+                <a:ea typeface="Inter" pitchFamily="34" charset="-122"/>
+                <a:cs typeface="Inter" pitchFamily="34" charset="-120"/>
+              </a:rPr>
+              <a:t>×</a:t>
+            </a:r>
+            <a:endParaRPr lang="en-US" sz="1866" dirty="0"/>
+          </a:p>
+        </p:txBody>
+      </p:sp>
+      <p:sp>
+        <p:nvSpPr>
+          <p:cNvPr id="13" name="Text 11"/>
+          <p:cNvSpPr/>
+          <p:nvPr/>
+        </p:nvSpPr>
+        <p:spPr>
+          <a:xfrm>
+            <a:off x="1163545" y="4354314"/>
+            <a:ext cx="4602377" cy="355600"/>
+          </a:xfrm>
+          <a:prstGeom prst="rect">
+            <a:avLst/>
+          </a:prstGeom>
+          <a:noFill/>
+          <a:ln/>
+        </p:spPr>
+        <p:txBody>
+          <a:bodyPr wrap="square" lIns="0" tIns="0" rIns="0" bIns="0" rtlCol="0" anchor="t"/>
+          <a:lstStyle/>
+          <a:p>
+            <a:pPr algn="l" indent="0" marL="0">
+              <a:lnSpc>
+                <a:spcPts val="2800"/>
+              </a:lnSpc>
+              <a:buNone/>
+            </a:pPr>
+            <a:r>
+              <a:rPr lang="en-US" sz="1866" dirty="0">
+                <a:solidFill>
+                  <a:srgbClr val="1F1B16"/>
+                </a:solidFill>
+                <a:latin typeface="Inter" pitchFamily="34" charset="0"/>
+                <a:ea typeface="Inter" pitchFamily="34" charset="-122"/>
+                <a:cs typeface="Inter" pitchFamily="34" charset="-120"/>
+              </a:rPr>
               <a:t>Days retained, indexed, replicated</a:t>
             </a:r>
             <a:endParaRPr lang="en-US" sz="1866" dirty="0"/>
@@ -3384,7 +3678,7 @@
       </p:sp>
       <p:sp>
         <p:nvSpPr>
-          <p:cNvPr id="7" name="Text 5"/>
+          <p:cNvPr id="14" name="Text 12"/>
           <p:cNvSpPr/>
           <p:nvPr/>
         </p:nvSpPr>
@@ -3426,7 +3720,7 @@
       </p:sp>
       <p:sp>
         <p:nvSpPr>
-          <p:cNvPr id="8" name="Text 6"/>
+          <p:cNvPr id="15" name="Text 13"/>
           <p:cNvSpPr/>
           <p:nvPr/>
         </p:nvSpPr>
@@ -3532,7 +3826,175 @@
       </p:sp>
       <p:sp>
         <p:nvSpPr>
-          <p:cNvPr id="9" name="Text 7"/>
+          <p:cNvPr id="16" name="Text 14"/>
+          <p:cNvSpPr/>
+          <p:nvPr/>
+        </p:nvSpPr>
+        <p:spPr>
+          <a:xfrm>
+            <a:off x="6750148" y="2799953"/>
+            <a:ext cx="4602377" cy="355600"/>
+          </a:xfrm>
+          <a:prstGeom prst="rect">
+            <a:avLst/>
+          </a:prstGeom>
+          <a:noFill/>
+          <a:ln/>
+        </p:spPr>
+        <p:txBody>
+          <a:bodyPr wrap="square" lIns="0" tIns="0" rIns="0" bIns="0" rtlCol="0" anchor="t"/>
+          <a:lstStyle/>
+          <a:p>
+            <a:pPr algn="l" indent="0" marL="0">
+              <a:lnSpc>
+                <a:spcPts val="2800"/>
+              </a:lnSpc>
+              <a:buNone/>
+            </a:pPr>
+            <a:r>
+              <a:rPr lang="en-US" sz="1866" dirty="0">
+                <a:solidFill>
+                  <a:srgbClr val="1F1B16"/>
+                </a:solidFill>
+                <a:latin typeface="Inter" pitchFamily="34" charset="0"/>
+                <a:ea typeface="Inter" pitchFamily="34" charset="-122"/>
+                <a:cs typeface="Inter" pitchFamily="34" charset="-120"/>
+              </a:rPr>
+              <a:t>Incidents, one at a time</a:t>
+            </a:r>
+            <a:endParaRPr lang="en-US" sz="1866" dirty="0"/>
+          </a:p>
+        </p:txBody>
+      </p:sp>
+      <p:sp>
+        <p:nvSpPr>
+          <p:cNvPr id="17" name="Text 15"/>
+          <p:cNvSpPr/>
+          <p:nvPr/>
+        </p:nvSpPr>
+        <p:spPr>
+          <a:xfrm>
+            <a:off x="6750148" y="3318073"/>
+            <a:ext cx="4602377" cy="355600"/>
+          </a:xfrm>
+          <a:prstGeom prst="rect">
+            <a:avLst/>
+          </a:prstGeom>
+          <a:noFill/>
+          <a:ln/>
+        </p:spPr>
+        <p:txBody>
+          <a:bodyPr wrap="square" lIns="0" tIns="0" rIns="0" bIns="0" rtlCol="0" anchor="t"/>
+          <a:lstStyle/>
+          <a:p>
+            <a:pPr algn="l" indent="0" marL="0">
+              <a:lnSpc>
+                <a:spcPts val="2800"/>
+              </a:lnSpc>
+              <a:buNone/>
+            </a:pPr>
+            <a:r>
+              <a:rPr lang="en-US" sz="1866" dirty="0">
+                <a:solidFill>
+                  <a:srgbClr val="1F1B16"/>
+                </a:solidFill>
+                <a:latin typeface="Inter" pitchFamily="34" charset="0"/>
+                <a:ea typeface="Inter" pitchFamily="34" charset="-122"/>
+                <a:cs typeface="Inter" pitchFamily="34" charset="-120"/>
+              </a:rPr>
+              <a:t>Engineers who open logs at all</a:t>
+            </a:r>
+            <a:endParaRPr lang="en-US" sz="1866" dirty="0"/>
+          </a:p>
+        </p:txBody>
+      </p:sp>
+      <p:sp>
+        <p:nvSpPr>
+          <p:cNvPr id="18" name="Text 16"/>
+          <p:cNvSpPr/>
+          <p:nvPr/>
+        </p:nvSpPr>
+        <p:spPr>
+          <a:xfrm>
+            <a:off x="6750148" y="3836194"/>
+            <a:ext cx="4602377" cy="355600"/>
+          </a:xfrm>
+          <a:prstGeom prst="rect">
+            <a:avLst/>
+          </a:prstGeom>
+          <a:noFill/>
+          <a:ln/>
+        </p:spPr>
+        <p:txBody>
+          <a:bodyPr wrap="square" lIns="0" tIns="0" rIns="0" bIns="0" rtlCol="0" anchor="t"/>
+          <a:lstStyle/>
+          <a:p>
+            <a:pPr algn="l" indent="0" marL="0">
+              <a:lnSpc>
+                <a:spcPts val="2800"/>
+              </a:lnSpc>
+              <a:buNone/>
+            </a:pPr>
+            <a:r>
+              <a:rPr lang="en-US" sz="1866" dirty="0">
+                <a:solidFill>
+                  <a:srgbClr val="1F1B16"/>
+                </a:solidFill>
+                <a:latin typeface="Inter" pitchFamily="34" charset="0"/>
+                <a:ea typeface="Inter" pitchFamily="34" charset="-122"/>
+                <a:cs typeface="Inter" pitchFamily="34" charset="-120"/>
+              </a:rPr>
+              <a:t>The window they read: minutes</a:t>
+            </a:r>
+            <a:endParaRPr lang="en-US" sz="1866" dirty="0"/>
+          </a:p>
+        </p:txBody>
+      </p:sp>
+      <p:sp>
+        <p:nvSpPr>
+          <p:cNvPr id="19" name="Text 17"/>
+          <p:cNvSpPr/>
+          <p:nvPr/>
+        </p:nvSpPr>
+        <p:spPr>
+          <a:xfrm>
+            <a:off x="6750148" y="4354314"/>
+            <a:ext cx="4602377" cy="355600"/>
+          </a:xfrm>
+          <a:prstGeom prst="rect">
+            <a:avLst/>
+          </a:prstGeom>
+          <a:noFill/>
+          <a:ln/>
+        </p:spPr>
+        <p:txBody>
+          <a:bodyPr wrap="square" lIns="0" tIns="0" rIns="0" bIns="0" rtlCol="0" anchor="t"/>
+          <a:lstStyle/>
+          <a:p>
+            <a:pPr algn="l" indent="0" marL="0">
+              <a:lnSpc>
+                <a:spcPts val="2800"/>
+              </a:lnSpc>
+              <a:buNone/>
+            </a:pPr>
+            <a:r>
+              <a:rPr lang="en-US" sz="1866" dirty="0">
+                <a:solidFill>
+                  <a:srgbClr val="1F1B16"/>
+                </a:solidFill>
+                <a:latin typeface="Inter" pitchFamily="34" charset="0"/>
+                <a:ea typeface="Inter" pitchFamily="34" charset="-122"/>
+                <a:cs typeface="Inter" pitchFamily="34" charset="-120"/>
+              </a:rPr>
+              <a:t>The three queries they know</a:t>
+            </a:r>
+            <a:endParaRPr lang="en-US" sz="1866" dirty="0"/>
+          </a:p>
+        </p:txBody>
+      </p:sp>
+      <p:sp>
+        <p:nvSpPr>
+          <p:cNvPr id="20" name="Text 18"/>
           <p:cNvSpPr/>
           <p:nvPr/>
         </p:nvSpPr>
@@ -3642,7 +4104,7 @@
       </p:sp>
       <p:sp>
         <p:nvSpPr>
-          <p:cNvPr id="10" name="Text 8"/>
+          <p:cNvPr id="21" name="Text 19"/>
           <p:cNvSpPr/>
           <p:nvPr/>
         </p:nvSpPr>
@@ -3672,7 +4134,7 @@
       </p:sp>
       <p:sp>
         <p:nvSpPr>
-          <p:cNvPr id="11" name="Text 9"/>
+          <p:cNvPr id="22" name="Text 20"/>
           <p:cNvSpPr/>
           <p:nvPr/>
         </p:nvSpPr>
@@ -3714,7 +4176,7 @@
       </p:sp>
       <p:sp>
         <p:nvSpPr>
-          <p:cNvPr id="12" name="Text 10"/>
+          <p:cNvPr id="23" name="Text 21"/>
           <p:cNvSpPr/>
           <p:nvPr/>
         </p:nvSpPr>

--- a/decks/observability-cost/observability-cost.pptx
+++ b/decks/observability-cost/observability-cost.pptx
@@ -1338,7 +1338,7 @@
           <a:ln/>
         </p:spPr>
         <p:txBody>
-          <a:bodyPr wrap="square" lIns="0" tIns="0" rIns="0" bIns="0" rtlCol="0" anchor="t"/>
+          <a:bodyPr wrap="none" lIns="0" tIns="0" rIns="0" bIns="0" rtlCol="0" anchor="t"/>
           <a:lstStyle/>
           <a:p>
             <a:pPr algn="l" indent="0" marL="0">
@@ -1410,7 +1410,9 @@
           <a:ln/>
         </p:spPr>
         <p:txBody>
-          <a:bodyPr wrap="square" lIns="0" tIns="0" rIns="0" bIns="0" rtlCol="0" anchor="t"/>
+          <a:bodyPr wrap="square" lIns="0" tIns="0" rIns="0" bIns="0" rtlCol="0" anchor="t">
+            <a:normAutofit/>
+          </a:bodyPr>
           <a:lstStyle/>
           <a:p>
             <a:pPr algn="l" indent="0" marL="0">
@@ -1482,6 +1484,10 @@
             <a:prstDash val="solid"/>
           </a:ln>
         </p:spPr>
+        <p:txBody>
+          <a:bodyPr/>
+          <a:p/>
+        </p:txBody>
       </p:sp>
       <p:sp>
         <p:nvSpPr>
@@ -1501,7 +1507,9 @@
           <a:ln/>
         </p:spPr>
         <p:txBody>
-          <a:bodyPr wrap="square" lIns="0" tIns="0" rIns="0" bIns="0" rtlCol="0" anchor="t"/>
+          <a:bodyPr wrap="square" lIns="0" tIns="0" rIns="0" bIns="0" rtlCol="0" anchor="t">
+            <a:normAutofit/>
+          </a:bodyPr>
           <a:lstStyle/>
           <a:p>
             <a:pPr algn="l" indent="0" marL="0">
@@ -1539,7 +1547,7 @@
                 <a:ea typeface="Inter" pitchFamily="34" charset="-122"/>
                 <a:cs typeface="Inter" pitchFamily="34" charset="-120"/>
               </a:rPr>
-              <a:t>    curves. One line item hides all three.</a:t>
+              <a:t>curves. One line item hides all three.</a:t>
             </a:r>
             <a:endParaRPr lang="en-US" sz="2133" dirty="0"/>
           </a:p>
@@ -1563,7 +1571,7 @@
           <a:ln/>
         </p:spPr>
         <p:txBody>
-          <a:bodyPr wrap="square" lIns="0" tIns="0" rIns="0" bIns="0" rtlCol="0" anchor="t"/>
+          <a:bodyPr wrap="none" lIns="0" tIns="0" rIns="0" bIns="0" rtlCol="0" anchor="t"/>
           <a:lstStyle/>
           <a:p>
             <a:pPr algn="l" indent="0" marL="0">
@@ -1638,7 +1646,7 @@
           <a:ln/>
         </p:spPr>
         <p:txBody>
-          <a:bodyPr wrap="square" lIns="0" tIns="0" rIns="0" bIns="0" rtlCol="0" anchor="t"/>
+          <a:bodyPr wrap="none" lIns="0" tIns="0" rIns="0" bIns="0" rtlCol="0" anchor="t"/>
           <a:lstStyle/>
           <a:p>
             <a:pPr algn="l" indent="0" marL="0">
@@ -1680,7 +1688,7 @@
           <a:ln/>
         </p:spPr>
         <p:txBody>
-          <a:bodyPr wrap="square" lIns="0" tIns="0" rIns="0" bIns="0" rtlCol="0" anchor="t"/>
+          <a:bodyPr wrap="none" lIns="0" tIns="0" rIns="0" bIns="0" rtlCol="0" anchor="t"/>
           <a:lstStyle/>
           <a:p>
             <a:pPr algn="r" indent="0" marL="0">
@@ -1754,7 +1762,7 @@
           <a:ln/>
         </p:spPr>
         <p:txBody>
-          <a:bodyPr wrap="square" lIns="0" tIns="0" rIns="0" bIns="0" rtlCol="0" anchor="t"/>
+          <a:bodyPr wrap="none" lIns="0" tIns="0" rIns="0" bIns="0" rtlCol="0" anchor="t"/>
           <a:lstStyle/>
           <a:p>
             <a:pPr algn="l" indent="0" marL="0">
@@ -1826,7 +1834,7 @@
           <a:ln/>
         </p:spPr>
         <p:txBody>
-          <a:bodyPr wrap="square" lIns="0" tIns="0" rIns="0" bIns="0" rtlCol="0" anchor="t"/>
+          <a:bodyPr wrap="none" lIns="0" tIns="0" rIns="0" bIns="0" rtlCol="0" anchor="t"/>
           <a:lstStyle/>
           <a:p>
             <a:pPr algn="l" indent="0" marL="0">
@@ -1875,6 +1883,10 @@
             <a:prstDash val="solid"/>
           </a:ln>
         </p:spPr>
+        <p:txBody>
+          <a:bodyPr/>
+          <a:p/>
+        </p:txBody>
       </p:sp>
       <p:sp>
         <p:nvSpPr>
@@ -1898,6 +1910,10 @@
             <a:prstDash val="solid"/>
           </a:ln>
         </p:spPr>
+        <p:txBody>
+          <a:bodyPr/>
+          <a:p/>
+        </p:txBody>
       </p:sp>
       <p:sp>
         <p:nvSpPr>
@@ -1921,6 +1937,10 @@
             <a:prstDash val="solid"/>
           </a:ln>
         </p:spPr>
+        <p:txBody>
+          <a:bodyPr/>
+          <a:p/>
+        </p:txBody>
       </p:sp>
       <p:sp>
         <p:nvSpPr>
@@ -1940,7 +1960,7 @@
           <a:ln/>
         </p:spPr>
         <p:txBody>
-          <a:bodyPr wrap="square" lIns="0" tIns="0" rIns="0" bIns="0" rtlCol="0" anchor="t"/>
+          <a:bodyPr wrap="none" lIns="0" tIns="0" rIns="0" bIns="0" rtlCol="0" anchor="t"/>
           <a:lstStyle/>
           <a:p>
             <a:pPr algn="l" indent="0" marL="0">
@@ -1986,6 +2006,10 @@
             <a:prstDash val="solid"/>
           </a:ln>
         </p:spPr>
+        <p:txBody>
+          <a:bodyPr/>
+          <a:p/>
+        </p:txBody>
       </p:sp>
       <p:sp>
         <p:nvSpPr>
@@ -2009,6 +2033,10 @@
             <a:prstDash val="solid"/>
           </a:ln>
         </p:spPr>
+        <p:txBody>
+          <a:bodyPr/>
+          <a:p/>
+        </p:txBody>
       </p:sp>
       <p:sp>
         <p:nvSpPr>
@@ -2028,7 +2056,7 @@
           <a:ln/>
         </p:spPr>
         <p:txBody>
-          <a:bodyPr wrap="square" lIns="0" tIns="0" rIns="0" bIns="0" rtlCol="0" anchor="t"/>
+          <a:bodyPr wrap="none" lIns="0" tIns="0" rIns="0" bIns="0" rtlCol="0" anchor="t"/>
           <a:lstStyle/>
           <a:p>
             <a:pPr algn="l" indent="0" marL="0">
@@ -2074,6 +2102,10 @@
             <a:prstDash val="solid"/>
           </a:ln>
         </p:spPr>
+        <p:txBody>
+          <a:bodyPr/>
+          <a:p/>
+        </p:txBody>
       </p:sp>
       <p:sp>
         <p:nvSpPr>
@@ -2097,6 +2129,10 @@
             <a:prstDash val="solid"/>
           </a:ln>
         </p:spPr>
+        <p:txBody>
+          <a:bodyPr/>
+          <a:p/>
+        </p:txBody>
       </p:sp>
       <p:sp>
         <p:nvSpPr>
@@ -2116,7 +2152,7 @@
           <a:ln/>
         </p:spPr>
         <p:txBody>
-          <a:bodyPr wrap="square" lIns="0" tIns="0" rIns="0" bIns="0" rtlCol="0" anchor="t"/>
+          <a:bodyPr wrap="none" lIns="0" tIns="0" rIns="0" bIns="0" rtlCol="0" anchor="t"/>
           <a:lstStyle/>
           <a:p>
             <a:pPr algn="l" indent="0" marL="0">
@@ -2162,6 +2198,10 @@
             <a:prstDash val="solid"/>
           </a:ln>
         </p:spPr>
+        <p:txBody>
+          <a:bodyPr/>
+          <a:p/>
+        </p:txBody>
       </p:sp>
       <p:sp>
         <p:nvSpPr>
@@ -2181,7 +2221,7 @@
           <a:ln/>
         </p:spPr>
         <p:txBody>
-          <a:bodyPr wrap="square" lIns="0" tIns="0" rIns="0" bIns="0" rtlCol="0" anchor="t"/>
+          <a:bodyPr wrap="none" lIns="0" tIns="0" rIns="0" bIns="0" rtlCol="0" anchor="t"/>
           <a:lstStyle/>
           <a:p>
             <a:pPr algn="l" indent="0" marL="0">
@@ -2227,6 +2267,10 @@
             <a:prstDash val="solid"/>
           </a:ln>
         </p:spPr>
+        <p:txBody>
+          <a:bodyPr/>
+          <a:p/>
+        </p:txBody>
       </p:sp>
       <p:sp>
         <p:nvSpPr>
@@ -2246,7 +2290,9 @@
           <a:ln/>
         </p:spPr>
         <p:txBody>
-          <a:bodyPr wrap="square" lIns="0" tIns="0" rIns="0" bIns="0" rtlCol="0" anchor="t"/>
+          <a:bodyPr wrap="square" lIns="0" tIns="0" rIns="0" bIns="0" rtlCol="0" anchor="t">
+            <a:normAutofit/>
+          </a:bodyPr>
           <a:lstStyle/>
           <a:p>
             <a:pPr algn="l" indent="0" marL="0">
@@ -2292,6 +2338,10 @@
             <a:prstDash val="solid"/>
           </a:ln>
         </p:spPr>
+        <p:txBody>
+          <a:bodyPr/>
+          <a:p/>
+        </p:txBody>
       </p:sp>
       <p:sp>
         <p:nvSpPr>
@@ -2311,7 +2361,9 @@
           <a:ln/>
         </p:spPr>
         <p:txBody>
-          <a:bodyPr wrap="square" lIns="0" tIns="0" rIns="0" bIns="0" rtlCol="0" anchor="t"/>
+          <a:bodyPr wrap="square" lIns="0" tIns="0" rIns="0" bIns="0" rtlCol="0" anchor="t">
+            <a:normAutofit/>
+          </a:bodyPr>
           <a:lstStyle/>
           <a:p>
             <a:pPr algn="l" indent="0" marL="0">
@@ -2357,6 +2409,10 @@
             <a:prstDash val="solid"/>
           </a:ln>
         </p:spPr>
+        <p:txBody>
+          <a:bodyPr/>
+          <a:p/>
+        </p:txBody>
       </p:sp>
       <p:sp>
         <p:nvSpPr>
@@ -2376,7 +2432,9 @@
           <a:ln/>
         </p:spPr>
         <p:txBody>
-          <a:bodyPr wrap="square" lIns="0" tIns="0" rIns="0" bIns="0" rtlCol="0" anchor="t"/>
+          <a:bodyPr wrap="square" lIns="0" tIns="0" rIns="0" bIns="0" rtlCol="0" anchor="t">
+            <a:normAutofit/>
+          </a:bodyPr>
           <a:lstStyle/>
           <a:p>
             <a:pPr algn="l" indent="0" marL="0">
@@ -2422,6 +2480,10 @@
             <a:prstDash val="solid"/>
           </a:ln>
         </p:spPr>
+        <p:txBody>
+          <a:bodyPr/>
+          <a:p/>
+        </p:txBody>
       </p:sp>
       <p:sp>
         <p:nvSpPr>
@@ -2441,7 +2503,7 @@
           <a:ln/>
         </p:spPr>
         <p:txBody>
-          <a:bodyPr wrap="square" lIns="0" tIns="0" rIns="0" bIns="0" rtlCol="0" anchor="t"/>
+          <a:bodyPr wrap="none" lIns="0" tIns="0" rIns="0" bIns="0" rtlCol="0" anchor="t"/>
           <a:lstStyle/>
           <a:p>
             <a:pPr algn="l" indent="0" marL="0">
@@ -2487,6 +2549,10 @@
             <a:prstDash val="solid"/>
           </a:ln>
         </p:spPr>
+        <p:txBody>
+          <a:bodyPr/>
+          <a:p/>
+        </p:txBody>
       </p:sp>
       <p:sp>
         <p:nvSpPr>
@@ -2506,7 +2572,9 @@
           <a:ln/>
         </p:spPr>
         <p:txBody>
-          <a:bodyPr wrap="square" lIns="0" tIns="0" rIns="0" bIns="0" rtlCol="0" anchor="t"/>
+          <a:bodyPr wrap="square" lIns="0" tIns="0" rIns="0" bIns="0" rtlCol="0" anchor="t">
+            <a:normAutofit/>
+          </a:bodyPr>
           <a:lstStyle/>
           <a:p>
             <a:pPr algn="l" indent="0" marL="0">
@@ -2552,6 +2620,10 @@
             <a:prstDash val="solid"/>
           </a:ln>
         </p:spPr>
+        <p:txBody>
+          <a:bodyPr/>
+          <a:p/>
+        </p:txBody>
       </p:sp>
       <p:sp>
         <p:nvSpPr>
@@ -2571,7 +2643,7 @@
           <a:ln/>
         </p:spPr>
         <p:txBody>
-          <a:bodyPr wrap="square" lIns="0" tIns="0" rIns="0" bIns="0" rtlCol="0" anchor="t"/>
+          <a:bodyPr wrap="none" lIns="0" tIns="0" rIns="0" bIns="0" rtlCol="0" anchor="t"/>
           <a:lstStyle/>
           <a:p>
             <a:pPr algn="l" indent="0" marL="0">
@@ -2617,6 +2689,10 @@
             <a:prstDash val="solid"/>
           </a:ln>
         </p:spPr>
+        <p:txBody>
+          <a:bodyPr/>
+          <a:p/>
+        </p:txBody>
       </p:sp>
       <p:sp>
         <p:nvSpPr>
@@ -2636,7 +2712,9 @@
           <a:ln/>
         </p:spPr>
         <p:txBody>
-          <a:bodyPr wrap="square" lIns="0" tIns="0" rIns="0" bIns="0" rtlCol="0" anchor="t"/>
+          <a:bodyPr wrap="square" lIns="0" tIns="0" rIns="0" bIns="0" rtlCol="0" anchor="t">
+            <a:normAutofit/>
+          </a:bodyPr>
           <a:lstStyle/>
           <a:p>
             <a:pPr algn="l" indent="0" marL="0">
@@ -2682,6 +2760,10 @@
             <a:prstDash val="solid"/>
           </a:ln>
         </p:spPr>
+        <p:txBody>
+          <a:bodyPr/>
+          <a:p/>
+        </p:txBody>
       </p:sp>
       <p:sp>
         <p:nvSpPr>
@@ -2701,7 +2783,7 @@
           <a:ln/>
         </p:spPr>
         <p:txBody>
-          <a:bodyPr wrap="square" lIns="0" tIns="0" rIns="0" bIns="0" rtlCol="0" anchor="t"/>
+          <a:bodyPr wrap="none" lIns="0" tIns="0" rIns="0" bIns="0" rtlCol="0" anchor="t"/>
           <a:lstStyle/>
           <a:p>
             <a:pPr algn="l" indent="0" marL="0">
@@ -2747,6 +2829,10 @@
             <a:prstDash val="solid"/>
           </a:ln>
         </p:spPr>
+        <p:txBody>
+          <a:bodyPr/>
+          <a:p/>
+        </p:txBody>
       </p:sp>
       <p:sp>
         <p:nvSpPr>
@@ -2766,7 +2852,9 @@
           <a:ln/>
         </p:spPr>
         <p:txBody>
-          <a:bodyPr wrap="square" lIns="0" tIns="0" rIns="0" bIns="0" rtlCol="0" anchor="t"/>
+          <a:bodyPr wrap="square" lIns="0" tIns="0" rIns="0" bIns="0" rtlCol="0" anchor="t">
+            <a:normAutofit/>
+          </a:bodyPr>
           <a:lstStyle/>
           <a:p>
             <a:pPr algn="l" indent="0" marL="0">
@@ -2812,6 +2900,10 @@
             <a:prstDash val="solid"/>
           </a:ln>
         </p:spPr>
+        <p:txBody>
+          <a:bodyPr/>
+          <a:p/>
+        </p:txBody>
       </p:sp>
       <p:sp>
         <p:nvSpPr>
@@ -2831,7 +2923,9 @@
           <a:ln/>
         </p:spPr>
         <p:txBody>
-          <a:bodyPr wrap="square" lIns="0" tIns="0" rIns="0" bIns="0" rtlCol="0" anchor="t"/>
+          <a:bodyPr wrap="square" lIns="0" tIns="0" rIns="0" bIns="0" rtlCol="0" anchor="t">
+            <a:normAutofit/>
+          </a:bodyPr>
           <a:lstStyle/>
           <a:p>
             <a:pPr algn="l" indent="0" marL="0">
@@ -2877,6 +2971,10 @@
             <a:prstDash val="solid"/>
           </a:ln>
         </p:spPr>
+        <p:txBody>
+          <a:bodyPr/>
+          <a:p/>
+        </p:txBody>
       </p:sp>
       <p:sp>
         <p:nvSpPr>
@@ -2896,7 +2994,9 @@
           <a:ln/>
         </p:spPr>
         <p:txBody>
-          <a:bodyPr wrap="square" lIns="0" tIns="0" rIns="0" bIns="0" rtlCol="0" anchor="t"/>
+          <a:bodyPr wrap="square" lIns="0" tIns="0" rIns="0" bIns="0" rtlCol="0" anchor="t">
+            <a:normAutofit/>
+          </a:bodyPr>
           <a:lstStyle/>
           <a:p>
             <a:pPr algn="l" indent="0" marL="0">
@@ -2968,7 +3068,7 @@
           <a:ln/>
         </p:spPr>
         <p:txBody>
-          <a:bodyPr wrap="square" lIns="0" tIns="0" rIns="0" bIns="0" rtlCol="0" anchor="t"/>
+          <a:bodyPr wrap="none" lIns="0" tIns="0" rIns="0" bIns="0" rtlCol="0" anchor="t"/>
           <a:lstStyle/>
           <a:p>
             <a:pPr algn="l" indent="0" marL="0">
@@ -3010,7 +3110,7 @@
           <a:ln/>
         </p:spPr>
         <p:txBody>
-          <a:bodyPr wrap="square" lIns="0" tIns="0" rIns="0" bIns="0" rtlCol="0" anchor="t"/>
+          <a:bodyPr wrap="none" lIns="0" tIns="0" rIns="0" bIns="0" rtlCol="0" anchor="t"/>
           <a:lstStyle/>
           <a:p>
             <a:pPr algn="r" indent="0" marL="0">
@@ -3084,7 +3184,7 @@
           <a:ln/>
         </p:spPr>
         <p:txBody>
-          <a:bodyPr wrap="square" lIns="0" tIns="0" rIns="0" bIns="0" rtlCol="0" anchor="t"/>
+          <a:bodyPr wrap="none" lIns="0" tIns="0" rIns="0" bIns="0" rtlCol="0" anchor="t"/>
           <a:lstStyle/>
           <a:p>
             <a:pPr algn="l" indent="0" marL="0">
@@ -3156,7 +3256,7 @@
           <a:ln/>
         </p:spPr>
         <p:txBody>
-          <a:bodyPr wrap="square" lIns="0" tIns="0" rIns="0" bIns="0" rtlCol="0" anchor="t"/>
+          <a:bodyPr wrap="none" lIns="0" tIns="0" rIns="0" bIns="0" rtlCol="0" anchor="t"/>
           <a:lstStyle/>
           <a:p>
             <a:pPr algn="l" indent="0" marL="0">
@@ -3233,163 +3333,6 @@
         </p:nvSpPr>
         <p:spPr>
           <a:xfrm>
-            <a:off x="926670" y="2799953"/>
-            <a:ext cx="4749009" cy="1909961"/>
-          </a:xfrm>
-          <a:prstGeom prst="rect">
-            <a:avLst/>
-          </a:prstGeom>
-          <a:noFill/>
-          <a:ln/>
-        </p:spPr>
-        <p:txBody>
-          <a:bodyPr wrap="square" lIns="0" tIns="0" rIns="0" bIns="0" rtlCol="0" anchor="t"/>
-          <a:lstStyle/>
-          <a:p>
-            <a:pPr algn="l" marL="342900" indent="-342900">
-              <a:lnSpc>
-                <a:spcPts val="2800"/>
-              </a:lnSpc>
-              <a:buSzPct val="100000"/>
-              <a:buChar char="•"/>
-            </a:pPr>
-            <a:r>
-              <a:rPr lang="en-US" sz="1866" dirty="0">
-                <a:solidFill>
-                  <a:srgbClr val="1F1B16"/>
-                </a:solidFill>
-                <a:latin typeface="Inter" pitchFamily="34" charset="0"/>
-                <a:ea typeface="Inter" pitchFamily="34" charset="-122"/>
-                <a:cs typeface="Inter" pitchFamily="34" charset="-120"/>
-              </a:rPr>
-              <a:t>Requests per second</a:t>
-            </a:r>
-            <a:endParaRPr lang="en-US" sz="1866" dirty="0"/>
-          </a:p>
-          <a:p>
-            <a:pPr algn="l" marL="342900" indent="-342900">
-              <a:lnSpc>
-                <a:spcPts val="2800"/>
-              </a:lnSpc>
-              <a:buSzPct val="100000"/>
-              <a:buChar char="•"/>
-            </a:pPr>
-            <a:r>
-              <a:rPr lang="en-US" sz="1866" dirty="0">
-                <a:solidFill>
-                  <a:srgbClr val="B5503A"/>
-                </a:solidFill>
-                <a:latin typeface="Inter" pitchFamily="34" charset="0"/>
-                <a:ea typeface="Inter" pitchFamily="34" charset="-122"/>
-                <a:cs typeface="Inter" pitchFamily="34" charset="-120"/>
-              </a:rPr>
-              <a:t>×</a:t>
-            </a:r>
-            <a:pPr algn="l" indent="0" marL="0">
-              <a:lnSpc>
-                <a:spcPts val="2800"/>
-              </a:lnSpc>
-              <a:buNone/>
-            </a:pPr>
-            <a:r>
-              <a:rPr lang="en-US" sz="1866" dirty="0">
-                <a:solidFill>
-                  <a:srgbClr val="1F1B16"/>
-                </a:solidFill>
-                <a:latin typeface="Inter" pitchFamily="34" charset="0"/>
-                <a:ea typeface="Inter" pitchFamily="34" charset="-122"/>
-                <a:cs typeface="Inter" pitchFamily="34" charset="-120"/>
-              </a:rPr>
-              <a:t>Log lines emitted per request</a:t>
-            </a:r>
-            <a:endParaRPr lang="en-US" sz="1866" dirty="0"/>
-          </a:p>
-          <a:p>
-            <a:pPr algn="l" marL="342900" indent="-342900">
-              <a:lnSpc>
-                <a:spcPts val="2800"/>
-              </a:lnSpc>
-              <a:buSzPct val="100000"/>
-              <a:buChar char="•"/>
-            </a:pPr>
-            <a:r>
-              <a:rPr lang="en-US" sz="1866" dirty="0">
-                <a:solidFill>
-                  <a:srgbClr val="B5503A"/>
-                </a:solidFill>
-                <a:latin typeface="Inter" pitchFamily="34" charset="0"/>
-                <a:ea typeface="Inter" pitchFamily="34" charset="-122"/>
-                <a:cs typeface="Inter" pitchFamily="34" charset="-120"/>
-              </a:rPr>
-              <a:t>×</a:t>
-            </a:r>
-            <a:pPr algn="l" indent="0" marL="0">
-              <a:lnSpc>
-                <a:spcPts val="2800"/>
-              </a:lnSpc>
-              <a:buNone/>
-            </a:pPr>
-            <a:r>
-              <a:rPr lang="en-US" sz="1866" dirty="0">
-                <a:solidFill>
-                  <a:srgbClr val="1F1B16"/>
-                </a:solidFill>
-                <a:latin typeface="Inter" pitchFamily="34" charset="0"/>
-                <a:ea typeface="Inter" pitchFamily="34" charset="-122"/>
-                <a:cs typeface="Inter" pitchFamily="34" charset="-120"/>
-              </a:rPr>
-              <a:t>Replicas emitting the same line</a:t>
-            </a:r>
-            <a:endParaRPr lang="en-US" sz="1866" dirty="0"/>
-          </a:p>
-          <a:p>
-            <a:pPr algn="l" marL="342900" indent="-342900">
-              <a:lnSpc>
-                <a:spcPts val="2800"/>
-              </a:lnSpc>
-              <a:buSzPct val="100000"/>
-              <a:buChar char="•"/>
-            </a:pPr>
-            <a:r>
-              <a:rPr lang="en-US" sz="1866" dirty="0">
-                <a:solidFill>
-                  <a:srgbClr val="B5503A"/>
-                </a:solidFill>
-                <a:latin typeface="Inter" pitchFamily="34" charset="0"/>
-                <a:ea typeface="Inter" pitchFamily="34" charset="-122"/>
-                <a:cs typeface="Inter" pitchFamily="34" charset="-120"/>
-              </a:rPr>
-              <a:t>×</a:t>
-            </a:r>
-            <a:pPr algn="l" indent="0" marL="0">
-              <a:lnSpc>
-                <a:spcPts val="2800"/>
-              </a:lnSpc>
-              <a:buNone/>
-            </a:pPr>
-            <a:r>
-              <a:rPr lang="en-US" sz="1866" dirty="0">
-                <a:solidFill>
-                  <a:srgbClr val="1F1B16"/>
-                </a:solidFill>
-                <a:latin typeface="Inter" pitchFamily="34" charset="0"/>
-                <a:ea typeface="Inter" pitchFamily="34" charset="-122"/>
-                <a:cs typeface="Inter" pitchFamily="34" charset="-120"/>
-              </a:rPr>
-              <a:t>Days retained, indexed, replicated</a:t>
-            </a:r>
-            <a:endParaRPr lang="en-US" sz="1866" dirty="0"/>
-          </a:p>
-        </p:txBody>
-      </p:sp>
-      <p:sp>
-        <p:nvSpPr>
-          <p:cNvPr id="7" name="Text 5"/>
-          <p:cNvSpPr/>
-          <p:nvPr/>
-        </p:nvSpPr>
-        <p:spPr>
-          <a:xfrm>
             <a:off x="1163545" y="2799953"/>
             <a:ext cx="4602377" cy="355600"/>
           </a:xfrm>
@@ -3400,7 +3343,7 @@
           <a:ln/>
         </p:spPr>
         <p:txBody>
-          <a:bodyPr wrap="square" lIns="0" tIns="0" rIns="0" bIns="0" rtlCol="0" anchor="t"/>
+          <a:bodyPr wrap="none" lIns="0" tIns="0" rIns="0" bIns="0" rtlCol="0" anchor="t"/>
           <a:lstStyle/>
           <a:p>
             <a:pPr algn="l" indent="0" marL="0">
@@ -3426,7 +3369,7 @@
       </p:sp>
       <p:sp>
         <p:nvSpPr>
-          <p:cNvPr id="8" name="Text 6"/>
+          <p:cNvPr id="7" name="Text 5"/>
           <p:cNvSpPr/>
           <p:nvPr/>
         </p:nvSpPr>
@@ -3442,7 +3385,7 @@
           <a:ln/>
         </p:spPr>
         <p:txBody>
-          <a:bodyPr wrap="square" lIns="0" tIns="0" rIns="0" bIns="0" rtlCol="0" anchor="t"/>
+          <a:bodyPr wrap="none" lIns="0" tIns="0" rIns="0" bIns="0" rtlCol="0" anchor="t"/>
           <a:lstStyle/>
           <a:p>
             <a:pPr algn="l" indent="0" marL="0">
@@ -3468,7 +3411,7 @@
       </p:sp>
       <p:sp>
         <p:nvSpPr>
-          <p:cNvPr id="9" name="Text 7"/>
+          <p:cNvPr id="8" name="Text 6"/>
           <p:cNvSpPr/>
           <p:nvPr/>
         </p:nvSpPr>
@@ -3484,7 +3427,7 @@
           <a:ln/>
         </p:spPr>
         <p:txBody>
-          <a:bodyPr wrap="square" lIns="0" tIns="0" rIns="0" bIns="0" rtlCol="0" anchor="t"/>
+          <a:bodyPr wrap="none" lIns="0" tIns="0" rIns="0" bIns="0" rtlCol="0" anchor="t"/>
           <a:lstStyle/>
           <a:p>
             <a:pPr algn="l" indent="0" marL="0">
@@ -3510,7 +3453,7 @@
       </p:sp>
       <p:sp>
         <p:nvSpPr>
-          <p:cNvPr id="10" name="Text 8"/>
+          <p:cNvPr id="9" name="Text 7"/>
           <p:cNvSpPr/>
           <p:nvPr/>
         </p:nvSpPr>
@@ -3526,7 +3469,7 @@
           <a:ln/>
         </p:spPr>
         <p:txBody>
-          <a:bodyPr wrap="square" lIns="0" tIns="0" rIns="0" bIns="0" rtlCol="0" anchor="t"/>
+          <a:bodyPr wrap="none" lIns="0" tIns="0" rIns="0" bIns="0" rtlCol="0" anchor="t"/>
           <a:lstStyle/>
           <a:p>
             <a:pPr algn="l" indent="0" marL="0">
@@ -3552,7 +3495,7 @@
       </p:sp>
       <p:sp>
         <p:nvSpPr>
-          <p:cNvPr id="11" name="Text 9"/>
+          <p:cNvPr id="10" name="Text 8"/>
           <p:cNvSpPr/>
           <p:nvPr/>
         </p:nvSpPr>
@@ -3568,7 +3511,7 @@
           <a:ln/>
         </p:spPr>
         <p:txBody>
-          <a:bodyPr wrap="square" lIns="0" tIns="0" rIns="0" bIns="0" rtlCol="0" anchor="t"/>
+          <a:bodyPr wrap="none" lIns="0" tIns="0" rIns="0" bIns="0" rtlCol="0" anchor="t"/>
           <a:lstStyle/>
           <a:p>
             <a:pPr algn="l" indent="0" marL="0">
@@ -3594,7 +3537,7 @@
       </p:sp>
       <p:sp>
         <p:nvSpPr>
-          <p:cNvPr id="12" name="Text 10"/>
+          <p:cNvPr id="11" name="Text 9"/>
           <p:cNvSpPr/>
           <p:nvPr/>
         </p:nvSpPr>
@@ -3610,7 +3553,7 @@
           <a:ln/>
         </p:spPr>
         <p:txBody>
-          <a:bodyPr wrap="square" lIns="0" tIns="0" rIns="0" bIns="0" rtlCol="0" anchor="t"/>
+          <a:bodyPr wrap="none" lIns="0" tIns="0" rIns="0" bIns="0" rtlCol="0" anchor="t"/>
           <a:lstStyle/>
           <a:p>
             <a:pPr algn="l" indent="0" marL="0">
@@ -3636,7 +3579,7 @@
       </p:sp>
       <p:sp>
         <p:nvSpPr>
-          <p:cNvPr id="13" name="Text 11"/>
+          <p:cNvPr id="12" name="Text 10"/>
           <p:cNvSpPr/>
           <p:nvPr/>
         </p:nvSpPr>
@@ -3652,7 +3595,7 @@
           <a:ln/>
         </p:spPr>
         <p:txBody>
-          <a:bodyPr wrap="square" lIns="0" tIns="0" rIns="0" bIns="0" rtlCol="0" anchor="t"/>
+          <a:bodyPr wrap="none" lIns="0" tIns="0" rIns="0" bIns="0" rtlCol="0" anchor="t"/>
           <a:lstStyle/>
           <a:p>
             <a:pPr algn="l" indent="0" marL="0">
@@ -3678,7 +3621,7 @@
       </p:sp>
       <p:sp>
         <p:nvSpPr>
-          <p:cNvPr id="14" name="Text 12"/>
+          <p:cNvPr id="13" name="Text 11"/>
           <p:cNvSpPr/>
           <p:nvPr/>
         </p:nvSpPr>
@@ -3720,113 +3663,7 @@
       </p:sp>
       <p:sp>
         <p:nvSpPr>
-          <p:cNvPr id="15" name="Text 13"/>
-          <p:cNvSpPr/>
-          <p:nvPr/>
-        </p:nvSpPr>
-        <p:spPr>
-          <a:xfrm>
-            <a:off x="6513273" y="2799953"/>
-            <a:ext cx="4749009" cy="1909961"/>
-          </a:xfrm>
-          <a:prstGeom prst="rect">
-            <a:avLst/>
-          </a:prstGeom>
-          <a:noFill/>
-          <a:ln/>
-        </p:spPr>
-        <p:txBody>
-          <a:bodyPr wrap="square" lIns="0" tIns="0" rIns="0" bIns="0" rtlCol="0" anchor="t"/>
-          <a:lstStyle/>
-          <a:p>
-            <a:pPr algn="l" marL="342900" indent="-342900">
-              <a:lnSpc>
-                <a:spcPts val="2800"/>
-              </a:lnSpc>
-              <a:buSzPct val="100000"/>
-              <a:buChar char="•"/>
-            </a:pPr>
-            <a:r>
-              <a:rPr lang="en-US" sz="1866" dirty="0">
-                <a:solidFill>
-                  <a:srgbClr val="1F1B16"/>
-                </a:solidFill>
-                <a:latin typeface="Inter" pitchFamily="34" charset="0"/>
-                <a:ea typeface="Inter" pitchFamily="34" charset="-122"/>
-                <a:cs typeface="Inter" pitchFamily="34" charset="-120"/>
-              </a:rPr>
-              <a:t>Incidents, one at a time</a:t>
-            </a:r>
-            <a:endParaRPr lang="en-US" sz="1866" dirty="0"/>
-          </a:p>
-          <a:p>
-            <a:pPr algn="l" marL="342900" indent="-342900">
-              <a:lnSpc>
-                <a:spcPts val="2800"/>
-              </a:lnSpc>
-              <a:buSzPct val="100000"/>
-              <a:buChar char="•"/>
-            </a:pPr>
-            <a:r>
-              <a:rPr lang="en-US" sz="1866" dirty="0">
-                <a:solidFill>
-                  <a:srgbClr val="1F1B16"/>
-                </a:solidFill>
-                <a:latin typeface="Inter" pitchFamily="34" charset="0"/>
-                <a:ea typeface="Inter" pitchFamily="34" charset="-122"/>
-                <a:cs typeface="Inter" pitchFamily="34" charset="-120"/>
-              </a:rPr>
-              <a:t>Engineers who open logs at all</a:t>
-            </a:r>
-            <a:endParaRPr lang="en-US" sz="1866" dirty="0"/>
-          </a:p>
-          <a:p>
-            <a:pPr algn="l" marL="342900" indent="-342900">
-              <a:lnSpc>
-                <a:spcPts val="2800"/>
-              </a:lnSpc>
-              <a:buSzPct val="100000"/>
-              <a:buChar char="•"/>
-            </a:pPr>
-            <a:r>
-              <a:rPr lang="en-US" sz="1866" dirty="0">
-                <a:solidFill>
-                  <a:srgbClr val="1F1B16"/>
-                </a:solidFill>
-                <a:latin typeface="Inter" pitchFamily="34" charset="0"/>
-                <a:ea typeface="Inter" pitchFamily="34" charset="-122"/>
-                <a:cs typeface="Inter" pitchFamily="34" charset="-120"/>
-              </a:rPr>
-              <a:t>The window they read: minutes</a:t>
-            </a:r>
-            <a:endParaRPr lang="en-US" sz="1866" dirty="0"/>
-          </a:p>
-          <a:p>
-            <a:pPr algn="l" marL="342900" indent="-342900">
-              <a:lnSpc>
-                <a:spcPts val="2800"/>
-              </a:lnSpc>
-              <a:buSzPct val="100000"/>
-              <a:buChar char="•"/>
-            </a:pPr>
-            <a:r>
-              <a:rPr lang="en-US" sz="1866" dirty="0">
-                <a:solidFill>
-                  <a:srgbClr val="1F1B16"/>
-                </a:solidFill>
-                <a:latin typeface="Inter" pitchFamily="34" charset="0"/>
-                <a:ea typeface="Inter" pitchFamily="34" charset="-122"/>
-                <a:cs typeface="Inter" pitchFamily="34" charset="-120"/>
-              </a:rPr>
-              <a:t>The three queries they know</a:t>
-            </a:r>
-            <a:endParaRPr lang="en-US" sz="1866" dirty="0"/>
-          </a:p>
-        </p:txBody>
-      </p:sp>
-      <p:sp>
-        <p:nvSpPr>
-          <p:cNvPr id="16" name="Text 14"/>
+          <p:cNvPr id="14" name="Text 12"/>
           <p:cNvSpPr/>
           <p:nvPr/>
         </p:nvSpPr>
@@ -3842,7 +3679,7 @@
           <a:ln/>
         </p:spPr>
         <p:txBody>
-          <a:bodyPr wrap="square" lIns="0" tIns="0" rIns="0" bIns="0" rtlCol="0" anchor="t"/>
+          <a:bodyPr wrap="none" lIns="0" tIns="0" rIns="0" bIns="0" rtlCol="0" anchor="t"/>
           <a:lstStyle/>
           <a:p>
             <a:pPr algn="l" indent="0" marL="0">
@@ -3868,7 +3705,7 @@
       </p:sp>
       <p:sp>
         <p:nvSpPr>
-          <p:cNvPr id="17" name="Text 15"/>
+          <p:cNvPr id="15" name="Text 13"/>
           <p:cNvSpPr/>
           <p:nvPr/>
         </p:nvSpPr>
@@ -3884,7 +3721,7 @@
           <a:ln/>
         </p:spPr>
         <p:txBody>
-          <a:bodyPr wrap="square" lIns="0" tIns="0" rIns="0" bIns="0" rtlCol="0" anchor="t"/>
+          <a:bodyPr wrap="none" lIns="0" tIns="0" rIns="0" bIns="0" rtlCol="0" anchor="t"/>
           <a:lstStyle/>
           <a:p>
             <a:pPr algn="l" indent="0" marL="0">
@@ -3910,7 +3747,7 @@
       </p:sp>
       <p:sp>
         <p:nvSpPr>
-          <p:cNvPr id="18" name="Text 16"/>
+          <p:cNvPr id="16" name="Text 14"/>
           <p:cNvSpPr/>
           <p:nvPr/>
         </p:nvSpPr>
@@ -3926,7 +3763,7 @@
           <a:ln/>
         </p:spPr>
         <p:txBody>
-          <a:bodyPr wrap="square" lIns="0" tIns="0" rIns="0" bIns="0" rtlCol="0" anchor="t"/>
+          <a:bodyPr wrap="none" lIns="0" tIns="0" rIns="0" bIns="0" rtlCol="0" anchor="t"/>
           <a:lstStyle/>
           <a:p>
             <a:pPr algn="l" indent="0" marL="0">
@@ -3952,7 +3789,7 @@
       </p:sp>
       <p:sp>
         <p:nvSpPr>
-          <p:cNvPr id="19" name="Text 17"/>
+          <p:cNvPr id="17" name="Text 15"/>
           <p:cNvSpPr/>
           <p:nvPr/>
         </p:nvSpPr>
@@ -3968,7 +3805,7 @@
           <a:ln/>
         </p:spPr>
         <p:txBody>
-          <a:bodyPr wrap="square" lIns="0" tIns="0" rIns="0" bIns="0" rtlCol="0" anchor="t"/>
+          <a:bodyPr wrap="none" lIns="0" tIns="0" rIns="0" bIns="0" rtlCol="0" anchor="t"/>
           <a:lstStyle/>
           <a:p>
             <a:pPr algn="l" indent="0" marL="0">
@@ -3994,7 +3831,7 @@
       </p:sp>
       <p:sp>
         <p:nvSpPr>
-          <p:cNvPr id="20" name="Text 18"/>
+          <p:cNvPr id="18" name="Text 16"/>
           <p:cNvSpPr/>
           <p:nvPr/>
         </p:nvSpPr>
@@ -4010,7 +3847,7 @@
           <a:ln/>
         </p:spPr>
         <p:txBody>
-          <a:bodyPr wrap="square" lIns="0" tIns="0" rIns="0" bIns="0" rtlCol="0" anchor="t"/>
+          <a:bodyPr wrap="none" lIns="0" tIns="0" rIns="0" bIns="0" rtlCol="0" anchor="t"/>
           <a:lstStyle/>
           <a:p>
             <a:pPr algn="l" indent="0" marL="0">
@@ -4104,7 +3941,7 @@
       </p:sp>
       <p:sp>
         <p:nvSpPr>
-          <p:cNvPr id="21" name="Text 19"/>
+          <p:cNvPr id="19" name="Text 17"/>
           <p:cNvSpPr/>
           <p:nvPr/>
         </p:nvSpPr>
@@ -4134,7 +3971,7 @@
       </p:sp>
       <p:sp>
         <p:nvSpPr>
-          <p:cNvPr id="22" name="Text 20"/>
+          <p:cNvPr id="20" name="Text 18"/>
           <p:cNvSpPr/>
           <p:nvPr/>
         </p:nvSpPr>
@@ -4150,7 +3987,7 @@
           <a:ln/>
         </p:spPr>
         <p:txBody>
-          <a:bodyPr wrap="square" lIns="0" tIns="0" rIns="0" bIns="0" rtlCol="0" anchor="t"/>
+          <a:bodyPr wrap="none" lIns="0" tIns="0" rIns="0" bIns="0" rtlCol="0" anchor="t"/>
           <a:lstStyle/>
           <a:p>
             <a:pPr algn="l" indent="0" marL="0">
@@ -4176,7 +4013,7 @@
       </p:sp>
       <p:sp>
         <p:nvSpPr>
-          <p:cNvPr id="23" name="Text 21"/>
+          <p:cNvPr id="21" name="Text 19"/>
           <p:cNvSpPr/>
           <p:nvPr/>
         </p:nvSpPr>
@@ -4192,7 +4029,7 @@
           <a:ln/>
         </p:spPr>
         <p:txBody>
-          <a:bodyPr wrap="square" lIns="0" tIns="0" rIns="0" bIns="0" rtlCol="0" anchor="t"/>
+          <a:bodyPr wrap="none" lIns="0" tIns="0" rIns="0" bIns="0" rtlCol="0" anchor="t"/>
           <a:lstStyle/>
           <a:p>
             <a:pPr algn="r" indent="0" marL="0">
@@ -4266,7 +4103,7 @@
           <a:ln/>
         </p:spPr>
         <p:txBody>
-          <a:bodyPr wrap="square" lIns="0" tIns="0" rIns="0" bIns="0" rtlCol="0" anchor="t"/>
+          <a:bodyPr wrap="none" lIns="0" tIns="0" rIns="0" bIns="0" rtlCol="0" anchor="t"/>
           <a:lstStyle/>
           <a:p>
             <a:pPr algn="l" indent="0" marL="0">
@@ -4338,7 +4175,7 @@
           <a:ln/>
         </p:spPr>
         <p:txBody>
-          <a:bodyPr wrap="square" lIns="0" tIns="0" rIns="0" bIns="0" rtlCol="0" anchor="t"/>
+          <a:bodyPr wrap="none" lIns="0" tIns="0" rIns="0" bIns="0" rtlCol="0" anchor="t"/>
           <a:lstStyle/>
           <a:p>
             <a:pPr algn="l" indent="0" marL="0">
@@ -4387,6 +4224,10 @@
             <a:prstDash val="solid"/>
           </a:ln>
         </p:spPr>
+        <p:txBody>
+          <a:bodyPr/>
+          <a:p/>
+        </p:txBody>
       </p:sp>
       <p:sp>
         <p:nvSpPr>
@@ -4406,7 +4247,7 @@
           <a:ln/>
         </p:spPr>
         <p:txBody>
-          <a:bodyPr wrap="square" lIns="0" tIns="0" rIns="0" bIns="0" rtlCol="0" anchor="t"/>
+          <a:bodyPr wrap="none" lIns="0" tIns="0" rIns="0" bIns="0" rtlCol="0" anchor="t"/>
           <a:lstStyle/>
           <a:p>
             <a:pPr algn="l" indent="0" marL="0">
@@ -4452,6 +4293,10 @@
             <a:prstDash val="solid"/>
           </a:ln>
         </p:spPr>
+        <p:txBody>
+          <a:bodyPr/>
+          <a:p/>
+        </p:txBody>
       </p:sp>
       <p:sp>
         <p:nvSpPr>
@@ -4471,7 +4316,7 @@
           <a:ln/>
         </p:spPr>
         <p:txBody>
-          <a:bodyPr wrap="square" lIns="0" tIns="0" rIns="0" bIns="0" rtlCol="0" anchor="t"/>
+          <a:bodyPr wrap="none" lIns="0" tIns="0" rIns="0" bIns="0" rtlCol="0" anchor="t"/>
           <a:lstStyle/>
           <a:p>
             <a:pPr algn="l" indent="0" marL="0">
@@ -4517,6 +4362,10 @@
             <a:prstDash val="solid"/>
           </a:ln>
         </p:spPr>
+        <p:txBody>
+          <a:bodyPr/>
+          <a:p/>
+        </p:txBody>
       </p:sp>
       <p:sp>
         <p:nvSpPr>
@@ -4536,7 +4385,7 @@
           <a:ln/>
         </p:spPr>
         <p:txBody>
-          <a:bodyPr wrap="square" lIns="0" tIns="0" rIns="0" bIns="0" rtlCol="0" anchor="t"/>
+          <a:bodyPr wrap="none" lIns="0" tIns="0" rIns="0" bIns="0" rtlCol="0" anchor="t"/>
           <a:lstStyle/>
           <a:p>
             <a:pPr algn="l" indent="0" marL="0">
@@ -4582,6 +4431,10 @@
             <a:prstDash val="solid"/>
           </a:ln>
         </p:spPr>
+        <p:txBody>
+          <a:bodyPr/>
+          <a:p/>
+        </p:txBody>
       </p:sp>
       <p:sp>
         <p:nvSpPr>
@@ -4601,7 +4454,7 @@
           <a:ln/>
         </p:spPr>
         <p:txBody>
-          <a:bodyPr wrap="square" lIns="0" tIns="0" rIns="0" bIns="0" rtlCol="0" anchor="t"/>
+          <a:bodyPr wrap="none" lIns="0" tIns="0" rIns="0" bIns="0" rtlCol="0" anchor="t"/>
           <a:lstStyle/>
           <a:p>
             <a:pPr algn="l" indent="0" marL="0">
@@ -4647,6 +4500,10 @@
             <a:prstDash val="solid"/>
           </a:ln>
         </p:spPr>
+        <p:txBody>
+          <a:bodyPr/>
+          <a:p/>
+        </p:txBody>
       </p:sp>
       <p:sp>
         <p:nvSpPr>
@@ -4666,7 +4523,7 @@
           <a:ln/>
         </p:spPr>
         <p:txBody>
-          <a:bodyPr wrap="square" lIns="0" tIns="0" rIns="0" bIns="0" rtlCol="0" anchor="t"/>
+          <a:bodyPr wrap="none" lIns="0" tIns="0" rIns="0" bIns="0" rtlCol="0" anchor="t"/>
           <a:lstStyle/>
           <a:p>
             <a:pPr algn="l" indent="0" marL="0">
@@ -4712,6 +4569,10 @@
             <a:prstDash val="solid"/>
           </a:ln>
         </p:spPr>
+        <p:txBody>
+          <a:bodyPr/>
+          <a:p/>
+        </p:txBody>
       </p:sp>
       <p:sp>
         <p:nvSpPr>
@@ -4731,7 +4592,7 @@
           <a:ln/>
         </p:spPr>
         <p:txBody>
-          <a:bodyPr wrap="square" lIns="0" tIns="0" rIns="0" bIns="0" rtlCol="0" anchor="t"/>
+          <a:bodyPr wrap="none" lIns="0" tIns="0" rIns="0" bIns="0" rtlCol="0" anchor="t"/>
           <a:lstStyle/>
           <a:p>
             <a:pPr algn="l" indent="0" marL="0">
@@ -4807,6 +4668,10 @@
             <a:prstDash val="solid"/>
           </a:ln>
         </p:spPr>
+        <p:txBody>
+          <a:bodyPr/>
+          <a:p/>
+        </p:txBody>
       </p:sp>
       <p:sp>
         <p:nvSpPr>
@@ -4826,7 +4691,7 @@
           <a:ln/>
         </p:spPr>
         <p:txBody>
-          <a:bodyPr wrap="square" lIns="0" tIns="0" rIns="0" bIns="0" rtlCol="0" anchor="t"/>
+          <a:bodyPr wrap="none" lIns="0" tIns="0" rIns="0" bIns="0" rtlCol="0" anchor="t"/>
           <a:lstStyle/>
           <a:p>
             <a:pPr algn="l" indent="0" marL="0">
@@ -4872,6 +4737,10 @@
             <a:prstDash val="solid"/>
           </a:ln>
         </p:spPr>
+        <p:txBody>
+          <a:bodyPr/>
+          <a:p/>
+        </p:txBody>
       </p:sp>
       <p:sp>
         <p:nvSpPr>
@@ -4891,7 +4760,7 @@
           <a:ln/>
         </p:spPr>
         <p:txBody>
-          <a:bodyPr wrap="square" lIns="0" tIns="0" rIns="0" bIns="0" rtlCol="0" anchor="t"/>
+          <a:bodyPr wrap="none" lIns="0" tIns="0" rIns="0" bIns="0" rtlCol="0" anchor="t"/>
           <a:lstStyle/>
           <a:p>
             <a:pPr algn="l" indent="0" marL="0">
@@ -4937,6 +4806,10 @@
             <a:prstDash val="solid"/>
           </a:ln>
         </p:spPr>
+        <p:txBody>
+          <a:bodyPr/>
+          <a:p/>
+        </p:txBody>
       </p:sp>
       <p:sp>
         <p:nvSpPr>
@@ -4956,7 +4829,7 @@
           <a:ln/>
         </p:spPr>
         <p:txBody>
-          <a:bodyPr wrap="square" lIns="0" tIns="0" rIns="0" bIns="0" rtlCol="0" anchor="t"/>
+          <a:bodyPr wrap="none" lIns="0" tIns="0" rIns="0" bIns="0" rtlCol="0" anchor="t"/>
           <a:lstStyle/>
           <a:p>
             <a:pPr algn="l" indent="0" marL="0">
@@ -5002,6 +4875,10 @@
             <a:prstDash val="solid"/>
           </a:ln>
         </p:spPr>
+        <p:txBody>
+          <a:bodyPr/>
+          <a:p/>
+        </p:txBody>
       </p:sp>
       <p:sp>
         <p:nvSpPr>
@@ -5021,7 +4898,9 @@
           <a:ln/>
         </p:spPr>
         <p:txBody>
-          <a:bodyPr wrap="square" lIns="0" tIns="0" rIns="0" bIns="0" rtlCol="0" anchor="t"/>
+          <a:bodyPr wrap="square" lIns="0" tIns="0" rIns="0" bIns="0" rtlCol="0" anchor="t">
+            <a:normAutofit/>
+          </a:bodyPr>
           <a:lstStyle/>
           <a:p>
             <a:pPr algn="l" indent="0" marL="0">
@@ -5059,7 +4938,7 @@
                 <a:ea typeface="Inter" pitchFamily="34" charset="-122"/>
                 <a:cs typeface="Inter" pitchFamily="34" charset="-120"/>
               </a:rPr>
-              <a:t>    Nobody called it a bet when it was placed.</a:t>
+              <a:t>Nobody called it a bet when it was placed.</a:t>
             </a:r>
             <a:endParaRPr lang="en-US" sz="2133" dirty="0"/>
           </a:p>
@@ -5113,7 +4992,7 @@
           <a:ln/>
         </p:spPr>
         <p:txBody>
-          <a:bodyPr wrap="square" lIns="0" tIns="0" rIns="0" bIns="0" rtlCol="0" anchor="t"/>
+          <a:bodyPr wrap="none" lIns="0" tIns="0" rIns="0" bIns="0" rtlCol="0" anchor="t"/>
           <a:lstStyle/>
           <a:p>
             <a:pPr algn="l" indent="0" marL="0">
@@ -5155,7 +5034,7 @@
           <a:ln/>
         </p:spPr>
         <p:txBody>
-          <a:bodyPr wrap="square" lIns="0" tIns="0" rIns="0" bIns="0" rtlCol="0" anchor="t"/>
+          <a:bodyPr wrap="none" lIns="0" tIns="0" rIns="0" bIns="0" rtlCol="0" anchor="t"/>
           <a:lstStyle/>
           <a:p>
             <a:pPr algn="r" indent="0" marL="0">
@@ -5229,7 +5108,7 @@
           <a:ln/>
         </p:spPr>
         <p:txBody>
-          <a:bodyPr wrap="square" lIns="0" tIns="0" rIns="0" bIns="0" rtlCol="0" anchor="t"/>
+          <a:bodyPr wrap="none" lIns="0" tIns="0" rIns="0" bIns="0" rtlCol="0" anchor="t"/>
           <a:lstStyle/>
           <a:p>
             <a:pPr algn="l" indent="0" marL="0">
@@ -5301,7 +5180,7 @@
           <a:ln/>
         </p:spPr>
         <p:txBody>
-          <a:bodyPr wrap="square" lIns="0" tIns="0" rIns="0" bIns="0" rtlCol="0" anchor="t"/>
+          <a:bodyPr wrap="none" lIns="0" tIns="0" rIns="0" bIns="0" rtlCol="0" anchor="t"/>
           <a:lstStyle/>
           <a:p>
             <a:pPr algn="l" indent="0" marL="0">
@@ -5382,7 +5261,7 @@
           <a:ln/>
         </p:spPr>
         <p:txBody>
-          <a:bodyPr wrap="square" lIns="0" tIns="0" rIns="0" bIns="0" rtlCol="0" anchor="t"/>
+          <a:bodyPr wrap="none" lIns="0" tIns="0" rIns="0" bIns="0" rtlCol="0" anchor="t"/>
           <a:lstStyle/>
           <a:p>
             <a:pPr algn="l" indent="0" marL="0">
@@ -5424,7 +5303,7 @@
           <a:ln/>
         </p:spPr>
         <p:txBody>
-          <a:bodyPr wrap="square" lIns="0" tIns="0" rIns="0" bIns="0" rtlCol="0" anchor="t"/>
+          <a:bodyPr wrap="none" lIns="0" tIns="0" rIns="0" bIns="0" rtlCol="0" anchor="t"/>
           <a:lstStyle/>
           <a:p>
             <a:pPr algn="l" indent="0" marL="0">
@@ -5508,7 +5387,9 @@
           <a:ln/>
         </p:spPr>
         <p:txBody>
-          <a:bodyPr wrap="square" lIns="0" tIns="0" rIns="0" bIns="0" rtlCol="0" anchor="t"/>
+          <a:bodyPr wrap="square" lIns="0" tIns="0" rIns="0" bIns="0" rtlCol="0" anchor="t">
+            <a:normAutofit/>
+          </a:bodyPr>
           <a:lstStyle/>
           <a:p>
             <a:pPr algn="l" indent="0" marL="0">
@@ -5592,7 +5473,9 @@
           <a:ln/>
         </p:spPr>
         <p:txBody>
-          <a:bodyPr wrap="square" lIns="0" tIns="0" rIns="0" bIns="0" rtlCol="0" anchor="t"/>
+          <a:bodyPr wrap="square" lIns="0" tIns="0" rIns="0" bIns="0" rtlCol="0" anchor="t">
+            <a:normAutofit/>
+          </a:bodyPr>
           <a:lstStyle/>
           <a:p>
             <a:pPr algn="l" indent="0" marL="0">
@@ -5676,7 +5559,9 @@
           <a:ln/>
         </p:spPr>
         <p:txBody>
-          <a:bodyPr wrap="square" lIns="0" tIns="0" rIns="0" bIns="0" rtlCol="0" anchor="t"/>
+          <a:bodyPr wrap="square" lIns="0" tIns="0" rIns="0" bIns="0" rtlCol="0" anchor="t">
+            <a:normAutofit/>
+          </a:bodyPr>
           <a:lstStyle/>
           <a:p>
             <a:pPr algn="l" indent="0" marL="0">
@@ -5718,7 +5603,7 @@
           <a:ln/>
         </p:spPr>
         <p:txBody>
-          <a:bodyPr wrap="square" lIns="0" tIns="0" rIns="0" bIns="0" rtlCol="0" anchor="t"/>
+          <a:bodyPr wrap="none" lIns="0" tIns="0" rIns="0" bIns="0" rtlCol="0" anchor="t"/>
           <a:lstStyle/>
           <a:p>
             <a:pPr algn="l" indent="0" marL="0">
@@ -5790,7 +5675,7 @@
           <a:ln/>
         </p:spPr>
         <p:txBody>
-          <a:bodyPr wrap="square" lIns="0" tIns="0" rIns="0" bIns="0" rtlCol="0" anchor="t"/>
+          <a:bodyPr wrap="none" lIns="0" tIns="0" rIns="0" bIns="0" rtlCol="0" anchor="t"/>
           <a:lstStyle/>
           <a:p>
             <a:pPr algn="l" indent="0" marL="0">
@@ -5832,7 +5717,7 @@
           <a:ln/>
         </p:spPr>
         <p:txBody>
-          <a:bodyPr wrap="square" lIns="0" tIns="0" rIns="0" bIns="0" rtlCol="0" anchor="t"/>
+          <a:bodyPr wrap="none" lIns="0" tIns="0" rIns="0" bIns="0" rtlCol="0" anchor="t"/>
           <a:lstStyle/>
           <a:p>
             <a:pPr algn="r" indent="0" marL="0">
@@ -5906,7 +5791,7 @@
           <a:ln/>
         </p:spPr>
         <p:txBody>
-          <a:bodyPr wrap="square" lIns="0" tIns="0" rIns="0" bIns="0" rtlCol="0" anchor="t"/>
+          <a:bodyPr wrap="none" lIns="0" tIns="0" rIns="0" bIns="0" rtlCol="0" anchor="t"/>
           <a:lstStyle/>
           <a:p>
             <a:pPr algn="l" indent="0" marL="0">
@@ -5978,7 +5863,9 @@
           <a:ln/>
         </p:spPr>
         <p:txBody>
-          <a:bodyPr wrap="square" lIns="0" tIns="0" rIns="0" bIns="0" rtlCol="0" anchor="t"/>
+          <a:bodyPr wrap="square" lIns="0" tIns="0" rIns="0" bIns="0" rtlCol="0" anchor="t">
+            <a:normAutofit/>
+          </a:bodyPr>
           <a:lstStyle/>
           <a:p>
             <a:pPr algn="l" indent="0" marL="0">
@@ -6060,7 +5947,9 @@
           <a:ln/>
         </p:spPr>
         <p:txBody>
-          <a:bodyPr wrap="square" lIns="0" tIns="0" rIns="0" bIns="0" rtlCol="0" anchor="t"/>
+          <a:bodyPr wrap="square" lIns="0" tIns="0" rIns="0" bIns="0" rtlCol="0" anchor="t">
+            <a:normAutofit/>
+          </a:bodyPr>
           <a:lstStyle/>
           <a:p>
             <a:pPr algn="l" indent="0" marL="0">
@@ -6139,7 +6028,7 @@
           <a:ln/>
         </p:spPr>
         <p:txBody>
-          <a:bodyPr wrap="square" lIns="0" tIns="0" rIns="0" bIns="0" rtlCol="0" anchor="t"/>
+          <a:bodyPr wrap="none" lIns="0" tIns="0" rIns="0" bIns="0" rtlCol="0" anchor="t"/>
           <a:lstStyle/>
           <a:p>
             <a:pPr algn="l" indent="0" marL="0">
@@ -6181,7 +6070,7 @@
           <a:ln/>
         </p:spPr>
         <p:txBody>
-          <a:bodyPr wrap="square" lIns="0" tIns="0" rIns="0" bIns="0" rtlCol="0" anchor="t"/>
+          <a:bodyPr wrap="none" lIns="0" tIns="0" rIns="0" bIns="0" rtlCol="0" anchor="t"/>
           <a:lstStyle/>
           <a:p>
             <a:pPr algn="l" indent="0" marL="0">
@@ -6226,7 +6115,7 @@
           <a:ln/>
         </p:spPr>
         <p:txBody>
-          <a:bodyPr wrap="square" lIns="0" tIns="0" rIns="0" bIns="0" rtlCol="0" anchor="t"/>
+          <a:bodyPr wrap="none" lIns="0" tIns="0" rIns="0" bIns="0" rtlCol="0" anchor="t"/>
           <a:lstStyle/>
           <a:p>
             <a:pPr algn="l" indent="0" marL="0">
@@ -6332,7 +6221,7 @@
           <a:ln/>
         </p:spPr>
         <p:txBody>
-          <a:bodyPr wrap="square" lIns="0" tIns="0" rIns="0" bIns="0" rtlCol="0" anchor="t"/>
+          <a:bodyPr wrap="none" lIns="0" tIns="0" rIns="0" bIns="0" rtlCol="0" anchor="t"/>
           <a:lstStyle/>
           <a:p>
             <a:pPr algn="l" indent="0" marL="0">
@@ -6374,7 +6263,7 @@
           <a:ln/>
         </p:spPr>
         <p:txBody>
-          <a:bodyPr wrap="square" lIns="0" tIns="0" rIns="0" bIns="0" rtlCol="0" anchor="t"/>
+          <a:bodyPr wrap="none" lIns="0" tIns="0" rIns="0" bIns="0" rtlCol="0" anchor="t"/>
           <a:lstStyle/>
           <a:p>
             <a:pPr algn="l" indent="0" marL="0">
@@ -6419,7 +6308,7 @@
           <a:ln/>
         </p:spPr>
         <p:txBody>
-          <a:bodyPr wrap="square" lIns="0" tIns="0" rIns="0" bIns="0" rtlCol="0" anchor="t"/>
+          <a:bodyPr wrap="none" lIns="0" tIns="0" rIns="0" bIns="0" rtlCol="0" anchor="t"/>
           <a:lstStyle/>
           <a:p>
             <a:pPr algn="l" indent="0" marL="0">
@@ -6525,7 +6414,7 @@
           <a:ln/>
         </p:spPr>
         <p:txBody>
-          <a:bodyPr wrap="square" lIns="0" tIns="0" rIns="0" bIns="0" rtlCol="0" anchor="t"/>
+          <a:bodyPr wrap="none" lIns="0" tIns="0" rIns="0" bIns="0" rtlCol="0" anchor="t"/>
           <a:lstStyle/>
           <a:p>
             <a:pPr algn="l" indent="0" marL="0">
@@ -6567,7 +6456,7 @@
           <a:ln/>
         </p:spPr>
         <p:txBody>
-          <a:bodyPr wrap="square" lIns="0" tIns="0" rIns="0" bIns="0" rtlCol="0" anchor="t"/>
+          <a:bodyPr wrap="none" lIns="0" tIns="0" rIns="0" bIns="0" rtlCol="0" anchor="t"/>
           <a:lstStyle/>
           <a:p>
             <a:pPr algn="l" indent="0" marL="0">
@@ -6612,7 +6501,7 @@
           <a:ln/>
         </p:spPr>
         <p:txBody>
-          <a:bodyPr wrap="square" lIns="0" tIns="0" rIns="0" bIns="0" rtlCol="0" anchor="t"/>
+          <a:bodyPr wrap="none" lIns="0" tIns="0" rIns="0" bIns="0" rtlCol="0" anchor="t"/>
           <a:lstStyle/>
           <a:p>
             <a:pPr algn="l" indent="0" marL="0">
@@ -6658,6 +6547,10 @@
             <a:prstDash val="solid"/>
           </a:ln>
         </p:spPr>
+        <p:txBody>
+          <a:bodyPr/>
+          <a:p/>
+        </p:txBody>
       </p:sp>
       <p:sp>
         <p:nvSpPr>
@@ -6677,7 +6570,7 @@
           <a:ln/>
         </p:spPr>
         <p:txBody>
-          <a:bodyPr wrap="square" lIns="0" tIns="0" rIns="0" bIns="0" rtlCol="0" anchor="t"/>
+          <a:bodyPr wrap="none" lIns="0" tIns="0" rIns="0" bIns="0" rtlCol="0" anchor="t"/>
           <a:lstStyle/>
           <a:p>
             <a:pPr algn="l" indent="0" marL="0">
@@ -6749,7 +6642,7 @@
           <a:ln/>
         </p:spPr>
         <p:txBody>
-          <a:bodyPr wrap="square" lIns="0" tIns="0" rIns="0" bIns="0" rtlCol="0" anchor="t"/>
+          <a:bodyPr wrap="none" lIns="0" tIns="0" rIns="0" bIns="0" rtlCol="0" anchor="t"/>
           <a:lstStyle/>
           <a:p>
             <a:pPr algn="l" indent="0" marL="0">
@@ -6791,7 +6684,7 @@
           <a:ln/>
         </p:spPr>
         <p:txBody>
-          <a:bodyPr wrap="square" lIns="0" tIns="0" rIns="0" bIns="0" rtlCol="0" anchor="t"/>
+          <a:bodyPr wrap="none" lIns="0" tIns="0" rIns="0" bIns="0" rtlCol="0" anchor="t"/>
           <a:lstStyle/>
           <a:p>
             <a:pPr algn="r" indent="0" marL="0">

--- a/decks/observability-cost/observability-cost.pptx
+++ b/decks/observability-cost/observability-cost.pptx
@@ -1410,9 +1410,7 @@
           <a:ln/>
         </p:spPr>
         <p:txBody>
-          <a:bodyPr wrap="square" lIns="0" tIns="0" rIns="0" bIns="0" rtlCol="0" anchor="t">
-            <a:normAutofit/>
-          </a:bodyPr>
+          <a:bodyPr wrap="none" lIns="0" tIns="0" rIns="0" bIns="0" rtlCol="0" anchor="t"/>
           <a:lstStyle/>
           <a:p>
             <a:pPr algn="l" indent="0" marL="0">
@@ -1507,188 +1505,188 @@
           <a:ln/>
         </p:spPr>
         <p:txBody>
+          <a:bodyPr wrap="none" lIns="0" tIns="0" rIns="0" bIns="0" rtlCol="0" anchor="t"/>
+          <a:lstStyle/>
+          <a:p>
+            <a:pPr algn="l" indent="0" marL="0">
+              <a:lnSpc>
+                <a:spcPts val="3200"/>
+              </a:lnSpc>
+              <a:buNone/>
+            </a:pPr>
+            <a:r>
+              <a:rPr lang="en-US" sz="2133" dirty="0">
+                <a:solidFill>
+                  <a:srgbClr val="1F1B16"/>
+                </a:solidFill>
+                <a:latin typeface="Inter" pitchFamily="34" charset="0"/>
+                <a:ea typeface="Inter" pitchFamily="34" charset="-122"/>
+                <a:cs typeface="Inter" pitchFamily="34" charset="-120"/>
+              </a:rPr>
+              <a:t>Metrics, logs and traces answer different questions and have different cost</a:t>
+            </a:r>
+            <a:endParaRPr lang="en-US" sz="2133" dirty="0"/>
+          </a:p>
+          <a:p>
+            <a:pPr algn="l" indent="0" marL="0">
+              <a:lnSpc>
+                <a:spcPts val="3200"/>
+              </a:lnSpc>
+              <a:buNone/>
+            </a:pPr>
+            <a:r>
+              <a:rPr lang="en-US" sz="2133" dirty="0">
+                <a:solidFill>
+                  <a:srgbClr val="1F1B16"/>
+                </a:solidFill>
+                <a:latin typeface="Inter" pitchFamily="34" charset="0"/>
+                <a:ea typeface="Inter" pitchFamily="34" charset="-122"/>
+                <a:cs typeface="Inter" pitchFamily="34" charset="-120"/>
+              </a:rPr>
+              <a:t>curves. One line item hides all three.</a:t>
+            </a:r>
+            <a:endParaRPr lang="en-US" sz="2133" dirty="0"/>
+          </a:p>
+        </p:txBody>
+      </p:sp>
+      <p:sp>
+        <p:nvSpPr>
+          <p:cNvPr id="7" name="Text 5"/>
+          <p:cNvSpPr/>
+          <p:nvPr/>
+        </p:nvSpPr>
+        <p:spPr>
+          <a:xfrm>
+            <a:off x="677098" y="5375870"/>
+            <a:ext cx="11051451" cy="260747"/>
+          </a:xfrm>
+          <a:prstGeom prst="rect">
+            <a:avLst/>
+          </a:prstGeom>
+          <a:noFill/>
+          <a:ln/>
+        </p:spPr>
+        <p:txBody>
+          <a:bodyPr wrap="none" lIns="0" tIns="0" rIns="0" bIns="0" rtlCol="0" anchor="t"/>
+          <a:lstStyle/>
+          <a:p>
+            <a:pPr algn="l" indent="0" marL="0">
+              <a:lnSpc>
+                <a:spcPts val="2053"/>
+              </a:lnSpc>
+              <a:spcBef>
+                <a:spcPts val="2690"/>
+              </a:spcBef>
+              <a:buNone/>
+            </a:pPr>
+            <a:r>
+              <a:rPr lang="en-US" sz="1466" dirty="0">
+                <a:solidFill>
+                  <a:srgbClr val="7A7164"/>
+                </a:solidFill>
+                <a:latin typeface="Inter" pitchFamily="34" charset="0"/>
+                <a:ea typeface="Inter" pitchFamily="34" charset="-122"/>
+                <a:cs typeface="Inter" pitchFamily="34" charset="-120"/>
+              </a:rPr>
+              <a:t>PRESENTER · TEAM</a:t>
+            </a:r>
+            <a:endParaRPr lang="en-US" sz="1466" dirty="0"/>
+          </a:p>
+        </p:txBody>
+      </p:sp>
+      <p:sp>
+        <p:nvSpPr>
+          <p:cNvPr id="8" name="Text 6"/>
+          <p:cNvSpPr/>
+          <p:nvPr/>
+        </p:nvSpPr>
+        <p:spPr>
+          <a:xfrm>
+            <a:off x="677098" y="5907484"/>
+            <a:ext cx="10834756" cy="12700"/>
+          </a:xfrm>
+          <a:prstGeom prst="rect">
+            <a:avLst/>
+          </a:prstGeom>
+          <a:solidFill>
+            <a:srgbClr val="DAD3C4"/>
+          </a:solidFill>
+          <a:ln/>
+        </p:spPr>
+        <p:txBody>
+          <a:bodyPr wrap="square" rtlCol="0" anchor="ctr"/>
+          <a:lstStyle/>
+          <a:p>
+            <a:pPr indent="0" marL="0">
+              <a:buNone/>
+            </a:pPr>
+            <a:endParaRPr lang="en-US" dirty="0"/>
+          </a:p>
+        </p:txBody>
+      </p:sp>
+      <p:sp>
+        <p:nvSpPr>
+          <p:cNvPr id="9" name="Text 7"/>
+          <p:cNvSpPr/>
+          <p:nvPr/>
+        </p:nvSpPr>
+        <p:spPr>
+          <a:xfrm>
+            <a:off x="677098" y="6055519"/>
+            <a:ext cx="728885" cy="260747"/>
+          </a:xfrm>
+          <a:prstGeom prst="rect">
+            <a:avLst/>
+          </a:prstGeom>
+          <a:noFill/>
+          <a:ln/>
+        </p:spPr>
+        <p:txBody>
+          <a:bodyPr wrap="none" lIns="0" tIns="0" rIns="0" bIns="0" rtlCol="0" anchor="t"/>
+          <a:lstStyle/>
+          <a:p>
+            <a:pPr algn="l" indent="0" marL="0">
+              <a:lnSpc>
+                <a:spcPts val="2053"/>
+              </a:lnSpc>
+              <a:buNone/>
+            </a:pPr>
+            <a:r>
+              <a:rPr lang="en-US" sz="1466" dirty="0">
+                <a:solidFill>
+                  <a:srgbClr val="7A7164"/>
+                </a:solidFill>
+                <a:latin typeface="Inter" pitchFamily="34" charset="0"/>
+                <a:ea typeface="Inter" pitchFamily="34" charset="-122"/>
+                <a:cs typeface="Inter" pitchFamily="34" charset="-120"/>
+              </a:rPr>
+              <a:t>01 / 06</a:t>
+            </a:r>
+            <a:endParaRPr lang="en-US" sz="1466" dirty="0"/>
+          </a:p>
+        </p:txBody>
+      </p:sp>
+      <p:sp>
+        <p:nvSpPr>
+          <p:cNvPr id="10" name="Text 8"/>
+          <p:cNvSpPr/>
+          <p:nvPr/>
+        </p:nvSpPr>
+        <p:spPr>
+          <a:xfrm>
+            <a:off x="4725655" y="6055519"/>
+            <a:ext cx="6786199" cy="260747"/>
+          </a:xfrm>
+          <a:prstGeom prst="rect">
+            <a:avLst/>
+          </a:prstGeom>
+          <a:noFill/>
+          <a:ln/>
+        </p:spPr>
+        <p:txBody>
           <a:bodyPr wrap="square" lIns="0" tIns="0" rIns="0" bIns="0" rtlCol="0" anchor="t">
             <a:normAutofit/>
           </a:bodyPr>
-          <a:lstStyle/>
-          <a:p>
-            <a:pPr algn="l" indent="0" marL="0">
-              <a:lnSpc>
-                <a:spcPts val="3200"/>
-              </a:lnSpc>
-              <a:buNone/>
-            </a:pPr>
-            <a:r>
-              <a:rPr lang="en-US" sz="2133" dirty="0">
-                <a:solidFill>
-                  <a:srgbClr val="1F1B16"/>
-                </a:solidFill>
-                <a:latin typeface="Inter" pitchFamily="34" charset="0"/>
-                <a:ea typeface="Inter" pitchFamily="34" charset="-122"/>
-                <a:cs typeface="Inter" pitchFamily="34" charset="-120"/>
-              </a:rPr>
-              <a:t>Metrics, logs and traces answer different questions and have different cost</a:t>
-            </a:r>
-            <a:endParaRPr lang="en-US" sz="2133" dirty="0"/>
-          </a:p>
-          <a:p>
-            <a:pPr algn="l" indent="0" marL="0">
-              <a:lnSpc>
-                <a:spcPts val="3200"/>
-              </a:lnSpc>
-              <a:buNone/>
-            </a:pPr>
-            <a:r>
-              <a:rPr lang="en-US" sz="2133" dirty="0">
-                <a:solidFill>
-                  <a:srgbClr val="1F1B16"/>
-                </a:solidFill>
-                <a:latin typeface="Inter" pitchFamily="34" charset="0"/>
-                <a:ea typeface="Inter" pitchFamily="34" charset="-122"/>
-                <a:cs typeface="Inter" pitchFamily="34" charset="-120"/>
-              </a:rPr>
-              <a:t>curves. One line item hides all three.</a:t>
-            </a:r>
-            <a:endParaRPr lang="en-US" sz="2133" dirty="0"/>
-          </a:p>
-        </p:txBody>
-      </p:sp>
-      <p:sp>
-        <p:nvSpPr>
-          <p:cNvPr id="7" name="Text 5"/>
-          <p:cNvSpPr/>
-          <p:nvPr/>
-        </p:nvSpPr>
-        <p:spPr>
-          <a:xfrm>
-            <a:off x="677098" y="5375870"/>
-            <a:ext cx="11051451" cy="260747"/>
-          </a:xfrm>
-          <a:prstGeom prst="rect">
-            <a:avLst/>
-          </a:prstGeom>
-          <a:noFill/>
-          <a:ln/>
-        </p:spPr>
-        <p:txBody>
-          <a:bodyPr wrap="none" lIns="0" tIns="0" rIns="0" bIns="0" rtlCol="0" anchor="t"/>
-          <a:lstStyle/>
-          <a:p>
-            <a:pPr algn="l" indent="0" marL="0">
-              <a:lnSpc>
-                <a:spcPts val="2053"/>
-              </a:lnSpc>
-              <a:spcBef>
-                <a:spcPts val="2690"/>
-              </a:spcBef>
-              <a:buNone/>
-            </a:pPr>
-            <a:r>
-              <a:rPr lang="en-US" sz="1466" dirty="0">
-                <a:solidFill>
-                  <a:srgbClr val="7A7164"/>
-                </a:solidFill>
-                <a:latin typeface="Inter" pitchFamily="34" charset="0"/>
-                <a:ea typeface="Inter" pitchFamily="34" charset="-122"/>
-                <a:cs typeface="Inter" pitchFamily="34" charset="-120"/>
-              </a:rPr>
-              <a:t>PRESENTER · TEAM</a:t>
-            </a:r>
-            <a:endParaRPr lang="en-US" sz="1466" dirty="0"/>
-          </a:p>
-        </p:txBody>
-      </p:sp>
-      <p:sp>
-        <p:nvSpPr>
-          <p:cNvPr id="8" name="Text 6"/>
-          <p:cNvSpPr/>
-          <p:nvPr/>
-        </p:nvSpPr>
-        <p:spPr>
-          <a:xfrm>
-            <a:off x="677098" y="5907484"/>
-            <a:ext cx="10834756" cy="12700"/>
-          </a:xfrm>
-          <a:prstGeom prst="rect">
-            <a:avLst/>
-          </a:prstGeom>
-          <a:solidFill>
-            <a:srgbClr val="DAD3C4"/>
-          </a:solidFill>
-          <a:ln/>
-        </p:spPr>
-        <p:txBody>
-          <a:bodyPr wrap="square" rtlCol="0" anchor="ctr"/>
-          <a:lstStyle/>
-          <a:p>
-            <a:pPr indent="0" marL="0">
-              <a:buNone/>
-            </a:pPr>
-            <a:endParaRPr lang="en-US" dirty="0"/>
-          </a:p>
-        </p:txBody>
-      </p:sp>
-      <p:sp>
-        <p:nvSpPr>
-          <p:cNvPr id="9" name="Text 7"/>
-          <p:cNvSpPr/>
-          <p:nvPr/>
-        </p:nvSpPr>
-        <p:spPr>
-          <a:xfrm>
-            <a:off x="677098" y="6055519"/>
-            <a:ext cx="728885" cy="260747"/>
-          </a:xfrm>
-          <a:prstGeom prst="rect">
-            <a:avLst/>
-          </a:prstGeom>
-          <a:noFill/>
-          <a:ln/>
-        </p:spPr>
-        <p:txBody>
-          <a:bodyPr wrap="none" lIns="0" tIns="0" rIns="0" bIns="0" rtlCol="0" anchor="t"/>
-          <a:lstStyle/>
-          <a:p>
-            <a:pPr algn="l" indent="0" marL="0">
-              <a:lnSpc>
-                <a:spcPts val="2053"/>
-              </a:lnSpc>
-              <a:buNone/>
-            </a:pPr>
-            <a:r>
-              <a:rPr lang="en-US" sz="1466" dirty="0">
-                <a:solidFill>
-                  <a:srgbClr val="7A7164"/>
-                </a:solidFill>
-                <a:latin typeface="Inter" pitchFamily="34" charset="0"/>
-                <a:ea typeface="Inter" pitchFamily="34" charset="-122"/>
-                <a:cs typeface="Inter" pitchFamily="34" charset="-120"/>
-              </a:rPr>
-              <a:t>01 / 06</a:t>
-            </a:r>
-            <a:endParaRPr lang="en-US" sz="1466" dirty="0"/>
-          </a:p>
-        </p:txBody>
-      </p:sp>
-      <p:sp>
-        <p:nvSpPr>
-          <p:cNvPr id="10" name="Text 8"/>
-          <p:cNvSpPr/>
-          <p:nvPr/>
-        </p:nvSpPr>
-        <p:spPr>
-          <a:xfrm>
-            <a:off x="4725655" y="6055519"/>
-            <a:ext cx="6786199" cy="260747"/>
-          </a:xfrm>
-          <a:prstGeom prst="rect">
-            <a:avLst/>
-          </a:prstGeom>
-          <a:noFill/>
-          <a:ln/>
-        </p:spPr>
-        <p:txBody>
-          <a:bodyPr wrap="none" lIns="0" tIns="0" rIns="0" bIns="0" rtlCol="0" anchor="t"/>
           <a:lstStyle/>
           <a:p>
             <a:pPr algn="r" indent="0" marL="0">
@@ -3110,7 +3108,9 @@
           <a:ln/>
         </p:spPr>
         <p:txBody>
-          <a:bodyPr wrap="none" lIns="0" tIns="0" rIns="0" bIns="0" rtlCol="0" anchor="t"/>
+          <a:bodyPr wrap="square" lIns="0" tIns="0" rIns="0" bIns="0" rtlCol="0" anchor="t">
+            <a:normAutofit/>
+          </a:bodyPr>
           <a:lstStyle/>
           <a:p>
             <a:pPr algn="r" indent="0" marL="0">
@@ -4029,7 +4029,9 @@
           <a:ln/>
         </p:spPr>
         <p:txBody>
-          <a:bodyPr wrap="none" lIns="0" tIns="0" rIns="0" bIns="0" rtlCol="0" anchor="t"/>
+          <a:bodyPr wrap="square" lIns="0" tIns="0" rIns="0" bIns="0" rtlCol="0" anchor="t">
+            <a:normAutofit/>
+          </a:bodyPr>
           <a:lstStyle/>
           <a:p>
             <a:pPr algn="r" indent="0" marL="0">
@@ -4898,143 +4900,143 @@
           <a:ln/>
         </p:spPr>
         <p:txBody>
+          <a:bodyPr wrap="none" lIns="0" tIns="0" rIns="0" bIns="0" rtlCol="0" anchor="t"/>
+          <a:lstStyle/>
+          <a:p>
+            <a:pPr algn="l" indent="0" marL="0">
+              <a:lnSpc>
+                <a:spcPts val="3200"/>
+              </a:lnSpc>
+              <a:buNone/>
+            </a:pPr>
+            <a:r>
+              <a:rPr lang="en-US" sz="2133" dirty="0">
+                <a:solidFill>
+                  <a:srgbClr val="1F1B16"/>
+                </a:solidFill>
+                <a:latin typeface="Inter" pitchFamily="34" charset="0"/>
+                <a:ea typeface="Inter" pitchFamily="34" charset="-122"/>
+                <a:cs typeface="Inter" pitchFamily="34" charset="-120"/>
+              </a:rPr>
+              <a:t>You find out which bet you took at 03:00, from a query that returns nothing.</a:t>
+            </a:r>
+            <a:endParaRPr lang="en-US" sz="2133" dirty="0"/>
+          </a:p>
+          <a:p>
+            <a:pPr algn="l" indent="0" marL="0">
+              <a:lnSpc>
+                <a:spcPts val="3200"/>
+              </a:lnSpc>
+              <a:buNone/>
+            </a:pPr>
+            <a:r>
+              <a:rPr lang="en-US" sz="2133" dirty="0">
+                <a:solidFill>
+                  <a:srgbClr val="1F1B16"/>
+                </a:solidFill>
+                <a:latin typeface="Inter" pitchFamily="34" charset="0"/>
+                <a:ea typeface="Inter" pitchFamily="34" charset="-122"/>
+                <a:cs typeface="Inter" pitchFamily="34" charset="-120"/>
+              </a:rPr>
+              <a:t>Nobody called it a bet when it was placed.</a:t>
+            </a:r>
+            <a:endParaRPr lang="en-US" sz="2133" dirty="0"/>
+          </a:p>
+        </p:txBody>
+      </p:sp>
+      <p:sp>
+        <p:nvSpPr>
+          <p:cNvPr id="26" name="Text 24"/>
+          <p:cNvSpPr/>
+          <p:nvPr/>
+        </p:nvSpPr>
+        <p:spPr>
+          <a:xfrm>
+            <a:off x="677098" y="5907484"/>
+            <a:ext cx="10834756" cy="12700"/>
+          </a:xfrm>
+          <a:prstGeom prst="rect">
+            <a:avLst/>
+          </a:prstGeom>
+          <a:solidFill>
+            <a:srgbClr val="DAD3C4"/>
+          </a:solidFill>
+          <a:ln/>
+        </p:spPr>
+        <p:txBody>
+          <a:bodyPr wrap="square" rtlCol="0" anchor="ctr"/>
+          <a:lstStyle/>
+          <a:p>
+            <a:pPr indent="0" marL="0">
+              <a:buNone/>
+            </a:pPr>
+            <a:endParaRPr lang="en-US" dirty="0"/>
+          </a:p>
+        </p:txBody>
+      </p:sp>
+      <p:sp>
+        <p:nvSpPr>
+          <p:cNvPr id="27" name="Text 25"/>
+          <p:cNvSpPr/>
+          <p:nvPr/>
+        </p:nvSpPr>
+        <p:spPr>
+          <a:xfrm>
+            <a:off x="677098" y="6055519"/>
+            <a:ext cx="767737" cy="260747"/>
+          </a:xfrm>
+          <a:prstGeom prst="rect">
+            <a:avLst/>
+          </a:prstGeom>
+          <a:noFill/>
+          <a:ln/>
+        </p:spPr>
+        <p:txBody>
+          <a:bodyPr wrap="none" lIns="0" tIns="0" rIns="0" bIns="0" rtlCol="0" anchor="t"/>
+          <a:lstStyle/>
+          <a:p>
+            <a:pPr algn="l" indent="0" marL="0">
+              <a:lnSpc>
+                <a:spcPts val="2053"/>
+              </a:lnSpc>
+              <a:buNone/>
+            </a:pPr>
+            <a:r>
+              <a:rPr lang="en-US" sz="1466" dirty="0">
+                <a:solidFill>
+                  <a:srgbClr val="7A7164"/>
+                </a:solidFill>
+                <a:latin typeface="Inter" pitchFamily="34" charset="0"/>
+                <a:ea typeface="Inter" pitchFamily="34" charset="-122"/>
+                <a:cs typeface="Inter" pitchFamily="34" charset="-120"/>
+              </a:rPr>
+              <a:t>04 / 06</a:t>
+            </a:r>
+            <a:endParaRPr lang="en-US" sz="1466" dirty="0"/>
+          </a:p>
+        </p:txBody>
+      </p:sp>
+      <p:sp>
+        <p:nvSpPr>
+          <p:cNvPr id="28" name="Text 26"/>
+          <p:cNvSpPr/>
+          <p:nvPr/>
+        </p:nvSpPr>
+        <p:spPr>
+          <a:xfrm>
+            <a:off x="4725655" y="6055519"/>
+            <a:ext cx="6786199" cy="260747"/>
+          </a:xfrm>
+          <a:prstGeom prst="rect">
+            <a:avLst/>
+          </a:prstGeom>
+          <a:noFill/>
+          <a:ln/>
+        </p:spPr>
+        <p:txBody>
           <a:bodyPr wrap="square" lIns="0" tIns="0" rIns="0" bIns="0" rtlCol="0" anchor="t">
             <a:normAutofit/>
           </a:bodyPr>
-          <a:lstStyle/>
-          <a:p>
-            <a:pPr algn="l" indent="0" marL="0">
-              <a:lnSpc>
-                <a:spcPts val="3200"/>
-              </a:lnSpc>
-              <a:buNone/>
-            </a:pPr>
-            <a:r>
-              <a:rPr lang="en-US" sz="2133" dirty="0">
-                <a:solidFill>
-                  <a:srgbClr val="1F1B16"/>
-                </a:solidFill>
-                <a:latin typeface="Inter" pitchFamily="34" charset="0"/>
-                <a:ea typeface="Inter" pitchFamily="34" charset="-122"/>
-                <a:cs typeface="Inter" pitchFamily="34" charset="-120"/>
-              </a:rPr>
-              <a:t>You find out which bet you took at 03:00, from a query that returns nothing.</a:t>
-            </a:r>
-            <a:endParaRPr lang="en-US" sz="2133" dirty="0"/>
-          </a:p>
-          <a:p>
-            <a:pPr algn="l" indent="0" marL="0">
-              <a:lnSpc>
-                <a:spcPts val="3200"/>
-              </a:lnSpc>
-              <a:buNone/>
-            </a:pPr>
-            <a:r>
-              <a:rPr lang="en-US" sz="2133" dirty="0">
-                <a:solidFill>
-                  <a:srgbClr val="1F1B16"/>
-                </a:solidFill>
-                <a:latin typeface="Inter" pitchFamily="34" charset="0"/>
-                <a:ea typeface="Inter" pitchFamily="34" charset="-122"/>
-                <a:cs typeface="Inter" pitchFamily="34" charset="-120"/>
-              </a:rPr>
-              <a:t>Nobody called it a bet when it was placed.</a:t>
-            </a:r>
-            <a:endParaRPr lang="en-US" sz="2133" dirty="0"/>
-          </a:p>
-        </p:txBody>
-      </p:sp>
-      <p:sp>
-        <p:nvSpPr>
-          <p:cNvPr id="26" name="Text 24"/>
-          <p:cNvSpPr/>
-          <p:nvPr/>
-        </p:nvSpPr>
-        <p:spPr>
-          <a:xfrm>
-            <a:off x="677098" y="5907484"/>
-            <a:ext cx="10834756" cy="12700"/>
-          </a:xfrm>
-          <a:prstGeom prst="rect">
-            <a:avLst/>
-          </a:prstGeom>
-          <a:solidFill>
-            <a:srgbClr val="DAD3C4"/>
-          </a:solidFill>
-          <a:ln/>
-        </p:spPr>
-        <p:txBody>
-          <a:bodyPr wrap="square" rtlCol="0" anchor="ctr"/>
-          <a:lstStyle/>
-          <a:p>
-            <a:pPr indent="0" marL="0">
-              <a:buNone/>
-            </a:pPr>
-            <a:endParaRPr lang="en-US" dirty="0"/>
-          </a:p>
-        </p:txBody>
-      </p:sp>
-      <p:sp>
-        <p:nvSpPr>
-          <p:cNvPr id="27" name="Text 25"/>
-          <p:cNvSpPr/>
-          <p:nvPr/>
-        </p:nvSpPr>
-        <p:spPr>
-          <a:xfrm>
-            <a:off x="677098" y="6055519"/>
-            <a:ext cx="767737" cy="260747"/>
-          </a:xfrm>
-          <a:prstGeom prst="rect">
-            <a:avLst/>
-          </a:prstGeom>
-          <a:noFill/>
-          <a:ln/>
-        </p:spPr>
-        <p:txBody>
-          <a:bodyPr wrap="none" lIns="0" tIns="0" rIns="0" bIns="0" rtlCol="0" anchor="t"/>
-          <a:lstStyle/>
-          <a:p>
-            <a:pPr algn="l" indent="0" marL="0">
-              <a:lnSpc>
-                <a:spcPts val="2053"/>
-              </a:lnSpc>
-              <a:buNone/>
-            </a:pPr>
-            <a:r>
-              <a:rPr lang="en-US" sz="1466" dirty="0">
-                <a:solidFill>
-                  <a:srgbClr val="7A7164"/>
-                </a:solidFill>
-                <a:latin typeface="Inter" pitchFamily="34" charset="0"/>
-                <a:ea typeface="Inter" pitchFamily="34" charset="-122"/>
-                <a:cs typeface="Inter" pitchFamily="34" charset="-120"/>
-              </a:rPr>
-              <a:t>04 / 06</a:t>
-            </a:r>
-            <a:endParaRPr lang="en-US" sz="1466" dirty="0"/>
-          </a:p>
-        </p:txBody>
-      </p:sp>
-      <p:sp>
-        <p:nvSpPr>
-          <p:cNvPr id="28" name="Text 26"/>
-          <p:cNvSpPr/>
-          <p:nvPr/>
-        </p:nvSpPr>
-        <p:spPr>
-          <a:xfrm>
-            <a:off x="4725655" y="6055519"/>
-            <a:ext cx="6786199" cy="260747"/>
-          </a:xfrm>
-          <a:prstGeom prst="rect">
-            <a:avLst/>
-          </a:prstGeom>
-          <a:noFill/>
-          <a:ln/>
-        </p:spPr>
-        <p:txBody>
-          <a:bodyPr wrap="none" lIns="0" tIns="0" rIns="0" bIns="0" rtlCol="0" anchor="t"/>
           <a:lstStyle/>
           <a:p>
             <a:pPr algn="r" indent="0" marL="0">
@@ -5345,7 +5347,7 @@
           <a:ln/>
         </p:spPr>
         <p:txBody>
-          <a:bodyPr wrap="square" lIns="0" tIns="0" rIns="0" bIns="101587" rtlCol="0" anchor="t"/>
+          <a:bodyPr wrap="none" lIns="0" tIns="0" rIns="0" bIns="101587" rtlCol="0" anchor="t"/>
           <a:lstStyle/>
           <a:p>
             <a:pPr algn="l" indent="0" marL="0">
@@ -5431,7 +5433,7 @@
           <a:ln/>
         </p:spPr>
         <p:txBody>
-          <a:bodyPr wrap="square" lIns="0" tIns="0" rIns="0" bIns="101587" rtlCol="0" anchor="t"/>
+          <a:bodyPr wrap="none" lIns="0" tIns="0" rIns="0" bIns="101587" rtlCol="0" anchor="t"/>
           <a:lstStyle/>
           <a:p>
             <a:pPr algn="l" indent="0" marL="0">
@@ -5517,7 +5519,7 @@
           <a:ln/>
         </p:spPr>
         <p:txBody>
-          <a:bodyPr wrap="square" lIns="0" tIns="0" rIns="0" bIns="101587" rtlCol="0" anchor="t"/>
+          <a:bodyPr wrap="none" lIns="0" tIns="0" rIns="0" bIns="101587" rtlCol="0" anchor="t"/>
           <a:lstStyle/>
           <a:p>
             <a:pPr algn="l" indent="0" marL="0">
@@ -5717,7 +5719,9 @@
           <a:ln/>
         </p:spPr>
         <p:txBody>
-          <a:bodyPr wrap="none" lIns="0" tIns="0" rIns="0" bIns="0" rtlCol="0" anchor="t"/>
+          <a:bodyPr wrap="square" lIns="0" tIns="0" rIns="0" bIns="0" rtlCol="0" anchor="t">
+            <a:normAutofit/>
+          </a:bodyPr>
           <a:lstStyle/>
           <a:p>
             <a:pPr algn="r" indent="0" marL="0">
@@ -5863,9 +5867,7 @@
           <a:ln/>
         </p:spPr>
         <p:txBody>
-          <a:bodyPr wrap="square" lIns="0" tIns="0" rIns="0" bIns="0" rtlCol="0" anchor="t">
-            <a:normAutofit/>
-          </a:bodyPr>
+          <a:bodyPr wrap="none" lIns="0" tIns="0" rIns="0" bIns="0" rtlCol="0" anchor="t"/>
           <a:lstStyle/>
           <a:p>
             <a:pPr algn="l" indent="0" marL="0">
@@ -6115,7 +6117,9 @@
           <a:ln/>
         </p:spPr>
         <p:txBody>
-          <a:bodyPr wrap="none" lIns="0" tIns="0" rIns="0" bIns="0" rtlCol="0" anchor="t"/>
+          <a:bodyPr wrap="square" lIns="0" tIns="0" rIns="0" bIns="0" rtlCol="0" anchor="t">
+            <a:normAutofit/>
+          </a:bodyPr>
           <a:lstStyle/>
           <a:p>
             <a:pPr algn="l" indent="0" marL="0">
@@ -6684,7 +6688,9 @@
           <a:ln/>
         </p:spPr>
         <p:txBody>
-          <a:bodyPr wrap="none" lIns="0" tIns="0" rIns="0" bIns="0" rtlCol="0" anchor="t"/>
+          <a:bodyPr wrap="square" lIns="0" tIns="0" rIns="0" bIns="0" rtlCol="0" anchor="t">
+            <a:normAutofit/>
+          </a:bodyPr>
           <a:lstStyle/>
           <a:p>
             <a:pPr algn="r" indent="0" marL="0">
